--- a/Presentation/Thesis_Defense.pptx
+++ b/Presentation/Thesis_Defense.pptx
@@ -25,6 +25,9 @@
     <p:sldId id="273" r:id="rId24"/>
     <p:sldId id="274" r:id="rId25"/>
     <p:sldId id="275" r:id="rId26"/>
+    <p:sldId id="276" r:id="rId27"/>
+    <p:sldId id="277" r:id="rId28"/>
+    <p:sldId id="278" r:id="rId29"/>
   </p:sldIdLst>
   <p:sldSz cx="12191695" cy="6858000" type="screen4x3"/>
   <p:notesSz cx="6858000" cy="9144000"/>
@@ -3239,9 +3242,55 @@
           </a:p>
         </p:txBody>
       </p:sp>
+      <p:sp>
+        <p:nvSpPr>
+          <p:cNvPr id="5" name="Rounded Rectangle 4"/>
+          <p:cNvSpPr/>
+          <p:nvPr/>
+        </p:nvSpPr>
+        <p:spPr>
+          <a:xfrm>
+            <a:off x="292608" y="256032"/>
+            <a:ext cx="4285722" cy="1042416"/>
+          </a:xfrm>
+          <a:prstGeom prst="roundRect">
+            <a:avLst/>
+          </a:prstGeom>
+          <a:solidFill>
+            <a:srgbClr val="FFFFFF"/>
+          </a:solidFill>
+          <a:ln>
+            <a:solidFill>
+              <a:srgbClr val="FFFFFF"/>
+            </a:solidFill>
+          </a:ln>
+          <a:effectLst/>
+        </p:spPr>
+        <p:style>
+          <a:lnRef idx="1">
+            <a:schemeClr val="accent1"/>
+          </a:lnRef>
+          <a:fillRef idx="3">
+            <a:schemeClr val="accent1"/>
+          </a:fillRef>
+          <a:effectRef idx="2">
+            <a:schemeClr val="accent1"/>
+          </a:effectRef>
+          <a:fontRef idx="minor">
+            <a:schemeClr val="lt1"/>
+          </a:fontRef>
+        </p:style>
+        <p:txBody>
+          <a:bodyPr rtlCol="0" anchor="ctr"/>
+          <a:lstStyle/>
+          <a:p>
+            <a:pPr algn="ctr"/>
+          </a:p>
+        </p:txBody>
+      </p:sp>
       <p:pic>
         <p:nvPicPr>
-          <p:cNvPr id="5" name="Picture 4" descr="cu_logo_extracted.png"/>
+          <p:cNvPr id="6" name="Picture 5" descr="cu_logo_extracted.png"/>
           <p:cNvPicPr>
             <a:picLocks noChangeAspect="1"/>
           </p:cNvPicPr>
@@ -3265,7 +3314,7 @@
       </p:pic>
       <p:sp>
         <p:nvSpPr>
-          <p:cNvPr id="6" name="TextBox 5"/>
+          <p:cNvPr id="7" name="TextBox 6"/>
           <p:cNvSpPr txBox="1"/>
           <p:nvPr/>
         </p:nvSpPr>
@@ -3301,7 +3350,7 @@
       </p:sp>
       <p:sp>
         <p:nvSpPr>
-          <p:cNvPr id="7" name="TextBox 6"/>
+          <p:cNvPr id="8" name="TextBox 7"/>
           <p:cNvSpPr txBox="1"/>
           <p:nvPr/>
         </p:nvSpPr>
@@ -3336,7 +3385,7 @@
       </p:sp>
       <p:sp>
         <p:nvSpPr>
-          <p:cNvPr id="8" name="TextBox 7"/>
+          <p:cNvPr id="9" name="TextBox 8"/>
           <p:cNvSpPr txBox="1"/>
           <p:nvPr/>
         </p:nvSpPr>
@@ -3371,7 +3420,7 @@
       </p:sp>
       <p:sp>
         <p:nvSpPr>
-          <p:cNvPr id="9" name="TextBox 8"/>
+          <p:cNvPr id="10" name="TextBox 9"/>
           <p:cNvSpPr txBox="1"/>
           <p:nvPr/>
         </p:nvSpPr>
@@ -3406,7 +3455,7 @@
       </p:sp>
       <p:sp>
         <p:nvSpPr>
-          <p:cNvPr id="10" name="TextBox 9"/>
+          <p:cNvPr id="11" name="TextBox 10"/>
           <p:cNvSpPr txBox="1"/>
           <p:nvPr/>
         </p:nvSpPr>
@@ -3619,7 +3668,7 @@
                 </a:solidFill>
                 <a:latin typeface="Segoe UI"/>
               </a:rPr>
-              <a:t>Cascade: Blocked by Overconfidence</a:t>
+              <a:t>Cascade: Why not ask the small model first and only escalate when needed?</a:t>
             </a:r>
           </a:p>
         </p:txBody>
@@ -3654,7 +3703,7 @@
                 </a:solidFill>
                 <a:latin typeface="Segoe UI"/>
               </a:rPr>
-              <a:t>10 / 15</a:t>
+              <a:t>10 / 16</a:t>
             </a:r>
           </a:p>
         </p:txBody>
@@ -4209,33 +4258,1612 @@
           </a:p>
         </p:txBody>
       </p:sp>
-      <p:pic>
-        <p:nvPicPr>
-          <p:cNvPr id="21" name="Picture 20" descr="chartC2_cascade_dual_heatmap.png"/>
-          <p:cNvPicPr>
-            <a:picLocks noChangeAspect="1"/>
-          </p:cNvPicPr>
-          <p:nvPr/>
-        </p:nvPicPr>
-        <p:blipFill>
-          <a:blip r:embed="rId2"/>
-          <a:stretch>
-            <a:fillRect/>
-          </a:stretch>
-        </p:blipFill>
-        <p:spPr>
-          <a:xfrm>
-            <a:off x="4663440" y="2045494"/>
-            <a:ext cx="7315200" cy="2492691"/>
+      <p:graphicFrame>
+        <p:nvGraphicFramePr>
+          <p:cNvPr id="21" name="Table 20"/>
+          <p:cNvGraphicFramePr>
+            <a:graphicFrameLocks noGrp="1"/>
+          </p:cNvGraphicFramePr>
+          <p:nvPr/>
+        </p:nvGraphicFramePr>
+        <p:xfrm>
+          <a:off x="4983480" y="1874519"/>
+          <a:ext cx="6812280" cy="2240280"/>
+        </p:xfrm>
+        <a:graphic>
+          <a:graphicData uri="http://schemas.openxmlformats.org/drawingml/2006/table">
+            <a:tbl>
+              <a:tblPr firstRow="0" bandRow="0" firstCol="0"/>
+              <a:tblGrid>
+                <a:gridCol w="2103120"/>
+                <a:gridCol w="713232"/>
+                <a:gridCol w="713232"/>
+                <a:gridCol w="713232"/>
+                <a:gridCol w="1280160"/>
+                <a:gridCol w="1289304"/>
+              </a:tblGrid>
+              <a:tr h="411480">
+                <a:tc>
+                  <a:txBody>
+                    <a:bodyPr wrap="square"/>
+                    <a:lstStyle/>
+                    <a:p>
+                      <a:pPr algn="ctr"/>
+                      <a:r>
+                        <a:rPr sz="1100" b="1" i="0">
+                          <a:solidFill>
+                            <a:srgbClr val="FFFFFF"/>
+                          </a:solidFill>
+                          <a:latin typeface="Segoe UI"/>
+                        </a:rPr>
+                        <a:t>Configuration</a:t>
+                      </a:r>
+                    </a:p>
+                  </a:txBody>
+                  <a:tcPr marL="27432" marR="27432" marT="18288" marB="18288" anchor="ctr">
+                    <a:solidFill>
+                      <a:srgbClr val="0B1F4B"/>
+                    </a:solidFill>
+                    <a:lnL w="12700" cap="flat" cmpd="sng" algn="ctr">
+                      <a:solidFill>
+                        <a:srgbClr val="0B1F4B"/>
+                      </a:solidFill>
+                      <a:prstDash val="solid"/>
+                      <a:round/>
+                    </a:lnL>
+                    <a:lnR w="12700" cap="flat" cmpd="sng" algn="ctr">
+                      <a:solidFill>
+                        <a:srgbClr val="0B1F4B"/>
+                      </a:solidFill>
+                      <a:prstDash val="solid"/>
+                      <a:round/>
+                    </a:lnR>
+                    <a:lnT w="12700" cap="flat" cmpd="sng" algn="ctr">
+                      <a:solidFill>
+                        <a:srgbClr val="0B1F4B"/>
+                      </a:solidFill>
+                      <a:prstDash val="solid"/>
+                      <a:round/>
+                    </a:lnT>
+                    <a:lnB w="12700" cap="flat" cmpd="sng" algn="ctr">
+                      <a:solidFill>
+                        <a:srgbClr val="0B1F4B"/>
+                      </a:solidFill>
+                      <a:prstDash val="solid"/>
+                      <a:round/>
+                    </a:lnB>
+                  </a:tcPr>
+                </a:tc>
+                <a:tc>
+                  <a:txBody>
+                    <a:bodyPr wrap="square"/>
+                    <a:lstStyle/>
+                    <a:p>
+                      <a:pPr algn="ctr"/>
+                      <a:r>
+                        <a:rPr sz="1100" b="1" i="0">
+                          <a:solidFill>
+                            <a:srgbClr val="FFFFFF"/>
+                          </a:solidFill>
+                          <a:latin typeface="Segoe UI"/>
+                        </a:rPr>
+                        <a:t>T=60</a:t>
+                      </a:r>
+                    </a:p>
+                  </a:txBody>
+                  <a:tcPr marL="27432" marR="27432" marT="18288" marB="18288" anchor="ctr">
+                    <a:solidFill>
+                      <a:srgbClr val="0B1F4B"/>
+                    </a:solidFill>
+                    <a:lnL w="12700" cap="flat" cmpd="sng" algn="ctr">
+                      <a:solidFill>
+                        <a:srgbClr val="0B1F4B"/>
+                      </a:solidFill>
+                      <a:prstDash val="solid"/>
+                      <a:round/>
+                    </a:lnL>
+                    <a:lnR w="12700" cap="flat" cmpd="sng" algn="ctr">
+                      <a:solidFill>
+                        <a:srgbClr val="0B1F4B"/>
+                      </a:solidFill>
+                      <a:prstDash val="solid"/>
+                      <a:round/>
+                    </a:lnR>
+                    <a:lnT w="12700" cap="flat" cmpd="sng" algn="ctr">
+                      <a:solidFill>
+                        <a:srgbClr val="0B1F4B"/>
+                      </a:solidFill>
+                      <a:prstDash val="solid"/>
+                      <a:round/>
+                    </a:lnT>
+                    <a:lnB w="12700" cap="flat" cmpd="sng" algn="ctr">
+                      <a:solidFill>
+                        <a:srgbClr val="0B1F4B"/>
+                      </a:solidFill>
+                      <a:prstDash val="solid"/>
+                      <a:round/>
+                    </a:lnB>
+                  </a:tcPr>
+                </a:tc>
+                <a:tc>
+                  <a:txBody>
+                    <a:bodyPr wrap="square"/>
+                    <a:lstStyle/>
+                    <a:p>
+                      <a:pPr algn="ctr"/>
+                      <a:r>
+                        <a:rPr sz="1100" b="1" i="0">
+                          <a:solidFill>
+                            <a:srgbClr val="FFFFFF"/>
+                          </a:solidFill>
+                          <a:latin typeface="Segoe UI"/>
+                        </a:rPr>
+                        <a:t>T=75</a:t>
+                      </a:r>
+                    </a:p>
+                  </a:txBody>
+                  <a:tcPr marL="27432" marR="27432" marT="18288" marB="18288" anchor="ctr">
+                    <a:solidFill>
+                      <a:srgbClr val="0B1F4B"/>
+                    </a:solidFill>
+                    <a:lnL w="12700" cap="flat" cmpd="sng" algn="ctr">
+                      <a:solidFill>
+                        <a:srgbClr val="0B1F4B"/>
+                      </a:solidFill>
+                      <a:prstDash val="solid"/>
+                      <a:round/>
+                    </a:lnL>
+                    <a:lnR w="12700" cap="flat" cmpd="sng" algn="ctr">
+                      <a:solidFill>
+                        <a:srgbClr val="0B1F4B"/>
+                      </a:solidFill>
+                      <a:prstDash val="solid"/>
+                      <a:round/>
+                    </a:lnR>
+                    <a:lnT w="12700" cap="flat" cmpd="sng" algn="ctr">
+                      <a:solidFill>
+                        <a:srgbClr val="0B1F4B"/>
+                      </a:solidFill>
+                      <a:prstDash val="solid"/>
+                      <a:round/>
+                    </a:lnT>
+                    <a:lnB w="12700" cap="flat" cmpd="sng" algn="ctr">
+                      <a:solidFill>
+                        <a:srgbClr val="0B1F4B"/>
+                      </a:solidFill>
+                      <a:prstDash val="solid"/>
+                      <a:round/>
+                    </a:lnB>
+                  </a:tcPr>
+                </a:tc>
+                <a:tc>
+                  <a:txBody>
+                    <a:bodyPr wrap="square"/>
+                    <a:lstStyle/>
+                    <a:p>
+                      <a:pPr algn="ctr"/>
+                      <a:r>
+                        <a:rPr sz="1100" b="1" i="0">
+                          <a:solidFill>
+                            <a:srgbClr val="FFFFFF"/>
+                          </a:solidFill>
+                          <a:latin typeface="Segoe UI"/>
+                        </a:rPr>
+                        <a:t>T=90</a:t>
+                      </a:r>
+                    </a:p>
+                  </a:txBody>
+                  <a:tcPr marL="27432" marR="27432" marT="18288" marB="18288" anchor="ctr">
+                    <a:solidFill>
+                      <a:srgbClr val="0B1F4B"/>
+                    </a:solidFill>
+                    <a:lnL w="12700" cap="flat" cmpd="sng" algn="ctr">
+                      <a:solidFill>
+                        <a:srgbClr val="0B1F4B"/>
+                      </a:solidFill>
+                      <a:prstDash val="solid"/>
+                      <a:round/>
+                    </a:lnL>
+                    <a:lnR w="12700" cap="flat" cmpd="sng" algn="ctr">
+                      <a:solidFill>
+                        <a:srgbClr val="0B1F4B"/>
+                      </a:solidFill>
+                      <a:prstDash val="solid"/>
+                      <a:round/>
+                    </a:lnR>
+                    <a:lnT w="12700" cap="flat" cmpd="sng" algn="ctr">
+                      <a:solidFill>
+                        <a:srgbClr val="0B1F4B"/>
+                      </a:solidFill>
+                      <a:prstDash val="solid"/>
+                      <a:round/>
+                    </a:lnT>
+                    <a:lnB w="12700" cap="flat" cmpd="sng" algn="ctr">
+                      <a:solidFill>
+                        <a:srgbClr val="0B1F4B"/>
+                      </a:solidFill>
+                      <a:prstDash val="solid"/>
+                      <a:round/>
+                    </a:lnB>
+                  </a:tcPr>
+                </a:tc>
+                <a:tc>
+                  <a:txBody>
+                    <a:bodyPr wrap="square"/>
+                    <a:lstStyle/>
+                    <a:p>
+                      <a:pPr algn="ctr"/>
+                      <a:r>
+                        <a:rPr sz="1100" b="1" i="0">
+                          <a:solidFill>
+                            <a:srgbClr val="FFFFFF"/>
+                          </a:solidFill>
+                          <a:latin typeface="Segoe UI"/>
+                        </a:rPr>
+                        <a:t>Small alone</a:t>
+                      </a:r>
+                    </a:p>
+                  </a:txBody>
+                  <a:tcPr marL="27432" marR="27432" marT="18288" marB="18288" anchor="ctr">
+                    <a:solidFill>
+                      <a:srgbClr val="0B1F4B"/>
+                    </a:solidFill>
+                    <a:lnL w="12700" cap="flat" cmpd="sng" algn="ctr">
+                      <a:solidFill>
+                        <a:srgbClr val="0B1F4B"/>
+                      </a:solidFill>
+                      <a:prstDash val="solid"/>
+                      <a:round/>
+                    </a:lnL>
+                    <a:lnR w="12700" cap="flat" cmpd="sng" algn="ctr">
+                      <a:solidFill>
+                        <a:srgbClr val="0B1F4B"/>
+                      </a:solidFill>
+                      <a:prstDash val="solid"/>
+                      <a:round/>
+                    </a:lnR>
+                    <a:lnT w="12700" cap="flat" cmpd="sng" algn="ctr">
+                      <a:solidFill>
+                        <a:srgbClr val="0B1F4B"/>
+                      </a:solidFill>
+                      <a:prstDash val="solid"/>
+                      <a:round/>
+                    </a:lnT>
+                    <a:lnB w="12700" cap="flat" cmpd="sng" algn="ctr">
+                      <a:solidFill>
+                        <a:srgbClr val="0B1F4B"/>
+                      </a:solidFill>
+                      <a:prstDash val="solid"/>
+                      <a:round/>
+                    </a:lnB>
+                  </a:tcPr>
+                </a:tc>
+                <a:tc>
+                  <a:txBody>
+                    <a:bodyPr wrap="square"/>
+                    <a:lstStyle/>
+                    <a:p>
+                      <a:pPr algn="ctr"/>
+                      <a:r>
+                        <a:rPr sz="1100" b="1" i="0">
+                          <a:solidFill>
+                            <a:srgbClr val="FFFFFF"/>
+                          </a:solidFill>
+                          <a:latin typeface="Segoe UI"/>
+                        </a:rPr>
+                        <a:t>Large alone</a:t>
+                      </a:r>
+                    </a:p>
+                  </a:txBody>
+                  <a:tcPr marL="27432" marR="27432" marT="18288" marB="18288" anchor="ctr">
+                    <a:solidFill>
+                      <a:srgbClr val="0B1F4B"/>
+                    </a:solidFill>
+                    <a:lnL w="12700" cap="flat" cmpd="sng" algn="ctr">
+                      <a:solidFill>
+                        <a:srgbClr val="0B1F4B"/>
+                      </a:solidFill>
+                      <a:prstDash val="solid"/>
+                      <a:round/>
+                    </a:lnL>
+                    <a:lnR w="12700" cap="flat" cmpd="sng" algn="ctr">
+                      <a:solidFill>
+                        <a:srgbClr val="0B1F4B"/>
+                      </a:solidFill>
+                      <a:prstDash val="solid"/>
+                      <a:round/>
+                    </a:lnR>
+                    <a:lnT w="12700" cap="flat" cmpd="sng" algn="ctr">
+                      <a:solidFill>
+                        <a:srgbClr val="0B1F4B"/>
+                      </a:solidFill>
+                      <a:prstDash val="solid"/>
+                      <a:round/>
+                    </a:lnT>
+                    <a:lnB w="12700" cap="flat" cmpd="sng" algn="ctr">
+                      <a:solidFill>
+                        <a:srgbClr val="0B1F4B"/>
+                      </a:solidFill>
+                      <a:prstDash val="solid"/>
+                      <a:round/>
+                    </a:lnB>
+                  </a:tcPr>
+                </a:tc>
+              </a:tr>
+              <a:tr h="457200">
+                <a:tc>
+                  <a:txBody>
+                    <a:bodyPr wrap="square"/>
+                    <a:lstStyle/>
+                    <a:p>
+                      <a:pPr algn="ctr"/>
+                      <a:r>
+                        <a:rPr sz="1100" b="1" i="0">
+                          <a:solidFill>
+                            <a:srgbClr val="212121"/>
+                          </a:solidFill>
+                          <a:latin typeface="Segoe UI"/>
+                        </a:rPr>
+                        <a:t>gpt-4.1-mini → gpt-4.1</a:t>
+                      </a:r>
+                    </a:p>
+                  </a:txBody>
+                  <a:tcPr marL="27432" marR="27432" marT="18288" marB="18288" anchor="ctr">
+                    <a:solidFill>
+                      <a:srgbClr val="FFFFFF"/>
+                    </a:solidFill>
+                    <a:lnL w="12700" cap="flat" cmpd="sng" algn="ctr">
+                      <a:solidFill>
+                        <a:srgbClr val="0B1F4B"/>
+                      </a:solidFill>
+                      <a:prstDash val="solid"/>
+                      <a:round/>
+                    </a:lnL>
+                    <a:lnR w="12700" cap="flat" cmpd="sng" algn="ctr">
+                      <a:solidFill>
+                        <a:srgbClr val="0B1F4B"/>
+                      </a:solidFill>
+                      <a:prstDash val="solid"/>
+                      <a:round/>
+                    </a:lnR>
+                    <a:lnT w="12700" cap="flat" cmpd="sng" algn="ctr">
+                      <a:solidFill>
+                        <a:srgbClr val="0B1F4B"/>
+                      </a:solidFill>
+                      <a:prstDash val="solid"/>
+                      <a:round/>
+                    </a:lnT>
+                    <a:lnB w="12700" cap="flat" cmpd="sng" algn="ctr">
+                      <a:solidFill>
+                        <a:srgbClr val="0B1F4B"/>
+                      </a:solidFill>
+                      <a:prstDash val="solid"/>
+                      <a:round/>
+                    </a:lnB>
+                  </a:tcPr>
+                </a:tc>
+                <a:tc>
+                  <a:txBody>
+                    <a:bodyPr wrap="square"/>
+                    <a:lstStyle/>
+                    <a:p>
+                      <a:pPr algn="ctr"/>
+                      <a:r>
+                        <a:rPr sz="1100" b="0" i="0">
+                          <a:solidFill>
+                            <a:srgbClr val="212121"/>
+                          </a:solidFill>
+                          <a:latin typeface="Segoe UI"/>
+                        </a:rPr>
+                        <a:t>−0.601</a:t>
+                      </a:r>
+                    </a:p>
+                  </a:txBody>
+                  <a:tcPr marL="27432" marR="27432" marT="18288" marB="18288" anchor="ctr">
+                    <a:solidFill>
+                      <a:srgbClr val="FFFFFF"/>
+                    </a:solidFill>
+                    <a:lnL w="12700" cap="flat" cmpd="sng" algn="ctr">
+                      <a:solidFill>
+                        <a:srgbClr val="0B1F4B"/>
+                      </a:solidFill>
+                      <a:prstDash val="solid"/>
+                      <a:round/>
+                    </a:lnL>
+                    <a:lnR w="12700" cap="flat" cmpd="sng" algn="ctr">
+                      <a:solidFill>
+                        <a:srgbClr val="0B1F4B"/>
+                      </a:solidFill>
+                      <a:prstDash val="solid"/>
+                      <a:round/>
+                    </a:lnR>
+                    <a:lnT w="12700" cap="flat" cmpd="sng" algn="ctr">
+                      <a:solidFill>
+                        <a:srgbClr val="0B1F4B"/>
+                      </a:solidFill>
+                      <a:prstDash val="solid"/>
+                      <a:round/>
+                    </a:lnT>
+                    <a:lnB w="12700" cap="flat" cmpd="sng" algn="ctr">
+                      <a:solidFill>
+                        <a:srgbClr val="0B1F4B"/>
+                      </a:solidFill>
+                      <a:prstDash val="solid"/>
+                      <a:round/>
+                    </a:lnB>
+                  </a:tcPr>
+                </a:tc>
+                <a:tc>
+                  <a:txBody>
+                    <a:bodyPr wrap="square"/>
+                    <a:lstStyle/>
+                    <a:p>
+                      <a:pPr algn="ctr"/>
+                      <a:r>
+                        <a:rPr sz="1100" b="0" i="0">
+                          <a:solidFill>
+                            <a:srgbClr val="212121"/>
+                          </a:solidFill>
+                          <a:latin typeface="Segoe UI"/>
+                        </a:rPr>
+                        <a:t>−0.602</a:t>
+                      </a:r>
+                    </a:p>
+                  </a:txBody>
+                  <a:tcPr marL="27432" marR="27432" marT="18288" marB="18288" anchor="ctr">
+                    <a:solidFill>
+                      <a:srgbClr val="FFFFFF"/>
+                    </a:solidFill>
+                    <a:lnL w="12700" cap="flat" cmpd="sng" algn="ctr">
+                      <a:solidFill>
+                        <a:srgbClr val="0B1F4B"/>
+                      </a:solidFill>
+                      <a:prstDash val="solid"/>
+                      <a:round/>
+                    </a:lnL>
+                    <a:lnR w="12700" cap="flat" cmpd="sng" algn="ctr">
+                      <a:solidFill>
+                        <a:srgbClr val="0B1F4B"/>
+                      </a:solidFill>
+                      <a:prstDash val="solid"/>
+                      <a:round/>
+                    </a:lnR>
+                    <a:lnT w="12700" cap="flat" cmpd="sng" algn="ctr">
+                      <a:solidFill>
+                        <a:srgbClr val="0B1F4B"/>
+                      </a:solidFill>
+                      <a:prstDash val="solid"/>
+                      <a:round/>
+                    </a:lnT>
+                    <a:lnB w="12700" cap="flat" cmpd="sng" algn="ctr">
+                      <a:solidFill>
+                        <a:srgbClr val="0B1F4B"/>
+                      </a:solidFill>
+                      <a:prstDash val="solid"/>
+                      <a:round/>
+                    </a:lnB>
+                  </a:tcPr>
+                </a:tc>
+                <a:tc>
+                  <a:txBody>
+                    <a:bodyPr wrap="square"/>
+                    <a:lstStyle/>
+                    <a:p>
+                      <a:pPr algn="ctr"/>
+                      <a:r>
+                        <a:rPr sz="1100" b="0" i="0">
+                          <a:solidFill>
+                            <a:srgbClr val="212121"/>
+                          </a:solidFill>
+                          <a:latin typeface="Segoe UI"/>
+                        </a:rPr>
+                        <a:t>−0.606</a:t>
+                      </a:r>
+                    </a:p>
+                  </a:txBody>
+                  <a:tcPr marL="27432" marR="27432" marT="18288" marB="18288" anchor="ctr">
+                    <a:solidFill>
+                      <a:srgbClr val="FFFFFF"/>
+                    </a:solidFill>
+                    <a:lnL w="12700" cap="flat" cmpd="sng" algn="ctr">
+                      <a:solidFill>
+                        <a:srgbClr val="0B1F4B"/>
+                      </a:solidFill>
+                      <a:prstDash val="solid"/>
+                      <a:round/>
+                    </a:lnL>
+                    <a:lnR w="12700" cap="flat" cmpd="sng" algn="ctr">
+                      <a:solidFill>
+                        <a:srgbClr val="0B1F4B"/>
+                      </a:solidFill>
+                      <a:prstDash val="solid"/>
+                      <a:round/>
+                    </a:lnR>
+                    <a:lnT w="12700" cap="flat" cmpd="sng" algn="ctr">
+                      <a:solidFill>
+                        <a:srgbClr val="0B1F4B"/>
+                      </a:solidFill>
+                      <a:prstDash val="solid"/>
+                      <a:round/>
+                    </a:lnT>
+                    <a:lnB w="12700" cap="flat" cmpd="sng" algn="ctr">
+                      <a:solidFill>
+                        <a:srgbClr val="0B1F4B"/>
+                      </a:solidFill>
+                      <a:prstDash val="solid"/>
+                      <a:round/>
+                    </a:lnB>
+                  </a:tcPr>
+                </a:tc>
+                <a:tc>
+                  <a:txBody>
+                    <a:bodyPr wrap="square"/>
+                    <a:lstStyle/>
+                    <a:p>
+                      <a:pPr algn="ctr"/>
+                      <a:r>
+                        <a:rPr sz="1100" b="0" i="0">
+                          <a:solidFill>
+                            <a:srgbClr val="212121"/>
+                          </a:solidFill>
+                          <a:latin typeface="Segoe UI"/>
+                        </a:rPr>
+                        <a:t>−0.582</a:t>
+                      </a:r>
+                    </a:p>
+                  </a:txBody>
+                  <a:tcPr marL="27432" marR="27432" marT="18288" marB="18288" anchor="ctr">
+                    <a:solidFill>
+                      <a:srgbClr val="FFFFFF"/>
+                    </a:solidFill>
+                    <a:lnL w="12700" cap="flat" cmpd="sng" algn="ctr">
+                      <a:solidFill>
+                        <a:srgbClr val="0B1F4B"/>
+                      </a:solidFill>
+                      <a:prstDash val="solid"/>
+                      <a:round/>
+                    </a:lnL>
+                    <a:lnR w="12700" cap="flat" cmpd="sng" algn="ctr">
+                      <a:solidFill>
+                        <a:srgbClr val="0B1F4B"/>
+                      </a:solidFill>
+                      <a:prstDash val="solid"/>
+                      <a:round/>
+                    </a:lnR>
+                    <a:lnT w="12700" cap="flat" cmpd="sng" algn="ctr">
+                      <a:solidFill>
+                        <a:srgbClr val="0B1F4B"/>
+                      </a:solidFill>
+                      <a:prstDash val="solid"/>
+                      <a:round/>
+                    </a:lnT>
+                    <a:lnB w="12700" cap="flat" cmpd="sng" algn="ctr">
+                      <a:solidFill>
+                        <a:srgbClr val="0B1F4B"/>
+                      </a:solidFill>
+                      <a:prstDash val="solid"/>
+                      <a:round/>
+                    </a:lnB>
+                  </a:tcPr>
+                </a:tc>
+                <a:tc>
+                  <a:txBody>
+                    <a:bodyPr wrap="square"/>
+                    <a:lstStyle/>
+                    <a:p>
+                      <a:pPr algn="ctr"/>
+                      <a:r>
+                        <a:rPr sz="1100" b="1" i="0">
+                          <a:solidFill>
+                            <a:srgbClr val="107C10"/>
+                          </a:solidFill>
+                          <a:latin typeface="Segoe UI"/>
+                        </a:rPr>
+                        <a:t>−0.527</a:t>
+                      </a:r>
+                    </a:p>
+                  </a:txBody>
+                  <a:tcPr marL="27432" marR="27432" marT="18288" marB="18288" anchor="ctr">
+                    <a:solidFill>
+                      <a:srgbClr val="E6F4EA"/>
+                    </a:solidFill>
+                    <a:lnL w="12700" cap="flat" cmpd="sng" algn="ctr">
+                      <a:solidFill>
+                        <a:srgbClr val="0B1F4B"/>
+                      </a:solidFill>
+                      <a:prstDash val="solid"/>
+                      <a:round/>
+                    </a:lnL>
+                    <a:lnR w="12700" cap="flat" cmpd="sng" algn="ctr">
+                      <a:solidFill>
+                        <a:srgbClr val="0B1F4B"/>
+                      </a:solidFill>
+                      <a:prstDash val="solid"/>
+                      <a:round/>
+                    </a:lnR>
+                    <a:lnT w="12700" cap="flat" cmpd="sng" algn="ctr">
+                      <a:solidFill>
+                        <a:srgbClr val="0B1F4B"/>
+                      </a:solidFill>
+                      <a:prstDash val="solid"/>
+                      <a:round/>
+                    </a:lnT>
+                    <a:lnB w="12700" cap="flat" cmpd="sng" algn="ctr">
+                      <a:solidFill>
+                        <a:srgbClr val="0B1F4B"/>
+                      </a:solidFill>
+                      <a:prstDash val="solid"/>
+                      <a:round/>
+                    </a:lnB>
+                  </a:tcPr>
+                </a:tc>
+              </a:tr>
+              <a:tr h="457200">
+                <a:tc>
+                  <a:txBody>
+                    <a:bodyPr wrap="square"/>
+                    <a:lstStyle/>
+                    <a:p>
+                      <a:pPr algn="ctr"/>
+                      <a:r>
+                        <a:rPr sz="1100" b="1" i="0">
+                          <a:solidFill>
+                            <a:srgbClr val="212121"/>
+                          </a:solidFill>
+                          <a:latin typeface="Segoe UI"/>
+                        </a:rPr>
+                        <a:t>gpt-4.1-mini → gpt-5.4</a:t>
+                      </a:r>
+                    </a:p>
+                  </a:txBody>
+                  <a:tcPr marL="27432" marR="27432" marT="18288" marB="18288" anchor="ctr">
+                    <a:solidFill>
+                      <a:srgbClr val="F7F9FC"/>
+                    </a:solidFill>
+                    <a:lnL w="12700" cap="flat" cmpd="sng" algn="ctr">
+                      <a:solidFill>
+                        <a:srgbClr val="0B1F4B"/>
+                      </a:solidFill>
+                      <a:prstDash val="solid"/>
+                      <a:round/>
+                    </a:lnL>
+                    <a:lnR w="12700" cap="flat" cmpd="sng" algn="ctr">
+                      <a:solidFill>
+                        <a:srgbClr val="0B1F4B"/>
+                      </a:solidFill>
+                      <a:prstDash val="solid"/>
+                      <a:round/>
+                    </a:lnR>
+                    <a:lnT w="12700" cap="flat" cmpd="sng" algn="ctr">
+                      <a:solidFill>
+                        <a:srgbClr val="0B1F4B"/>
+                      </a:solidFill>
+                      <a:prstDash val="solid"/>
+                      <a:round/>
+                    </a:lnT>
+                    <a:lnB w="12700" cap="flat" cmpd="sng" algn="ctr">
+                      <a:solidFill>
+                        <a:srgbClr val="0B1F4B"/>
+                      </a:solidFill>
+                      <a:prstDash val="solid"/>
+                      <a:round/>
+                    </a:lnB>
+                  </a:tcPr>
+                </a:tc>
+                <a:tc>
+                  <a:txBody>
+                    <a:bodyPr wrap="square"/>
+                    <a:lstStyle/>
+                    <a:p>
+                      <a:pPr algn="ctr"/>
+                      <a:r>
+                        <a:rPr sz="1100" b="0" i="0">
+                          <a:solidFill>
+                            <a:srgbClr val="212121"/>
+                          </a:solidFill>
+                          <a:latin typeface="Segoe UI"/>
+                        </a:rPr>
+                        <a:t>−0.601</a:t>
+                      </a:r>
+                    </a:p>
+                  </a:txBody>
+                  <a:tcPr marL="27432" marR="27432" marT="18288" marB="18288" anchor="ctr">
+                    <a:solidFill>
+                      <a:srgbClr val="F7F9FC"/>
+                    </a:solidFill>
+                    <a:lnL w="12700" cap="flat" cmpd="sng" algn="ctr">
+                      <a:solidFill>
+                        <a:srgbClr val="0B1F4B"/>
+                      </a:solidFill>
+                      <a:prstDash val="solid"/>
+                      <a:round/>
+                    </a:lnL>
+                    <a:lnR w="12700" cap="flat" cmpd="sng" algn="ctr">
+                      <a:solidFill>
+                        <a:srgbClr val="0B1F4B"/>
+                      </a:solidFill>
+                      <a:prstDash val="solid"/>
+                      <a:round/>
+                    </a:lnR>
+                    <a:lnT w="12700" cap="flat" cmpd="sng" algn="ctr">
+                      <a:solidFill>
+                        <a:srgbClr val="0B1F4B"/>
+                      </a:solidFill>
+                      <a:prstDash val="solid"/>
+                      <a:round/>
+                    </a:lnT>
+                    <a:lnB w="12700" cap="flat" cmpd="sng" algn="ctr">
+                      <a:solidFill>
+                        <a:srgbClr val="0B1F4B"/>
+                      </a:solidFill>
+                      <a:prstDash val="solid"/>
+                      <a:round/>
+                    </a:lnB>
+                  </a:tcPr>
+                </a:tc>
+                <a:tc>
+                  <a:txBody>
+                    <a:bodyPr wrap="square"/>
+                    <a:lstStyle/>
+                    <a:p>
+                      <a:pPr algn="ctr"/>
+                      <a:r>
+                        <a:rPr sz="1100" b="0" i="0">
+                          <a:solidFill>
+                            <a:srgbClr val="212121"/>
+                          </a:solidFill>
+                          <a:latin typeface="Segoe UI"/>
+                        </a:rPr>
+                        <a:t>−0.601</a:t>
+                      </a:r>
+                    </a:p>
+                  </a:txBody>
+                  <a:tcPr marL="27432" marR="27432" marT="18288" marB="18288" anchor="ctr">
+                    <a:solidFill>
+                      <a:srgbClr val="F7F9FC"/>
+                    </a:solidFill>
+                    <a:lnL w="12700" cap="flat" cmpd="sng" algn="ctr">
+                      <a:solidFill>
+                        <a:srgbClr val="0B1F4B"/>
+                      </a:solidFill>
+                      <a:prstDash val="solid"/>
+                      <a:round/>
+                    </a:lnL>
+                    <a:lnR w="12700" cap="flat" cmpd="sng" algn="ctr">
+                      <a:solidFill>
+                        <a:srgbClr val="0B1F4B"/>
+                      </a:solidFill>
+                      <a:prstDash val="solid"/>
+                      <a:round/>
+                    </a:lnR>
+                    <a:lnT w="12700" cap="flat" cmpd="sng" algn="ctr">
+                      <a:solidFill>
+                        <a:srgbClr val="0B1F4B"/>
+                      </a:solidFill>
+                      <a:prstDash val="solid"/>
+                      <a:round/>
+                    </a:lnT>
+                    <a:lnB w="12700" cap="flat" cmpd="sng" algn="ctr">
+                      <a:solidFill>
+                        <a:srgbClr val="0B1F4B"/>
+                      </a:solidFill>
+                      <a:prstDash val="solid"/>
+                      <a:round/>
+                    </a:lnB>
+                  </a:tcPr>
+                </a:tc>
+                <a:tc>
+                  <a:txBody>
+                    <a:bodyPr wrap="square"/>
+                    <a:lstStyle/>
+                    <a:p>
+                      <a:pPr algn="ctr"/>
+                      <a:r>
+                        <a:rPr sz="1100" b="0" i="0">
+                          <a:solidFill>
+                            <a:srgbClr val="212121"/>
+                          </a:solidFill>
+                          <a:latin typeface="Segoe UI"/>
+                        </a:rPr>
+                        <a:t>−0.601</a:t>
+                      </a:r>
+                    </a:p>
+                  </a:txBody>
+                  <a:tcPr marL="27432" marR="27432" marT="18288" marB="18288" anchor="ctr">
+                    <a:solidFill>
+                      <a:srgbClr val="F7F9FC"/>
+                    </a:solidFill>
+                    <a:lnL w="12700" cap="flat" cmpd="sng" algn="ctr">
+                      <a:solidFill>
+                        <a:srgbClr val="0B1F4B"/>
+                      </a:solidFill>
+                      <a:prstDash val="solid"/>
+                      <a:round/>
+                    </a:lnL>
+                    <a:lnR w="12700" cap="flat" cmpd="sng" algn="ctr">
+                      <a:solidFill>
+                        <a:srgbClr val="0B1F4B"/>
+                      </a:solidFill>
+                      <a:prstDash val="solid"/>
+                      <a:round/>
+                    </a:lnR>
+                    <a:lnT w="12700" cap="flat" cmpd="sng" algn="ctr">
+                      <a:solidFill>
+                        <a:srgbClr val="0B1F4B"/>
+                      </a:solidFill>
+                      <a:prstDash val="solid"/>
+                      <a:round/>
+                    </a:lnT>
+                    <a:lnB w="12700" cap="flat" cmpd="sng" algn="ctr">
+                      <a:solidFill>
+                        <a:srgbClr val="0B1F4B"/>
+                      </a:solidFill>
+                      <a:prstDash val="solid"/>
+                      <a:round/>
+                    </a:lnB>
+                  </a:tcPr>
+                </a:tc>
+                <a:tc>
+                  <a:txBody>
+                    <a:bodyPr wrap="square"/>
+                    <a:lstStyle/>
+                    <a:p>
+                      <a:pPr algn="ctr"/>
+                      <a:r>
+                        <a:rPr sz="1100" b="0" i="0">
+                          <a:solidFill>
+                            <a:srgbClr val="212121"/>
+                          </a:solidFill>
+                          <a:latin typeface="Segoe UI"/>
+                        </a:rPr>
+                        <a:t>−0.582</a:t>
+                      </a:r>
+                    </a:p>
+                  </a:txBody>
+                  <a:tcPr marL="27432" marR="27432" marT="18288" marB="18288" anchor="ctr">
+                    <a:solidFill>
+                      <a:srgbClr val="F7F9FC"/>
+                    </a:solidFill>
+                    <a:lnL w="12700" cap="flat" cmpd="sng" algn="ctr">
+                      <a:solidFill>
+                        <a:srgbClr val="0B1F4B"/>
+                      </a:solidFill>
+                      <a:prstDash val="solid"/>
+                      <a:round/>
+                    </a:lnL>
+                    <a:lnR w="12700" cap="flat" cmpd="sng" algn="ctr">
+                      <a:solidFill>
+                        <a:srgbClr val="0B1F4B"/>
+                      </a:solidFill>
+                      <a:prstDash val="solid"/>
+                      <a:round/>
+                    </a:lnR>
+                    <a:lnT w="12700" cap="flat" cmpd="sng" algn="ctr">
+                      <a:solidFill>
+                        <a:srgbClr val="0B1F4B"/>
+                      </a:solidFill>
+                      <a:prstDash val="solid"/>
+                      <a:round/>
+                    </a:lnT>
+                    <a:lnB w="12700" cap="flat" cmpd="sng" algn="ctr">
+                      <a:solidFill>
+                        <a:srgbClr val="0B1F4B"/>
+                      </a:solidFill>
+                      <a:prstDash val="solid"/>
+                      <a:round/>
+                    </a:lnB>
+                  </a:tcPr>
+                </a:tc>
+                <a:tc>
+                  <a:txBody>
+                    <a:bodyPr wrap="square"/>
+                    <a:lstStyle/>
+                    <a:p>
+                      <a:pPr algn="ctr"/>
+                      <a:r>
+                        <a:rPr sz="1100" b="1" i="0">
+                          <a:solidFill>
+                            <a:srgbClr val="107C10"/>
+                          </a:solidFill>
+                          <a:latin typeface="Segoe UI"/>
+                        </a:rPr>
+                        <a:t>−0.444</a:t>
+                      </a:r>
+                    </a:p>
+                  </a:txBody>
+                  <a:tcPr marL="27432" marR="27432" marT="18288" marB="18288" anchor="ctr">
+                    <a:solidFill>
+                      <a:srgbClr val="E6F4EA"/>
+                    </a:solidFill>
+                    <a:lnL w="12700" cap="flat" cmpd="sng" algn="ctr">
+                      <a:solidFill>
+                        <a:srgbClr val="0B1F4B"/>
+                      </a:solidFill>
+                      <a:prstDash val="solid"/>
+                      <a:round/>
+                    </a:lnL>
+                    <a:lnR w="12700" cap="flat" cmpd="sng" algn="ctr">
+                      <a:solidFill>
+                        <a:srgbClr val="0B1F4B"/>
+                      </a:solidFill>
+                      <a:prstDash val="solid"/>
+                      <a:round/>
+                    </a:lnR>
+                    <a:lnT w="12700" cap="flat" cmpd="sng" algn="ctr">
+                      <a:solidFill>
+                        <a:srgbClr val="0B1F4B"/>
+                      </a:solidFill>
+                      <a:prstDash val="solid"/>
+                      <a:round/>
+                    </a:lnT>
+                    <a:lnB w="12700" cap="flat" cmpd="sng" algn="ctr">
+                      <a:solidFill>
+                        <a:srgbClr val="0B1F4B"/>
+                      </a:solidFill>
+                      <a:prstDash val="solid"/>
+                      <a:round/>
+                    </a:lnB>
+                  </a:tcPr>
+                </a:tc>
+              </a:tr>
+              <a:tr h="457200">
+                <a:tc>
+                  <a:txBody>
+                    <a:bodyPr wrap="square"/>
+                    <a:lstStyle/>
+                    <a:p>
+                      <a:pPr algn="ctr"/>
+                      <a:r>
+                        <a:rPr sz="1100" b="1" i="0">
+                          <a:solidFill>
+                            <a:srgbClr val="212121"/>
+                          </a:solidFill>
+                          <a:latin typeface="Segoe UI"/>
+                        </a:rPr>
+                        <a:t>gpt-5.4-mini → gpt-4.1</a:t>
+                      </a:r>
+                    </a:p>
+                  </a:txBody>
+                  <a:tcPr marL="27432" marR="27432" marT="18288" marB="18288" anchor="ctr">
+                    <a:solidFill>
+                      <a:srgbClr val="FFFFFF"/>
+                    </a:solidFill>
+                    <a:lnL w="12700" cap="flat" cmpd="sng" algn="ctr">
+                      <a:solidFill>
+                        <a:srgbClr val="0B1F4B"/>
+                      </a:solidFill>
+                      <a:prstDash val="solid"/>
+                      <a:round/>
+                    </a:lnL>
+                    <a:lnR w="12700" cap="flat" cmpd="sng" algn="ctr">
+                      <a:solidFill>
+                        <a:srgbClr val="0B1F4B"/>
+                      </a:solidFill>
+                      <a:prstDash val="solid"/>
+                      <a:round/>
+                    </a:lnR>
+                    <a:lnT w="12700" cap="flat" cmpd="sng" algn="ctr">
+                      <a:solidFill>
+                        <a:srgbClr val="0B1F4B"/>
+                      </a:solidFill>
+                      <a:prstDash val="solid"/>
+                      <a:round/>
+                    </a:lnT>
+                    <a:lnB w="12700" cap="flat" cmpd="sng" algn="ctr">
+                      <a:solidFill>
+                        <a:srgbClr val="0B1F4B"/>
+                      </a:solidFill>
+                      <a:prstDash val="solid"/>
+                      <a:round/>
+                    </a:lnB>
+                  </a:tcPr>
+                </a:tc>
+                <a:tc>
+                  <a:txBody>
+                    <a:bodyPr wrap="square"/>
+                    <a:lstStyle/>
+                    <a:p>
+                      <a:pPr algn="ctr"/>
+                      <a:r>
+                        <a:rPr sz="1100" b="0" i="0">
+                          <a:solidFill>
+                            <a:srgbClr val="212121"/>
+                          </a:solidFill>
+                          <a:latin typeface="Segoe UI"/>
+                        </a:rPr>
+                        <a:t>−0.680</a:t>
+                      </a:r>
+                    </a:p>
+                  </a:txBody>
+                  <a:tcPr marL="27432" marR="27432" marT="18288" marB="18288" anchor="ctr">
+                    <a:solidFill>
+                      <a:srgbClr val="FFFFFF"/>
+                    </a:solidFill>
+                    <a:lnL w="12700" cap="flat" cmpd="sng" algn="ctr">
+                      <a:solidFill>
+                        <a:srgbClr val="0B1F4B"/>
+                      </a:solidFill>
+                      <a:prstDash val="solid"/>
+                      <a:round/>
+                    </a:lnL>
+                    <a:lnR w="12700" cap="flat" cmpd="sng" algn="ctr">
+                      <a:solidFill>
+                        <a:srgbClr val="0B1F4B"/>
+                      </a:solidFill>
+                      <a:prstDash val="solid"/>
+                      <a:round/>
+                    </a:lnR>
+                    <a:lnT w="12700" cap="flat" cmpd="sng" algn="ctr">
+                      <a:solidFill>
+                        <a:srgbClr val="0B1F4B"/>
+                      </a:solidFill>
+                      <a:prstDash val="solid"/>
+                      <a:round/>
+                    </a:lnT>
+                    <a:lnB w="12700" cap="flat" cmpd="sng" algn="ctr">
+                      <a:solidFill>
+                        <a:srgbClr val="0B1F4B"/>
+                      </a:solidFill>
+                      <a:prstDash val="solid"/>
+                      <a:round/>
+                    </a:lnB>
+                  </a:tcPr>
+                </a:tc>
+                <a:tc>
+                  <a:txBody>
+                    <a:bodyPr wrap="square"/>
+                    <a:lstStyle/>
+                    <a:p>
+                      <a:pPr algn="ctr"/>
+                      <a:r>
+                        <a:rPr sz="1100" b="0" i="0">
+                          <a:solidFill>
+                            <a:srgbClr val="212121"/>
+                          </a:solidFill>
+                          <a:latin typeface="Segoe UI"/>
+                        </a:rPr>
+                        <a:t>−0.689</a:t>
+                      </a:r>
+                    </a:p>
+                  </a:txBody>
+                  <a:tcPr marL="27432" marR="27432" marT="18288" marB="18288" anchor="ctr">
+                    <a:solidFill>
+                      <a:srgbClr val="FFFFFF"/>
+                    </a:solidFill>
+                    <a:lnL w="12700" cap="flat" cmpd="sng" algn="ctr">
+                      <a:solidFill>
+                        <a:srgbClr val="0B1F4B"/>
+                      </a:solidFill>
+                      <a:prstDash val="solid"/>
+                      <a:round/>
+                    </a:lnL>
+                    <a:lnR w="12700" cap="flat" cmpd="sng" algn="ctr">
+                      <a:solidFill>
+                        <a:srgbClr val="0B1F4B"/>
+                      </a:solidFill>
+                      <a:prstDash val="solid"/>
+                      <a:round/>
+                    </a:lnR>
+                    <a:lnT w="12700" cap="flat" cmpd="sng" algn="ctr">
+                      <a:solidFill>
+                        <a:srgbClr val="0B1F4B"/>
+                      </a:solidFill>
+                      <a:prstDash val="solid"/>
+                      <a:round/>
+                    </a:lnT>
+                    <a:lnB w="12700" cap="flat" cmpd="sng" algn="ctr">
+                      <a:solidFill>
+                        <a:srgbClr val="0B1F4B"/>
+                      </a:solidFill>
+                      <a:prstDash val="solid"/>
+                      <a:round/>
+                    </a:lnB>
+                  </a:tcPr>
+                </a:tc>
+                <a:tc>
+                  <a:txBody>
+                    <a:bodyPr wrap="square"/>
+                    <a:lstStyle/>
+                    <a:p>
+                      <a:pPr algn="ctr"/>
+                      <a:r>
+                        <a:rPr sz="1100" b="0" i="0">
+                          <a:solidFill>
+                            <a:srgbClr val="212121"/>
+                          </a:solidFill>
+                          <a:latin typeface="Segoe UI"/>
+                        </a:rPr>
+                        <a:t>−0.708</a:t>
+                      </a:r>
+                    </a:p>
+                  </a:txBody>
+                  <a:tcPr marL="27432" marR="27432" marT="18288" marB="18288" anchor="ctr">
+                    <a:solidFill>
+                      <a:srgbClr val="FFFFFF"/>
+                    </a:solidFill>
+                    <a:lnL w="12700" cap="flat" cmpd="sng" algn="ctr">
+                      <a:solidFill>
+                        <a:srgbClr val="0B1F4B"/>
+                      </a:solidFill>
+                      <a:prstDash val="solid"/>
+                      <a:round/>
+                    </a:lnL>
+                    <a:lnR w="12700" cap="flat" cmpd="sng" algn="ctr">
+                      <a:solidFill>
+                        <a:srgbClr val="0B1F4B"/>
+                      </a:solidFill>
+                      <a:prstDash val="solid"/>
+                      <a:round/>
+                    </a:lnR>
+                    <a:lnT w="12700" cap="flat" cmpd="sng" algn="ctr">
+                      <a:solidFill>
+                        <a:srgbClr val="0B1F4B"/>
+                      </a:solidFill>
+                      <a:prstDash val="solid"/>
+                      <a:round/>
+                    </a:lnT>
+                    <a:lnB w="12700" cap="flat" cmpd="sng" algn="ctr">
+                      <a:solidFill>
+                        <a:srgbClr val="0B1F4B"/>
+                      </a:solidFill>
+                      <a:prstDash val="solid"/>
+                      <a:round/>
+                    </a:lnB>
+                  </a:tcPr>
+                </a:tc>
+                <a:tc>
+                  <a:txBody>
+                    <a:bodyPr wrap="square"/>
+                    <a:lstStyle/>
+                    <a:p>
+                      <a:pPr algn="ctr"/>
+                      <a:r>
+                        <a:rPr sz="1100" b="0" i="0">
+                          <a:solidFill>
+                            <a:srgbClr val="212121"/>
+                          </a:solidFill>
+                          <a:latin typeface="Segoe UI"/>
+                        </a:rPr>
+                        <a:t>−0.569</a:t>
+                      </a:r>
+                    </a:p>
+                  </a:txBody>
+                  <a:tcPr marL="27432" marR="27432" marT="18288" marB="18288" anchor="ctr">
+                    <a:solidFill>
+                      <a:srgbClr val="FFFFFF"/>
+                    </a:solidFill>
+                    <a:lnL w="12700" cap="flat" cmpd="sng" algn="ctr">
+                      <a:solidFill>
+                        <a:srgbClr val="0B1F4B"/>
+                      </a:solidFill>
+                      <a:prstDash val="solid"/>
+                      <a:round/>
+                    </a:lnL>
+                    <a:lnR w="12700" cap="flat" cmpd="sng" algn="ctr">
+                      <a:solidFill>
+                        <a:srgbClr val="0B1F4B"/>
+                      </a:solidFill>
+                      <a:prstDash val="solid"/>
+                      <a:round/>
+                    </a:lnR>
+                    <a:lnT w="12700" cap="flat" cmpd="sng" algn="ctr">
+                      <a:solidFill>
+                        <a:srgbClr val="0B1F4B"/>
+                      </a:solidFill>
+                      <a:prstDash val="solid"/>
+                      <a:round/>
+                    </a:lnT>
+                    <a:lnB w="12700" cap="flat" cmpd="sng" algn="ctr">
+                      <a:solidFill>
+                        <a:srgbClr val="0B1F4B"/>
+                      </a:solidFill>
+                      <a:prstDash val="solid"/>
+                      <a:round/>
+                    </a:lnB>
+                  </a:tcPr>
+                </a:tc>
+                <a:tc>
+                  <a:txBody>
+                    <a:bodyPr wrap="square"/>
+                    <a:lstStyle/>
+                    <a:p>
+                      <a:pPr algn="ctr"/>
+                      <a:r>
+                        <a:rPr sz="1100" b="1" i="0">
+                          <a:solidFill>
+                            <a:srgbClr val="107C10"/>
+                          </a:solidFill>
+                          <a:latin typeface="Segoe UI"/>
+                        </a:rPr>
+                        <a:t>−0.527</a:t>
+                      </a:r>
+                    </a:p>
+                  </a:txBody>
+                  <a:tcPr marL="27432" marR="27432" marT="18288" marB="18288" anchor="ctr">
+                    <a:solidFill>
+                      <a:srgbClr val="E6F4EA"/>
+                    </a:solidFill>
+                    <a:lnL w="12700" cap="flat" cmpd="sng" algn="ctr">
+                      <a:solidFill>
+                        <a:srgbClr val="0B1F4B"/>
+                      </a:solidFill>
+                      <a:prstDash val="solid"/>
+                      <a:round/>
+                    </a:lnL>
+                    <a:lnR w="12700" cap="flat" cmpd="sng" algn="ctr">
+                      <a:solidFill>
+                        <a:srgbClr val="0B1F4B"/>
+                      </a:solidFill>
+                      <a:prstDash val="solid"/>
+                      <a:round/>
+                    </a:lnR>
+                    <a:lnT w="12700" cap="flat" cmpd="sng" algn="ctr">
+                      <a:solidFill>
+                        <a:srgbClr val="0B1F4B"/>
+                      </a:solidFill>
+                      <a:prstDash val="solid"/>
+                      <a:round/>
+                    </a:lnT>
+                    <a:lnB w="12700" cap="flat" cmpd="sng" algn="ctr">
+                      <a:solidFill>
+                        <a:srgbClr val="0B1F4B"/>
+                      </a:solidFill>
+                      <a:prstDash val="solid"/>
+                      <a:round/>
+                    </a:lnB>
+                  </a:tcPr>
+                </a:tc>
+              </a:tr>
+              <a:tr h="457200">
+                <a:tc>
+                  <a:txBody>
+                    <a:bodyPr wrap="square"/>
+                    <a:lstStyle/>
+                    <a:p>
+                      <a:pPr algn="ctr"/>
+                      <a:r>
+                        <a:rPr sz="1100" b="1" i="0">
+                          <a:solidFill>
+                            <a:srgbClr val="212121"/>
+                          </a:solidFill>
+                          <a:latin typeface="Segoe UI"/>
+                        </a:rPr>
+                        <a:t>gpt-5.4-mini → gpt-5.4</a:t>
+                      </a:r>
+                    </a:p>
+                  </a:txBody>
+                  <a:tcPr marL="27432" marR="27432" marT="18288" marB="18288" anchor="ctr">
+                    <a:solidFill>
+                      <a:srgbClr val="F7F9FC"/>
+                    </a:solidFill>
+                    <a:lnL w="12700" cap="flat" cmpd="sng" algn="ctr">
+                      <a:solidFill>
+                        <a:srgbClr val="0B1F4B"/>
+                      </a:solidFill>
+                      <a:prstDash val="solid"/>
+                      <a:round/>
+                    </a:lnL>
+                    <a:lnR w="12700" cap="flat" cmpd="sng" algn="ctr">
+                      <a:solidFill>
+                        <a:srgbClr val="0B1F4B"/>
+                      </a:solidFill>
+                      <a:prstDash val="solid"/>
+                      <a:round/>
+                    </a:lnR>
+                    <a:lnT w="12700" cap="flat" cmpd="sng" algn="ctr">
+                      <a:solidFill>
+                        <a:srgbClr val="0B1F4B"/>
+                      </a:solidFill>
+                      <a:prstDash val="solid"/>
+                      <a:round/>
+                    </a:lnT>
+                    <a:lnB w="12700" cap="flat" cmpd="sng" algn="ctr">
+                      <a:solidFill>
+                        <a:srgbClr val="0B1F4B"/>
+                      </a:solidFill>
+                      <a:prstDash val="solid"/>
+                      <a:round/>
+                    </a:lnB>
+                  </a:tcPr>
+                </a:tc>
+                <a:tc>
+                  <a:txBody>
+                    <a:bodyPr wrap="square"/>
+                    <a:lstStyle/>
+                    <a:p>
+                      <a:pPr algn="ctr"/>
+                      <a:r>
+                        <a:rPr sz="1100" b="0" i="0">
+                          <a:solidFill>
+                            <a:srgbClr val="212121"/>
+                          </a:solidFill>
+                          <a:latin typeface="Segoe UI"/>
+                        </a:rPr>
+                        <a:t>−0.680</a:t>
+                      </a:r>
+                    </a:p>
+                  </a:txBody>
+                  <a:tcPr marL="27432" marR="27432" marT="18288" marB="18288" anchor="ctr">
+                    <a:solidFill>
+                      <a:srgbClr val="F7F9FC"/>
+                    </a:solidFill>
+                    <a:lnL w="12700" cap="flat" cmpd="sng" algn="ctr">
+                      <a:solidFill>
+                        <a:srgbClr val="0B1F4B"/>
+                      </a:solidFill>
+                      <a:prstDash val="solid"/>
+                      <a:round/>
+                    </a:lnL>
+                    <a:lnR w="12700" cap="flat" cmpd="sng" algn="ctr">
+                      <a:solidFill>
+                        <a:srgbClr val="0B1F4B"/>
+                      </a:solidFill>
+                      <a:prstDash val="solid"/>
+                      <a:round/>
+                    </a:lnR>
+                    <a:lnT w="12700" cap="flat" cmpd="sng" algn="ctr">
+                      <a:solidFill>
+                        <a:srgbClr val="0B1F4B"/>
+                      </a:solidFill>
+                      <a:prstDash val="solid"/>
+                      <a:round/>
+                    </a:lnT>
+                    <a:lnB w="12700" cap="flat" cmpd="sng" algn="ctr">
+                      <a:solidFill>
+                        <a:srgbClr val="0B1F4B"/>
+                      </a:solidFill>
+                      <a:prstDash val="solid"/>
+                      <a:round/>
+                    </a:lnB>
+                  </a:tcPr>
+                </a:tc>
+                <a:tc>
+                  <a:txBody>
+                    <a:bodyPr wrap="square"/>
+                    <a:lstStyle/>
+                    <a:p>
+                      <a:pPr algn="ctr"/>
+                      <a:r>
+                        <a:rPr sz="1100" b="0" i="0">
+                          <a:solidFill>
+                            <a:srgbClr val="212121"/>
+                          </a:solidFill>
+                          <a:latin typeface="Segoe UI"/>
+                        </a:rPr>
+                        <a:t>−0.680</a:t>
+                      </a:r>
+                    </a:p>
+                  </a:txBody>
+                  <a:tcPr marL="27432" marR="27432" marT="18288" marB="18288" anchor="ctr">
+                    <a:solidFill>
+                      <a:srgbClr val="F7F9FC"/>
+                    </a:solidFill>
+                    <a:lnL w="12700" cap="flat" cmpd="sng" algn="ctr">
+                      <a:solidFill>
+                        <a:srgbClr val="0B1F4B"/>
+                      </a:solidFill>
+                      <a:prstDash val="solid"/>
+                      <a:round/>
+                    </a:lnL>
+                    <a:lnR w="12700" cap="flat" cmpd="sng" algn="ctr">
+                      <a:solidFill>
+                        <a:srgbClr val="0B1F4B"/>
+                      </a:solidFill>
+                      <a:prstDash val="solid"/>
+                      <a:round/>
+                    </a:lnR>
+                    <a:lnT w="12700" cap="flat" cmpd="sng" algn="ctr">
+                      <a:solidFill>
+                        <a:srgbClr val="0B1F4B"/>
+                      </a:solidFill>
+                      <a:prstDash val="solid"/>
+                      <a:round/>
+                    </a:lnT>
+                    <a:lnB w="12700" cap="flat" cmpd="sng" algn="ctr">
+                      <a:solidFill>
+                        <a:srgbClr val="0B1F4B"/>
+                      </a:solidFill>
+                      <a:prstDash val="solid"/>
+                      <a:round/>
+                    </a:lnB>
+                  </a:tcPr>
+                </a:tc>
+                <a:tc>
+                  <a:txBody>
+                    <a:bodyPr wrap="square"/>
+                    <a:lstStyle/>
+                    <a:p>
+                      <a:pPr algn="ctr"/>
+                      <a:r>
+                        <a:rPr sz="1100" b="0" i="0">
+                          <a:solidFill>
+                            <a:srgbClr val="212121"/>
+                          </a:solidFill>
+                          <a:latin typeface="Segoe UI"/>
+                        </a:rPr>
+                        <a:t>−0.681</a:t>
+                      </a:r>
+                    </a:p>
+                  </a:txBody>
+                  <a:tcPr marL="27432" marR="27432" marT="18288" marB="18288" anchor="ctr">
+                    <a:solidFill>
+                      <a:srgbClr val="F7F9FC"/>
+                    </a:solidFill>
+                    <a:lnL w="12700" cap="flat" cmpd="sng" algn="ctr">
+                      <a:solidFill>
+                        <a:srgbClr val="0B1F4B"/>
+                      </a:solidFill>
+                      <a:prstDash val="solid"/>
+                      <a:round/>
+                    </a:lnL>
+                    <a:lnR w="12700" cap="flat" cmpd="sng" algn="ctr">
+                      <a:solidFill>
+                        <a:srgbClr val="0B1F4B"/>
+                      </a:solidFill>
+                      <a:prstDash val="solid"/>
+                      <a:round/>
+                    </a:lnR>
+                    <a:lnT w="12700" cap="flat" cmpd="sng" algn="ctr">
+                      <a:solidFill>
+                        <a:srgbClr val="0B1F4B"/>
+                      </a:solidFill>
+                      <a:prstDash val="solid"/>
+                      <a:round/>
+                    </a:lnT>
+                    <a:lnB w="12700" cap="flat" cmpd="sng" algn="ctr">
+                      <a:solidFill>
+                        <a:srgbClr val="0B1F4B"/>
+                      </a:solidFill>
+                      <a:prstDash val="solid"/>
+                      <a:round/>
+                    </a:lnB>
+                  </a:tcPr>
+                </a:tc>
+                <a:tc>
+                  <a:txBody>
+                    <a:bodyPr wrap="square"/>
+                    <a:lstStyle/>
+                    <a:p>
+                      <a:pPr algn="ctr"/>
+                      <a:r>
+                        <a:rPr sz="1100" b="0" i="0">
+                          <a:solidFill>
+                            <a:srgbClr val="212121"/>
+                          </a:solidFill>
+                          <a:latin typeface="Segoe UI"/>
+                        </a:rPr>
+                        <a:t>−0.569</a:t>
+                      </a:r>
+                    </a:p>
+                  </a:txBody>
+                  <a:tcPr marL="27432" marR="27432" marT="18288" marB="18288" anchor="ctr">
+                    <a:solidFill>
+                      <a:srgbClr val="F7F9FC"/>
+                    </a:solidFill>
+                    <a:lnL w="12700" cap="flat" cmpd="sng" algn="ctr">
+                      <a:solidFill>
+                        <a:srgbClr val="0B1F4B"/>
+                      </a:solidFill>
+                      <a:prstDash val="solid"/>
+                      <a:round/>
+                    </a:lnL>
+                    <a:lnR w="12700" cap="flat" cmpd="sng" algn="ctr">
+                      <a:solidFill>
+                        <a:srgbClr val="0B1F4B"/>
+                      </a:solidFill>
+                      <a:prstDash val="solid"/>
+                      <a:round/>
+                    </a:lnR>
+                    <a:lnT w="12700" cap="flat" cmpd="sng" algn="ctr">
+                      <a:solidFill>
+                        <a:srgbClr val="0B1F4B"/>
+                      </a:solidFill>
+                      <a:prstDash val="solid"/>
+                      <a:round/>
+                    </a:lnT>
+                    <a:lnB w="12700" cap="flat" cmpd="sng" algn="ctr">
+                      <a:solidFill>
+                        <a:srgbClr val="0B1F4B"/>
+                      </a:solidFill>
+                      <a:prstDash val="solid"/>
+                      <a:round/>
+                    </a:lnB>
+                  </a:tcPr>
+                </a:tc>
+                <a:tc>
+                  <a:txBody>
+                    <a:bodyPr wrap="square"/>
+                    <a:lstStyle/>
+                    <a:p>
+                      <a:pPr algn="ctr"/>
+                      <a:r>
+                        <a:rPr sz="1100" b="1" i="0">
+                          <a:solidFill>
+                            <a:srgbClr val="107C10"/>
+                          </a:solidFill>
+                          <a:latin typeface="Segoe UI"/>
+                        </a:rPr>
+                        <a:t>−0.444</a:t>
+                      </a:r>
+                    </a:p>
+                  </a:txBody>
+                  <a:tcPr marL="27432" marR="27432" marT="18288" marB="18288" anchor="ctr">
+                    <a:solidFill>
+                      <a:srgbClr val="E6F4EA"/>
+                    </a:solidFill>
+                    <a:lnL w="12700" cap="flat" cmpd="sng" algn="ctr">
+                      <a:solidFill>
+                        <a:srgbClr val="0B1F4B"/>
+                      </a:solidFill>
+                      <a:prstDash val="solid"/>
+                      <a:round/>
+                    </a:lnL>
+                    <a:lnR w="12700" cap="flat" cmpd="sng" algn="ctr">
+                      <a:solidFill>
+                        <a:srgbClr val="0B1F4B"/>
+                      </a:solidFill>
+                      <a:prstDash val="solid"/>
+                      <a:round/>
+                    </a:lnR>
+                    <a:lnT w="12700" cap="flat" cmpd="sng" algn="ctr">
+                      <a:solidFill>
+                        <a:srgbClr val="0B1F4B"/>
+                      </a:solidFill>
+                      <a:prstDash val="solid"/>
+                      <a:round/>
+                    </a:lnT>
+                    <a:lnB w="12700" cap="flat" cmpd="sng" algn="ctr">
+                      <a:solidFill>
+                        <a:srgbClr val="0B1F4B"/>
+                      </a:solidFill>
+                      <a:prstDash val="solid"/>
+                      <a:round/>
+                    </a:lnB>
+                  </a:tcPr>
+                </a:tc>
+              </a:tr>
+            </a:tbl>
+          </a:graphicData>
+        </a:graphic>
+      </p:graphicFrame>
+      <p:sp>
+        <p:nvSpPr>
+          <p:cNvPr id="22" name="TextBox 21"/>
+          <p:cNvSpPr txBox="1"/>
+          <p:nvPr/>
+        </p:nvSpPr>
+        <p:spPr>
+          <a:xfrm>
+            <a:off x="4983480" y="4169663"/>
+            <a:ext cx="6812280" cy="274320"/>
           </a:xfrm>
           <a:prstGeom prst="rect">
             <a:avLst/>
           </a:prstGeom>
-        </p:spPr>
-      </p:pic>
-      <p:sp>
-        <p:nvSpPr>
-          <p:cNvPr id="22" name="Rectangle 21"/>
+          <a:noFill/>
+        </p:spPr>
+        <p:txBody>
+          <a:bodyPr wrap="square" lIns="45720" rIns="45720" tIns="18288" bIns="18288" anchor="t">
+            <a:spAutoFit/>
+          </a:bodyPr>
+          <a:lstStyle/>
+          <a:p>
+            <a:pPr algn="ctr"/>
+            <a:r>
+              <a:rPr sz="1000" b="0" i="1">
+                <a:solidFill>
+                  <a:srgbClr val="605E5C"/>
+                </a:solidFill>
+                <a:latin typeface="Segoe UI"/>
+              </a:rPr>
+              <a:t>Table 7: Cascade reward at default weights (λ_l = 0.01, λ_e = 1.0).  No cascade beats its large-alone baseline.</a:t>
+            </a:r>
+          </a:p>
+        </p:txBody>
+      </p:sp>
+      <p:sp>
+        <p:nvSpPr>
+          <p:cNvPr id="23" name="Rectangle 22"/>
           <p:cNvSpPr/>
           <p:nvPr/>
         </p:nvSpPr>
@@ -4281,7 +5909,7 @@
       </p:sp>
       <p:sp>
         <p:nvSpPr>
-          <p:cNvPr id="23" name="Rectangle 22"/>
+          <p:cNvPr id="24" name="Rectangle 23"/>
           <p:cNvSpPr/>
           <p:nvPr/>
         </p:nvSpPr>
@@ -4325,7 +5953,7 @@
       </p:sp>
       <p:sp>
         <p:nvSpPr>
-          <p:cNvPr id="24" name="TextBox 23"/>
+          <p:cNvPr id="25" name="TextBox 24"/>
           <p:cNvSpPr txBox="1"/>
           <p:nvPr/>
         </p:nvSpPr>
@@ -5241,15 +6869,33 @@
                                   </p:childTnLst>
                                 </p:cTn>
                               </p:par>
+                            </p:childTnLst>
+                          </p:cTn>
+                        </p:par>
+                      </p:childTnLst>
+                    </p:cTn>
+                  </p:par>
+                  <p:par>
+                    <p:cTn id="7100" fill="hold">
+                      <p:stCondLst>
+                        <p:cond delay="indefinite"/>
+                      </p:stCondLst>
+                      <p:childTnLst>
+                        <p:par>
+                          <p:cTn id="7101" fill="hold">
+                            <p:stCondLst>
+                              <p:cond delay="0"/>
+                            </p:stCondLst>
+                            <p:childTnLst>
                               <p:par>
-                                <p:cTn id="6116" presetID="10" presetClass="entr" presetSubtype="0" fill="hold" grpId="0" nodeType="withEffect">
+                                <p:cTn id="7110" presetID="10" presetClass="entr" presetSubtype="0" fill="hold" grpId="0" nodeType="clickEffect">
                                   <p:stCondLst>
                                     <p:cond delay="0"/>
                                   </p:stCondLst>
                                   <p:childTnLst>
                                     <p:set>
                                       <p:cBhvr>
-                                        <p:cTn id="6117" dur="1" fill="hold">
+                                        <p:cTn id="7111" dur="1" fill="hold">
                                           <p:stCondLst>
                                             <p:cond delay="0"/>
                                           </p:stCondLst>
@@ -5267,7 +6913,7 @@
                                     </p:set>
                                     <p:anim calcmode="lin" valueType="num">
                                       <p:cBhvr additive="base">
-                                        <p:cTn id="6118" dur="500" fill="hold"/>
+                                        <p:cTn id="7112" dur="500" fill="hold"/>
                                         <p:tgtEl>
                                           <p:spTgt spid="23"/>
                                         </p:tgtEl>
@@ -5292,14 +6938,14 @@
                                 </p:cTn>
                               </p:par>
                               <p:par>
-                                <p:cTn id="6122" presetID="10" presetClass="entr" presetSubtype="0" fill="hold" grpId="0" nodeType="withEffect">
+                                <p:cTn id="7116" presetID="10" presetClass="entr" presetSubtype="0" fill="hold" grpId="0" nodeType="withEffect">
                                   <p:stCondLst>
                                     <p:cond delay="0"/>
                                   </p:stCondLst>
                                   <p:childTnLst>
                                     <p:set>
                                       <p:cBhvr>
-                                        <p:cTn id="6123" dur="1" fill="hold">
+                                        <p:cTn id="7117" dur="1" fill="hold">
                                           <p:stCondLst>
                                             <p:cond delay="0"/>
                                           </p:stCondLst>
@@ -5317,9 +6963,59 @@
                                     </p:set>
                                     <p:anim calcmode="lin" valueType="num">
                                       <p:cBhvr additive="base">
-                                        <p:cTn id="6124" dur="500" fill="hold"/>
+                                        <p:cTn id="7118" dur="500" fill="hold"/>
                                         <p:tgtEl>
                                           <p:spTgt spid="24"/>
+                                        </p:tgtEl>
+                                        <p:attrNameLst>
+                                          <p:attrName>style.opacity</p:attrName>
+                                        </p:attrNameLst>
+                                      </p:cBhvr>
+                                      <p:tavLst>
+                                        <p:tav tm="0">
+                                          <p:val>
+                                            <p:fltVal val="0"/>
+                                          </p:val>
+                                        </p:tav>
+                                        <p:tav tm="100000">
+                                          <p:val>
+                                            <p:fltVal val="1"/>
+                                          </p:val>
+                                        </p:tav>
+                                      </p:tavLst>
+                                    </p:anim>
+                                  </p:childTnLst>
+                                </p:cTn>
+                              </p:par>
+                              <p:par>
+                                <p:cTn id="7122" presetID="10" presetClass="entr" presetSubtype="0" fill="hold" grpId="0" nodeType="withEffect">
+                                  <p:stCondLst>
+                                    <p:cond delay="0"/>
+                                  </p:stCondLst>
+                                  <p:childTnLst>
+                                    <p:set>
+                                      <p:cBhvr>
+                                        <p:cTn id="7123" dur="1" fill="hold">
+                                          <p:stCondLst>
+                                            <p:cond delay="0"/>
+                                          </p:stCondLst>
+                                        </p:cTn>
+                                        <p:tgtEl>
+                                          <p:spTgt spid="25"/>
+                                        </p:tgtEl>
+                                        <p:attrNameLst>
+                                          <p:attrName>style.visibility</p:attrName>
+                                        </p:attrNameLst>
+                                      </p:cBhvr>
+                                      <p:to>
+                                        <p:strVal val="visible"/>
+                                      </p:to>
+                                    </p:set>
+                                    <p:anim calcmode="lin" valueType="num">
+                                      <p:cBhvr additive="base">
+                                        <p:cTn id="7124" dur="500" fill="hold"/>
+                                        <p:tgtEl>
+                                          <p:spTgt spid="25"/>
                                         </p:tgtEl>
                                         <p:attrNameLst>
                                           <p:attrName>style.opacity</p:attrName>
@@ -5386,6 +7082,7 @@
       <p:bldP spid="22" grpId="0"/>
       <p:bldP spid="23" grpId="0"/>
       <p:bldP spid="24" grpId="0"/>
+      <p:bldP spid="25" grpId="0"/>
     </p:bldLst>
   </p:timing>
 </p:sld>
@@ -5563,7 +7260,7 @@
                 </a:solidFill>
                 <a:latin typeface="Segoe UI"/>
               </a:rPr>
-              <a:t>Self-Consistency: Modest but Predictable Gains</a:t>
+              <a:t>Self-Consistency: Why not let the small model double-check its own answer?</a:t>
             </a:r>
           </a:p>
         </p:txBody>
@@ -5598,7 +7295,7 @@
                 </a:solidFill>
                 <a:latin typeface="Segoe UI"/>
               </a:rPr>
-              <a:t>11 / 15</a:t>
+              <a:t>11 / 16</a:t>
             </a:r>
           </a:p>
         </p:txBody>
@@ -5756,7 +7453,50 @@
       </p:sp>
       <p:sp>
         <p:nvSpPr>
-          <p:cNvPr id="11" name="Rectangle 10"/>
+          <p:cNvPr id="11" name="Down Arrow 10"/>
+          <p:cNvSpPr/>
+          <p:nvPr/>
+        </p:nvSpPr>
+        <p:spPr>
+          <a:xfrm>
+            <a:off x="1097280" y="2286000"/>
+            <a:ext cx="137160" cy="228600"/>
+          </a:xfrm>
+          <a:prstGeom prst="downArrow">
+            <a:avLst/>
+          </a:prstGeom>
+          <a:solidFill>
+            <a:srgbClr val="0078D4"/>
+          </a:solidFill>
+          <a:ln>
+            <a:noFill/>
+          </a:ln>
+        </p:spPr>
+        <p:style>
+          <a:lnRef idx="1">
+            <a:schemeClr val="accent1"/>
+          </a:lnRef>
+          <a:fillRef idx="3">
+            <a:schemeClr val="accent1"/>
+          </a:fillRef>
+          <a:effectRef idx="2">
+            <a:schemeClr val="accent1"/>
+          </a:effectRef>
+          <a:fontRef idx="minor">
+            <a:schemeClr val="lt1"/>
+          </a:fontRef>
+        </p:style>
+        <p:txBody>
+          <a:bodyPr rtlCol="0" anchor="ctr"/>
+          <a:lstStyle/>
+          <a:p>
+            <a:pPr algn="ctr"/>
+          </a:p>
+        </p:txBody>
+      </p:sp>
+      <p:sp>
+        <p:nvSpPr>
+          <p:cNvPr id="12" name="Rectangle 11"/>
           <p:cNvSpPr/>
           <p:nvPr/>
         </p:nvSpPr>
@@ -5802,7 +7542,7 @@
       </p:sp>
       <p:sp>
         <p:nvSpPr>
-          <p:cNvPr id="12" name="TextBox 11"/>
+          <p:cNvPr id="13" name="TextBox 12"/>
           <p:cNvSpPr txBox="1"/>
           <p:nvPr/>
         </p:nvSpPr>
@@ -5837,7 +7577,50 @@
       </p:sp>
       <p:sp>
         <p:nvSpPr>
-          <p:cNvPr id="13" name="Rectangle 12"/>
+          <p:cNvPr id="14" name="Down Arrow 13"/>
+          <p:cNvSpPr/>
+          <p:nvPr/>
+        </p:nvSpPr>
+        <p:spPr>
+          <a:xfrm>
+            <a:off x="2240280" y="2286000"/>
+            <a:ext cx="137160" cy="228600"/>
+          </a:xfrm>
+          <a:prstGeom prst="downArrow">
+            <a:avLst/>
+          </a:prstGeom>
+          <a:solidFill>
+            <a:srgbClr val="0078D4"/>
+          </a:solidFill>
+          <a:ln>
+            <a:noFill/>
+          </a:ln>
+        </p:spPr>
+        <p:style>
+          <a:lnRef idx="1">
+            <a:schemeClr val="accent1"/>
+          </a:lnRef>
+          <a:fillRef idx="3">
+            <a:schemeClr val="accent1"/>
+          </a:fillRef>
+          <a:effectRef idx="2">
+            <a:schemeClr val="accent1"/>
+          </a:effectRef>
+          <a:fontRef idx="minor">
+            <a:schemeClr val="lt1"/>
+          </a:fontRef>
+        </p:style>
+        <p:txBody>
+          <a:bodyPr rtlCol="0" anchor="ctr"/>
+          <a:lstStyle/>
+          <a:p>
+            <a:pPr algn="ctr"/>
+          </a:p>
+        </p:txBody>
+      </p:sp>
+      <p:sp>
+        <p:nvSpPr>
+          <p:cNvPr id="15" name="Rectangle 14"/>
           <p:cNvSpPr/>
           <p:nvPr/>
         </p:nvSpPr>
@@ -5883,7 +7666,7 @@
       </p:sp>
       <p:sp>
         <p:nvSpPr>
-          <p:cNvPr id="14" name="TextBox 13"/>
+          <p:cNvPr id="16" name="TextBox 15"/>
           <p:cNvSpPr txBox="1"/>
           <p:nvPr/>
         </p:nvSpPr>
@@ -5918,7 +7701,50 @@
       </p:sp>
       <p:sp>
         <p:nvSpPr>
-          <p:cNvPr id="15" name="Rectangle 14"/>
+          <p:cNvPr id="17" name="Down Arrow 16"/>
+          <p:cNvSpPr/>
+          <p:nvPr/>
+        </p:nvSpPr>
+        <p:spPr>
+          <a:xfrm>
+            <a:off x="3383280" y="2286000"/>
+            <a:ext cx="137160" cy="228600"/>
+          </a:xfrm>
+          <a:prstGeom prst="downArrow">
+            <a:avLst/>
+          </a:prstGeom>
+          <a:solidFill>
+            <a:srgbClr val="0078D4"/>
+          </a:solidFill>
+          <a:ln>
+            <a:noFill/>
+          </a:ln>
+        </p:spPr>
+        <p:style>
+          <a:lnRef idx="1">
+            <a:schemeClr val="accent1"/>
+          </a:lnRef>
+          <a:fillRef idx="3">
+            <a:schemeClr val="accent1"/>
+          </a:fillRef>
+          <a:effectRef idx="2">
+            <a:schemeClr val="accent1"/>
+          </a:effectRef>
+          <a:fontRef idx="minor">
+            <a:schemeClr val="lt1"/>
+          </a:fontRef>
+        </p:style>
+        <p:txBody>
+          <a:bodyPr rtlCol="0" anchor="ctr"/>
+          <a:lstStyle/>
+          <a:p>
+            <a:pPr algn="ctr"/>
+          </a:p>
+        </p:txBody>
+      </p:sp>
+      <p:sp>
+        <p:nvSpPr>
+          <p:cNvPr id="18" name="Rectangle 17"/>
           <p:cNvSpPr/>
           <p:nvPr/>
         </p:nvSpPr>
@@ -5964,7 +7790,7 @@
       </p:sp>
       <p:sp>
         <p:nvSpPr>
-          <p:cNvPr id="16" name="TextBox 15"/>
+          <p:cNvPr id="19" name="TextBox 18"/>
           <p:cNvSpPr txBox="1"/>
           <p:nvPr/>
         </p:nvSpPr>
@@ -5999,7 +7825,7 @@
       </p:sp>
       <p:sp>
         <p:nvSpPr>
-          <p:cNvPr id="17" name="Down Arrow 16"/>
+          <p:cNvPr id="20" name="Down Arrow 19"/>
           <p:cNvSpPr/>
           <p:nvPr/>
         </p:nvSpPr>
@@ -6042,7 +7868,7 @@
       </p:sp>
       <p:sp>
         <p:nvSpPr>
-          <p:cNvPr id="18" name="Rectangle 17"/>
+          <p:cNvPr id="21" name="Rectangle 20"/>
           <p:cNvSpPr/>
           <p:nvPr/>
         </p:nvSpPr>
@@ -6088,7 +7914,7 @@
       </p:sp>
       <p:sp>
         <p:nvSpPr>
-          <p:cNvPr id="19" name="TextBox 18"/>
+          <p:cNvPr id="22" name="TextBox 21"/>
           <p:cNvSpPr txBox="1"/>
           <p:nvPr/>
         </p:nvSpPr>
@@ -6123,13 +7949,13 @@
       </p:sp>
       <p:sp>
         <p:nvSpPr>
-          <p:cNvPr id="20" name="Rectangle 19"/>
+          <p:cNvPr id="23" name="Rectangle 22"/>
           <p:cNvSpPr/>
           <p:nvPr/>
         </p:nvSpPr>
         <p:spPr>
           <a:xfrm>
-            <a:off x="365760" y="4023360"/>
+            <a:off x="365760" y="4297680"/>
             <a:ext cx="4069080" cy="1828800"/>
           </a:xfrm>
           <a:prstGeom prst="rect">
@@ -6169,13 +7995,13 @@
       </p:sp>
       <p:sp>
         <p:nvSpPr>
-          <p:cNvPr id="21" name="Rectangle 20"/>
+          <p:cNvPr id="24" name="Rectangle 23"/>
           <p:cNvSpPr/>
           <p:nvPr/>
         </p:nvSpPr>
         <p:spPr>
           <a:xfrm>
-            <a:off x="365760" y="4023360"/>
+            <a:off x="365760" y="4297680"/>
             <a:ext cx="73152" cy="1828800"/>
           </a:xfrm>
           <a:prstGeom prst="rect">
@@ -6213,13 +8039,13 @@
       </p:sp>
       <p:sp>
         <p:nvSpPr>
-          <p:cNvPr id="22" name="TextBox 21"/>
+          <p:cNvPr id="25" name="TextBox 24"/>
           <p:cNvSpPr txBox="1"/>
           <p:nvPr/>
         </p:nvSpPr>
         <p:spPr>
           <a:xfrm>
-            <a:off x="530352" y="4069080"/>
+            <a:off x="530352" y="4343400"/>
             <a:ext cx="3840480" cy="1737360"/>
           </a:xfrm>
           <a:prstGeom prst="rect">
@@ -6241,18 +8067,74 @@
                 </a:solidFill>
                 <a:latin typeface="Segoe UI"/>
               </a:rPr>
-              <a:t>✔  gpt-4.1-mini N=3:  +6.8 pp accuracy.
-    MMLU-Pro: 27.8% → 44.0%.
-⚠  Cost = exactly 3×.
-    Latency only +7% (parallel).
-    Still below the next standalone tier (68.3%).</a:t>
+              <a:t>gpt-4.1-mini N=3:  +6.8 pp accuracy.</a:t>
+            </a:r>
+          </a:p>
+          <a:p>
+            <a:pPr algn="l"/>
+            <a:r>
+              <a:rPr sz="1300" b="0" i="0">
+                <a:solidFill>
+                  <a:srgbClr val="212121"/>
+                </a:solidFill>
+                <a:latin typeface="Segoe UI"/>
+              </a:rPr>
+              <a:t>MMLU-Pro: 27.8% → 44.0%.</a:t>
+            </a:r>
+          </a:p>
+          <a:p>
+            <a:pPr algn="l"/>
+            <a:r>
+              <a:rPr sz="1300" b="0" i="0">
+                <a:solidFill>
+                  <a:srgbClr val="212121"/>
+                </a:solidFill>
+                <a:latin typeface="Segoe UI"/>
+              </a:rPr>
+              <a:t/>
+            </a:r>
+          </a:p>
+          <a:p>
+            <a:pPr algn="l"/>
+            <a:r>
+              <a:rPr sz="1300" b="0" i="0">
+                <a:solidFill>
+                  <a:srgbClr val="212121"/>
+                </a:solidFill>
+                <a:latin typeface="Segoe UI"/>
+              </a:rPr>
+              <a:t>Modest gain: cost = exactly 3×,</a:t>
+            </a:r>
+          </a:p>
+          <a:p>
+            <a:pPr algn="l"/>
+            <a:r>
+              <a:rPr sz="1300" b="0" i="0">
+                <a:solidFill>
+                  <a:srgbClr val="212121"/>
+                </a:solidFill>
+                <a:latin typeface="Segoe UI"/>
+              </a:rPr>
+              <a:t>and accuracy stays below the next</a:t>
+            </a:r>
+          </a:p>
+          <a:p>
+            <a:pPr algn="l"/>
+            <a:r>
+              <a:rPr sz="1300" b="0" i="0">
+                <a:solidFill>
+                  <a:srgbClr val="212121"/>
+                </a:solidFill>
+                <a:latin typeface="Segoe UI"/>
+              </a:rPr>
+              <a:t>standalone tier (68.3%).</a:t>
             </a:r>
           </a:p>
         </p:txBody>
       </p:sp>
       <p:pic>
         <p:nvPicPr>
-          <p:cNvPr id="23" name="Picture 22" descr="chartSC5_selfcons_accuracy_comparison.png"/>
+          <p:cNvPr id="26" name="Picture 25" descr="chartSC5_selfcons_accuracy_comparison.png"/>
           <p:cNvPicPr>
             <a:picLocks noChangeAspect="1"/>
           </p:cNvPicPr>
@@ -6549,7 +8431,7 @@
                                           </p:stCondLst>
                                         </p:cTn>
                                         <p:tgtEl>
-                                          <p:spTgt spid="12"/>
+                                          <p:spTgt spid="14"/>
                                         </p:tgtEl>
                                         <p:attrNameLst>
                                           <p:attrName>style.visibility</p:attrName>
@@ -6563,7 +8445,7 @@
                                       <p:cBhvr additive="base">
                                         <p:cTn id="2118" dur="500" fill="hold"/>
                                         <p:tgtEl>
-                                          <p:spTgt spid="12"/>
+                                          <p:spTgt spid="14"/>
                                         </p:tgtEl>
                                         <p:attrNameLst>
                                           <p:attrName>style.opacity</p:attrName>
@@ -6599,7 +8481,7 @@
                                           </p:stCondLst>
                                         </p:cTn>
                                         <p:tgtEl>
-                                          <p:spTgt spid="13"/>
+                                          <p:spTgt spid="17"/>
                                         </p:tgtEl>
                                         <p:attrNameLst>
                                           <p:attrName>style.visibility</p:attrName>
@@ -6613,7 +8495,7 @@
                                       <p:cBhvr additive="base">
                                         <p:cTn id="2124" dur="500" fill="hold"/>
                                         <p:tgtEl>
-                                          <p:spTgt spid="13"/>
+                                          <p:spTgt spid="17"/>
                                         </p:tgtEl>
                                         <p:attrNameLst>
                                           <p:attrName>style.opacity</p:attrName>
@@ -6649,7 +8531,7 @@
                                           </p:stCondLst>
                                         </p:cTn>
                                         <p:tgtEl>
-                                          <p:spTgt spid="14"/>
+                                          <p:spTgt spid="12"/>
                                         </p:tgtEl>
                                         <p:attrNameLst>
                                           <p:attrName>style.visibility</p:attrName>
@@ -6663,7 +8545,7 @@
                                       <p:cBhvr additive="base">
                                         <p:cTn id="2130" dur="500" fill="hold"/>
                                         <p:tgtEl>
-                                          <p:spTgt spid="14"/>
+                                          <p:spTgt spid="12"/>
                                         </p:tgtEl>
                                         <p:attrNameLst>
                                           <p:attrName>style.opacity</p:attrName>
@@ -6699,7 +8581,7 @@
                                           </p:stCondLst>
                                         </p:cTn>
                                         <p:tgtEl>
-                                          <p:spTgt spid="15"/>
+                                          <p:spTgt spid="13"/>
                                         </p:tgtEl>
                                         <p:attrNameLst>
                                           <p:attrName>style.visibility</p:attrName>
@@ -6713,7 +8595,7 @@
                                       <p:cBhvr additive="base">
                                         <p:cTn id="2136" dur="500" fill="hold"/>
                                         <p:tgtEl>
-                                          <p:spTgt spid="15"/>
+                                          <p:spTgt spid="13"/>
                                         </p:tgtEl>
                                         <p:attrNameLst>
                                           <p:attrName>style.opacity</p:attrName>
@@ -6749,7 +8631,7 @@
                                           </p:stCondLst>
                                         </p:cTn>
                                         <p:tgtEl>
-                                          <p:spTgt spid="16"/>
+                                          <p:spTgt spid="15"/>
                                         </p:tgtEl>
                                         <p:attrNameLst>
                                           <p:attrName>style.visibility</p:attrName>
@@ -6763,7 +8645,157 @@
                                       <p:cBhvr additive="base">
                                         <p:cTn id="2142" dur="500" fill="hold"/>
                                         <p:tgtEl>
+                                          <p:spTgt spid="15"/>
+                                        </p:tgtEl>
+                                        <p:attrNameLst>
+                                          <p:attrName>style.opacity</p:attrName>
+                                        </p:attrNameLst>
+                                      </p:cBhvr>
+                                      <p:tavLst>
+                                        <p:tav tm="0">
+                                          <p:val>
+                                            <p:fltVal val="0"/>
+                                          </p:val>
+                                        </p:tav>
+                                        <p:tav tm="100000">
+                                          <p:val>
+                                            <p:fltVal val="1"/>
+                                          </p:val>
+                                        </p:tav>
+                                      </p:tavLst>
+                                    </p:anim>
+                                  </p:childTnLst>
+                                </p:cTn>
+                              </p:par>
+                              <p:par>
+                                <p:cTn id="2146" presetID="10" presetClass="entr" presetSubtype="0" fill="hold" grpId="0" nodeType="withEffect">
+                                  <p:stCondLst>
+                                    <p:cond delay="0"/>
+                                  </p:stCondLst>
+                                  <p:childTnLst>
+                                    <p:set>
+                                      <p:cBhvr>
+                                        <p:cTn id="2147" dur="1" fill="hold">
+                                          <p:stCondLst>
+                                            <p:cond delay="0"/>
+                                          </p:stCondLst>
+                                        </p:cTn>
+                                        <p:tgtEl>
                                           <p:spTgt spid="16"/>
+                                        </p:tgtEl>
+                                        <p:attrNameLst>
+                                          <p:attrName>style.visibility</p:attrName>
+                                        </p:attrNameLst>
+                                      </p:cBhvr>
+                                      <p:to>
+                                        <p:strVal val="visible"/>
+                                      </p:to>
+                                    </p:set>
+                                    <p:anim calcmode="lin" valueType="num">
+                                      <p:cBhvr additive="base">
+                                        <p:cTn id="2148" dur="500" fill="hold"/>
+                                        <p:tgtEl>
+                                          <p:spTgt spid="16"/>
+                                        </p:tgtEl>
+                                        <p:attrNameLst>
+                                          <p:attrName>style.opacity</p:attrName>
+                                        </p:attrNameLst>
+                                      </p:cBhvr>
+                                      <p:tavLst>
+                                        <p:tav tm="0">
+                                          <p:val>
+                                            <p:fltVal val="0"/>
+                                          </p:val>
+                                        </p:tav>
+                                        <p:tav tm="100000">
+                                          <p:val>
+                                            <p:fltVal val="1"/>
+                                          </p:val>
+                                        </p:tav>
+                                      </p:tavLst>
+                                    </p:anim>
+                                  </p:childTnLst>
+                                </p:cTn>
+                              </p:par>
+                              <p:par>
+                                <p:cTn id="2152" presetID="10" presetClass="entr" presetSubtype="0" fill="hold" grpId="0" nodeType="withEffect">
+                                  <p:stCondLst>
+                                    <p:cond delay="0"/>
+                                  </p:stCondLst>
+                                  <p:childTnLst>
+                                    <p:set>
+                                      <p:cBhvr>
+                                        <p:cTn id="2153" dur="1" fill="hold">
+                                          <p:stCondLst>
+                                            <p:cond delay="0"/>
+                                          </p:stCondLst>
+                                        </p:cTn>
+                                        <p:tgtEl>
+                                          <p:spTgt spid="18"/>
+                                        </p:tgtEl>
+                                        <p:attrNameLst>
+                                          <p:attrName>style.visibility</p:attrName>
+                                        </p:attrNameLst>
+                                      </p:cBhvr>
+                                      <p:to>
+                                        <p:strVal val="visible"/>
+                                      </p:to>
+                                    </p:set>
+                                    <p:anim calcmode="lin" valueType="num">
+                                      <p:cBhvr additive="base">
+                                        <p:cTn id="2154" dur="500" fill="hold"/>
+                                        <p:tgtEl>
+                                          <p:spTgt spid="18"/>
+                                        </p:tgtEl>
+                                        <p:attrNameLst>
+                                          <p:attrName>style.opacity</p:attrName>
+                                        </p:attrNameLst>
+                                      </p:cBhvr>
+                                      <p:tavLst>
+                                        <p:tav tm="0">
+                                          <p:val>
+                                            <p:fltVal val="0"/>
+                                          </p:val>
+                                        </p:tav>
+                                        <p:tav tm="100000">
+                                          <p:val>
+                                            <p:fltVal val="1"/>
+                                          </p:val>
+                                        </p:tav>
+                                      </p:tavLst>
+                                    </p:anim>
+                                  </p:childTnLst>
+                                </p:cTn>
+                              </p:par>
+                              <p:par>
+                                <p:cTn id="2158" presetID="10" presetClass="entr" presetSubtype="0" fill="hold" grpId="0" nodeType="withEffect">
+                                  <p:stCondLst>
+                                    <p:cond delay="0"/>
+                                  </p:stCondLst>
+                                  <p:childTnLst>
+                                    <p:set>
+                                      <p:cBhvr>
+                                        <p:cTn id="2159" dur="1" fill="hold">
+                                          <p:stCondLst>
+                                            <p:cond delay="0"/>
+                                          </p:stCondLst>
+                                        </p:cTn>
+                                        <p:tgtEl>
+                                          <p:spTgt spid="19"/>
+                                        </p:tgtEl>
+                                        <p:attrNameLst>
+                                          <p:attrName>style.visibility</p:attrName>
+                                        </p:attrNameLst>
+                                      </p:cBhvr>
+                                      <p:to>
+                                        <p:strVal val="visible"/>
+                                      </p:to>
+                                    </p:set>
+                                    <p:anim calcmode="lin" valueType="num">
+                                      <p:cBhvr additive="base">
+                                        <p:cTn id="2160" dur="500" fill="hold"/>
+                                        <p:tgtEl>
+                                          <p:spTgt spid="19"/>
                                         </p:tgtEl>
                                         <p:attrNameLst>
                                           <p:attrName>style.opacity</p:attrName>
@@ -6817,7 +8849,7 @@
                                           </p:stCondLst>
                                         </p:cTn>
                                         <p:tgtEl>
-                                          <p:spTgt spid="17"/>
+                                          <p:spTgt spid="20"/>
                                         </p:tgtEl>
                                         <p:attrNameLst>
                                           <p:attrName>style.visibility</p:attrName>
@@ -6831,7 +8863,7 @@
                                       <p:cBhvr additive="base">
                                         <p:cTn id="3112" dur="500" fill="hold"/>
                                         <p:tgtEl>
-                                          <p:spTgt spid="17"/>
+                                          <p:spTgt spid="20"/>
                                         </p:tgtEl>
                                         <p:attrNameLst>
                                           <p:attrName>style.opacity</p:attrName>
@@ -6867,7 +8899,7 @@
                                           </p:stCondLst>
                                         </p:cTn>
                                         <p:tgtEl>
-                                          <p:spTgt spid="18"/>
+                                          <p:spTgt spid="21"/>
                                         </p:tgtEl>
                                         <p:attrNameLst>
                                           <p:attrName>style.visibility</p:attrName>
@@ -6881,7 +8913,7 @@
                                       <p:cBhvr additive="base">
                                         <p:cTn id="3118" dur="500" fill="hold"/>
                                         <p:tgtEl>
-                                          <p:spTgt spid="18"/>
+                                          <p:spTgt spid="21"/>
                                         </p:tgtEl>
                                         <p:attrNameLst>
                                           <p:attrName>style.opacity</p:attrName>
@@ -6917,7 +8949,7 @@
                                           </p:stCondLst>
                                         </p:cTn>
                                         <p:tgtEl>
-                                          <p:spTgt spid="19"/>
+                                          <p:spTgt spid="22"/>
                                         </p:tgtEl>
                                         <p:attrNameLst>
                                           <p:attrName>style.visibility</p:attrName>
@@ -6931,7 +8963,7 @@
                                       <p:cBhvr additive="base">
                                         <p:cTn id="3124" dur="500" fill="hold"/>
                                         <p:tgtEl>
-                                          <p:spTgt spid="19"/>
+                                          <p:spTgt spid="22"/>
                                         </p:tgtEl>
                                         <p:attrNameLst>
                                           <p:attrName>style.opacity</p:attrName>
@@ -6985,7 +9017,7 @@
                                           </p:stCondLst>
                                         </p:cTn>
                                         <p:tgtEl>
-                                          <p:spTgt spid="20"/>
+                                          <p:spTgt spid="23"/>
                                         </p:tgtEl>
                                         <p:attrNameLst>
                                           <p:attrName>style.visibility</p:attrName>
@@ -6999,7 +9031,7 @@
                                       <p:cBhvr additive="base">
                                         <p:cTn id="4112" dur="500" fill="hold"/>
                                         <p:tgtEl>
-                                          <p:spTgt spid="20"/>
+                                          <p:spTgt spid="23"/>
                                         </p:tgtEl>
                                         <p:attrNameLst>
                                           <p:attrName>style.opacity</p:attrName>
@@ -7035,7 +9067,7 @@
                                           </p:stCondLst>
                                         </p:cTn>
                                         <p:tgtEl>
-                                          <p:spTgt spid="21"/>
+                                          <p:spTgt spid="24"/>
                                         </p:tgtEl>
                                         <p:attrNameLst>
                                           <p:attrName>style.visibility</p:attrName>
@@ -7049,7 +9081,7 @@
                                       <p:cBhvr additive="base">
                                         <p:cTn id="4118" dur="500" fill="hold"/>
                                         <p:tgtEl>
-                                          <p:spTgt spid="21"/>
+                                          <p:spTgt spid="24"/>
                                         </p:tgtEl>
                                         <p:attrNameLst>
                                           <p:attrName>style.opacity</p:attrName>
@@ -7085,7 +9117,7 @@
                                           </p:stCondLst>
                                         </p:cTn>
                                         <p:tgtEl>
-                                          <p:spTgt spid="22"/>
+                                          <p:spTgt spid="25"/>
                                         </p:tgtEl>
                                         <p:attrNameLst>
                                           <p:attrName>style.visibility</p:attrName>
@@ -7099,7 +9131,7 @@
                                       <p:cBhvr additive="base">
                                         <p:cTn id="4124" dur="500" fill="hold"/>
                                         <p:tgtEl>
-                                          <p:spTgt spid="22"/>
+                                          <p:spTgt spid="25"/>
                                         </p:tgtEl>
                                         <p:attrNameLst>
                                           <p:attrName>style.opacity</p:attrName>
@@ -7153,7 +9185,7 @@
                                           </p:stCondLst>
                                         </p:cTn>
                                         <p:tgtEl>
-                                          <p:spTgt spid="23"/>
+                                          <p:spTgt spid="26"/>
                                         </p:tgtEl>
                                         <p:attrNameLst>
                                           <p:attrName>style.visibility</p:attrName>
@@ -7167,7 +9199,7 @@
                                       <p:cBhvr additive="base">
                                         <p:cTn id="5112" dur="500" fill="hold"/>
                                         <p:tgtEl>
-                                          <p:spTgt spid="23"/>
+                                          <p:spTgt spid="26"/>
                                         </p:tgtEl>
                                         <p:attrNameLst>
                                           <p:attrName>style.opacity</p:attrName>
@@ -7221,18 +9253,21 @@
       <p:bldP spid="9" grpId="0"/>
       <p:bldP spid="10" grpId="0"/>
       <p:bldP spid="11" grpId="0"/>
+      <p:bldP spid="14" grpId="0"/>
+      <p:bldP spid="17" grpId="0"/>
       <p:bldP spid="12" grpId="0"/>
       <p:bldP spid="13" grpId="0"/>
-      <p:bldP spid="14" grpId="0"/>
       <p:bldP spid="15" grpId="0"/>
       <p:bldP spid="16" grpId="0"/>
-      <p:bldP spid="17" grpId="0"/>
       <p:bldP spid="18" grpId="0"/>
       <p:bldP spid="19" grpId="0"/>
       <p:bldP spid="20" grpId="0"/>
       <p:bldP spid="21" grpId="0"/>
       <p:bldP spid="22" grpId="0"/>
       <p:bldP spid="23" grpId="0"/>
+      <p:bldP spid="24" grpId="0"/>
+      <p:bldP spid="25" grpId="0"/>
+      <p:bldP spid="26" grpId="0"/>
     </p:bldLst>
   </p:timing>
 </p:sld>
@@ -7410,7 +9445,7 @@
                 </a:solidFill>
                 <a:latin typeface="Segoe UI"/>
               </a:rPr>
-              <a:t>Router: The Only Strategy That Wins (Climax)</a:t>
+              <a:t>Router: Why not let an intelligent LLM decide which model to use?</a:t>
             </a:r>
           </a:p>
         </p:txBody>
@@ -7445,7 +9480,7 @@
                 </a:solidFill>
                 <a:latin typeface="Segoe UI"/>
               </a:rPr>
-              <a:t>12 / 15</a:t>
+              <a:t>12 / 16</a:t>
             </a:r>
           </a:p>
         </p:txBody>
@@ -8052,11 +10087,55 @@
                 </a:solidFill>
                 <a:latin typeface="Segoe UI"/>
               </a:rPr>
-              <a:t>✔  +15.5 pp accuracy over small baseline
-    at 16× lower cost than gpt-5.4.
-Reward = −0.498  (beats gpt-4.1 at −0.527).
-The ONLY optimization that wins a region
-of the macro decision map.</a:t>
+              <a:t>Accuracy clearly above the small baseline, at a fraction</a:t>
+            </a:r>
+          </a:p>
+          <a:p>
+            <a:pPr algn="l"/>
+            <a:r>
+              <a:rPr sz="1200" b="0" i="0">
+                <a:solidFill>
+                  <a:srgbClr val="212121"/>
+                </a:solidFill>
+                <a:latin typeface="Segoe UI"/>
+              </a:rPr>
+              <a:t>of the cost of the large model.</a:t>
+            </a:r>
+          </a:p>
+          <a:p>
+            <a:pPr algn="l"/>
+            <a:r>
+              <a:rPr sz="1200" b="0" i="0">
+                <a:solidFill>
+                  <a:srgbClr val="212121"/>
+                </a:solidFill>
+                <a:latin typeface="Segoe UI"/>
+              </a:rPr>
+              <a:t/>
+            </a:r>
+          </a:p>
+          <a:p>
+            <a:pPr algn="l"/>
+            <a:r>
+              <a:rPr sz="1200" b="0" i="0">
+                <a:solidFill>
+                  <a:srgbClr val="212121"/>
+                </a:solidFill>
+                <a:latin typeface="Segoe UI"/>
+              </a:rPr>
+              <a:t>Trade-off: latency stays close to the large model,</a:t>
+            </a:r>
+          </a:p>
+          <a:p>
+            <a:pPr algn="l"/>
+            <a:r>
+              <a:rPr sz="1200" b="0" i="0">
+                <a:solidFill>
+                  <a:srgbClr val="212121"/>
+                </a:solidFill>
+                <a:latin typeface="Segoe UI"/>
+              </a:rPr>
+              <a:t>because every query first passes through the router.</a:t>
             </a:r>
           </a:p>
         </p:txBody>
@@ -9205,7 +11284,7 @@
                 </a:solidFill>
                 <a:latin typeface="Segoe UI"/>
               </a:rPr>
-              <a:t>13 / 15</a:t>
+              <a:t>13 / 16</a:t>
             </a:r>
           </a:p>
         </p:txBody>
@@ -9260,9 +11339,7 @@
         <a:graphic>
           <a:graphicData uri="http://schemas.openxmlformats.org/drawingml/2006/table">
             <a:tbl>
-              <a:tblPr firstRow="1" bandRow="1">
-                <a:tableStyleId>{5C22544A-7EE6-4342-B048-85BDC9FD1C3A}</a:tableStyleId>
-              </a:tblPr>
+              <a:tblPr firstRow="0" bandRow="0" firstCol="0"/>
               <a:tblGrid>
                 <a:gridCol w="1371600"/>
                 <a:gridCol w="4023360"/>
@@ -9293,6 +11370,34 @@
                     <a:solidFill>
                       <a:srgbClr val="0B1F4B"/>
                     </a:solidFill>
+                    <a:lnL w="12700" cap="flat" cmpd="sng" algn="ctr">
+                      <a:solidFill>
+                        <a:srgbClr val="0B1F4B"/>
+                      </a:solidFill>
+                      <a:prstDash val="solid"/>
+                      <a:round/>
+                    </a:lnL>
+                    <a:lnR w="12700" cap="flat" cmpd="sng" algn="ctr">
+                      <a:solidFill>
+                        <a:srgbClr val="0B1F4B"/>
+                      </a:solidFill>
+                      <a:prstDash val="solid"/>
+                      <a:round/>
+                    </a:lnR>
+                    <a:lnT w="12700" cap="flat" cmpd="sng" algn="ctr">
+                      <a:solidFill>
+                        <a:srgbClr val="0B1F4B"/>
+                      </a:solidFill>
+                      <a:prstDash val="solid"/>
+                      <a:round/>
+                    </a:lnT>
+                    <a:lnB w="12700" cap="flat" cmpd="sng" algn="ctr">
+                      <a:solidFill>
+                        <a:srgbClr val="0B1F4B"/>
+                      </a:solidFill>
+                      <a:prstDash val="solid"/>
+                      <a:round/>
+                    </a:lnB>
                   </a:tcPr>
                 </a:tc>
                 <a:tc>
@@ -9316,6 +11421,34 @@
                     <a:solidFill>
                       <a:srgbClr val="0B1F4B"/>
                     </a:solidFill>
+                    <a:lnL w="12700" cap="flat" cmpd="sng" algn="ctr">
+                      <a:solidFill>
+                        <a:srgbClr val="0B1F4B"/>
+                      </a:solidFill>
+                      <a:prstDash val="solid"/>
+                      <a:round/>
+                    </a:lnL>
+                    <a:lnR w="12700" cap="flat" cmpd="sng" algn="ctr">
+                      <a:solidFill>
+                        <a:srgbClr val="0B1F4B"/>
+                      </a:solidFill>
+                      <a:prstDash val="solid"/>
+                      <a:round/>
+                    </a:lnR>
+                    <a:lnT w="12700" cap="flat" cmpd="sng" algn="ctr">
+                      <a:solidFill>
+                        <a:srgbClr val="0B1F4B"/>
+                      </a:solidFill>
+                      <a:prstDash val="solid"/>
+                      <a:round/>
+                    </a:lnT>
+                    <a:lnB w="12700" cap="flat" cmpd="sng" algn="ctr">
+                      <a:solidFill>
+                        <a:srgbClr val="0B1F4B"/>
+                      </a:solidFill>
+                      <a:prstDash val="solid"/>
+                      <a:round/>
+                    </a:lnB>
                   </a:tcPr>
                 </a:tc>
                 <a:tc>
@@ -9339,6 +11472,34 @@
                     <a:solidFill>
                       <a:srgbClr val="0B1F4B"/>
                     </a:solidFill>
+                    <a:lnL w="12700" cap="flat" cmpd="sng" algn="ctr">
+                      <a:solidFill>
+                        <a:srgbClr val="0B1F4B"/>
+                      </a:solidFill>
+                      <a:prstDash val="solid"/>
+                      <a:round/>
+                    </a:lnL>
+                    <a:lnR w="12700" cap="flat" cmpd="sng" algn="ctr">
+                      <a:solidFill>
+                        <a:srgbClr val="0B1F4B"/>
+                      </a:solidFill>
+                      <a:prstDash val="solid"/>
+                      <a:round/>
+                    </a:lnR>
+                    <a:lnT w="12700" cap="flat" cmpd="sng" algn="ctr">
+                      <a:solidFill>
+                        <a:srgbClr val="0B1F4B"/>
+                      </a:solidFill>
+                      <a:prstDash val="solid"/>
+                      <a:round/>
+                    </a:lnT>
+                    <a:lnB w="12700" cap="flat" cmpd="sng" algn="ctr">
+                      <a:solidFill>
+                        <a:srgbClr val="0B1F4B"/>
+                      </a:solidFill>
+                      <a:prstDash val="solid"/>
+                      <a:round/>
+                    </a:lnB>
                   </a:tcPr>
                 </a:tc>
                 <a:tc>
@@ -9362,6 +11523,34 @@
                     <a:solidFill>
                       <a:srgbClr val="0B1F4B"/>
                     </a:solidFill>
+                    <a:lnL w="12700" cap="flat" cmpd="sng" algn="ctr">
+                      <a:solidFill>
+                        <a:srgbClr val="0B1F4B"/>
+                      </a:solidFill>
+                      <a:prstDash val="solid"/>
+                      <a:round/>
+                    </a:lnL>
+                    <a:lnR w="12700" cap="flat" cmpd="sng" algn="ctr">
+                      <a:solidFill>
+                        <a:srgbClr val="0B1F4B"/>
+                      </a:solidFill>
+                      <a:prstDash val="solid"/>
+                      <a:round/>
+                    </a:lnR>
+                    <a:lnT w="12700" cap="flat" cmpd="sng" algn="ctr">
+                      <a:solidFill>
+                        <a:srgbClr val="0B1F4B"/>
+                      </a:solidFill>
+                      <a:prstDash val="solid"/>
+                      <a:round/>
+                    </a:lnT>
+                    <a:lnB w="12700" cap="flat" cmpd="sng" algn="ctr">
+                      <a:solidFill>
+                        <a:srgbClr val="0B1F4B"/>
+                      </a:solidFill>
+                      <a:prstDash val="solid"/>
+                      <a:round/>
+                    </a:lnB>
                   </a:tcPr>
                 </a:tc>
                 <a:tc>
@@ -9385,6 +11574,34 @@
                     <a:solidFill>
                       <a:srgbClr val="0B1F4B"/>
                     </a:solidFill>
+                    <a:lnL w="12700" cap="flat" cmpd="sng" algn="ctr">
+                      <a:solidFill>
+                        <a:srgbClr val="0B1F4B"/>
+                      </a:solidFill>
+                      <a:prstDash val="solid"/>
+                      <a:round/>
+                    </a:lnL>
+                    <a:lnR w="12700" cap="flat" cmpd="sng" algn="ctr">
+                      <a:solidFill>
+                        <a:srgbClr val="0B1F4B"/>
+                      </a:solidFill>
+                      <a:prstDash val="solid"/>
+                      <a:round/>
+                    </a:lnR>
+                    <a:lnT w="12700" cap="flat" cmpd="sng" algn="ctr">
+                      <a:solidFill>
+                        <a:srgbClr val="0B1F4B"/>
+                      </a:solidFill>
+                      <a:prstDash val="solid"/>
+                      <a:round/>
+                    </a:lnT>
+                    <a:lnB w="12700" cap="flat" cmpd="sng" algn="ctr">
+                      <a:solidFill>
+                        <a:srgbClr val="0B1F4B"/>
+                      </a:solidFill>
+                      <a:prstDash val="solid"/>
+                      <a:round/>
+                    </a:lnB>
                   </a:tcPr>
                 </a:tc>
                 <a:tc>
@@ -9408,6 +11625,34 @@
                     <a:solidFill>
                       <a:srgbClr val="0B1F4B"/>
                     </a:solidFill>
+                    <a:lnL w="12700" cap="flat" cmpd="sng" algn="ctr">
+                      <a:solidFill>
+                        <a:srgbClr val="0B1F4B"/>
+                      </a:solidFill>
+                      <a:prstDash val="solid"/>
+                      <a:round/>
+                    </a:lnL>
+                    <a:lnR w="12700" cap="flat" cmpd="sng" algn="ctr">
+                      <a:solidFill>
+                        <a:srgbClr val="0B1F4B"/>
+                      </a:solidFill>
+                      <a:prstDash val="solid"/>
+                      <a:round/>
+                    </a:lnR>
+                    <a:lnT w="12700" cap="flat" cmpd="sng" algn="ctr">
+                      <a:solidFill>
+                        <a:srgbClr val="0B1F4B"/>
+                      </a:solidFill>
+                      <a:prstDash val="solid"/>
+                      <a:round/>
+                    </a:lnT>
+                    <a:lnB w="12700" cap="flat" cmpd="sng" algn="ctr">
+                      <a:solidFill>
+                        <a:srgbClr val="0B1F4B"/>
+                      </a:solidFill>
+                      <a:prstDash val="solid"/>
+                      <a:round/>
+                    </a:lnB>
                   </a:tcPr>
                 </a:tc>
               </a:tr>
@@ -9433,6 +11678,34 @@
                     <a:solidFill>
                       <a:srgbClr val="FFFFFF"/>
                     </a:solidFill>
+                    <a:lnL w="12700" cap="flat" cmpd="sng" algn="ctr">
+                      <a:solidFill>
+                        <a:srgbClr val="0B1F4B"/>
+                      </a:solidFill>
+                      <a:prstDash val="solid"/>
+                      <a:round/>
+                    </a:lnL>
+                    <a:lnR w="12700" cap="flat" cmpd="sng" algn="ctr">
+                      <a:solidFill>
+                        <a:srgbClr val="0B1F4B"/>
+                      </a:solidFill>
+                      <a:prstDash val="solid"/>
+                      <a:round/>
+                    </a:lnR>
+                    <a:lnT w="12700" cap="flat" cmpd="sng" algn="ctr">
+                      <a:solidFill>
+                        <a:srgbClr val="0B1F4B"/>
+                      </a:solidFill>
+                      <a:prstDash val="solid"/>
+                      <a:round/>
+                    </a:lnT>
+                    <a:lnB w="12700" cap="flat" cmpd="sng" algn="ctr">
+                      <a:solidFill>
+                        <a:srgbClr val="0B1F4B"/>
+                      </a:solidFill>
+                      <a:prstDash val="solid"/>
+                      <a:round/>
+                    </a:lnB>
                   </a:tcPr>
                 </a:tc>
                 <a:tc>
@@ -9456,6 +11729,34 @@
                     <a:solidFill>
                       <a:srgbClr val="FFFFFF"/>
                     </a:solidFill>
+                    <a:lnL w="12700" cap="flat" cmpd="sng" algn="ctr">
+                      <a:solidFill>
+                        <a:srgbClr val="0B1F4B"/>
+                      </a:solidFill>
+                      <a:prstDash val="solid"/>
+                      <a:round/>
+                    </a:lnL>
+                    <a:lnR w="12700" cap="flat" cmpd="sng" algn="ctr">
+                      <a:solidFill>
+                        <a:srgbClr val="0B1F4B"/>
+                      </a:solidFill>
+                      <a:prstDash val="solid"/>
+                      <a:round/>
+                    </a:lnR>
+                    <a:lnT w="12700" cap="flat" cmpd="sng" algn="ctr">
+                      <a:solidFill>
+                        <a:srgbClr val="0B1F4B"/>
+                      </a:solidFill>
+                      <a:prstDash val="solid"/>
+                      <a:round/>
+                    </a:lnT>
+                    <a:lnB w="12700" cap="flat" cmpd="sng" algn="ctr">
+                      <a:solidFill>
+                        <a:srgbClr val="0B1F4B"/>
+                      </a:solidFill>
+                      <a:prstDash val="solid"/>
+                      <a:round/>
+                    </a:lnB>
                   </a:tcPr>
                 </a:tc>
                 <a:tc>
@@ -9479,6 +11780,34 @@
                     <a:solidFill>
                       <a:srgbClr val="E6F4EA"/>
                     </a:solidFill>
+                    <a:lnL w="12700" cap="flat" cmpd="sng" algn="ctr">
+                      <a:solidFill>
+                        <a:srgbClr val="0B1F4B"/>
+                      </a:solidFill>
+                      <a:prstDash val="solid"/>
+                      <a:round/>
+                    </a:lnL>
+                    <a:lnR w="12700" cap="flat" cmpd="sng" algn="ctr">
+                      <a:solidFill>
+                        <a:srgbClr val="0B1F4B"/>
+                      </a:solidFill>
+                      <a:prstDash val="solid"/>
+                      <a:round/>
+                    </a:lnR>
+                    <a:lnT w="12700" cap="flat" cmpd="sng" algn="ctr">
+                      <a:solidFill>
+                        <a:srgbClr val="0B1F4B"/>
+                      </a:solidFill>
+                      <a:prstDash val="solid"/>
+                      <a:round/>
+                    </a:lnT>
+                    <a:lnB w="12700" cap="flat" cmpd="sng" algn="ctr">
+                      <a:solidFill>
+                        <a:srgbClr val="0B1F4B"/>
+                      </a:solidFill>
+                      <a:prstDash val="solid"/>
+                      <a:round/>
+                    </a:lnB>
                   </a:tcPr>
                 </a:tc>
                 <a:tc>
@@ -9500,8 +11829,36 @@
                   </a:txBody>
                   <a:tcPr marL="73152" marR="73152" marT="45720" marB="45720" anchor="ctr">
                     <a:solidFill>
-                      <a:srgbClr val="FFFFFF"/>
+                      <a:srgbClr val="FDE7E9"/>
                     </a:solidFill>
+                    <a:lnL w="12700" cap="flat" cmpd="sng" algn="ctr">
+                      <a:solidFill>
+                        <a:srgbClr val="0B1F4B"/>
+                      </a:solidFill>
+                      <a:prstDash val="solid"/>
+                      <a:round/>
+                    </a:lnL>
+                    <a:lnR w="12700" cap="flat" cmpd="sng" algn="ctr">
+                      <a:solidFill>
+                        <a:srgbClr val="0B1F4B"/>
+                      </a:solidFill>
+                      <a:prstDash val="solid"/>
+                      <a:round/>
+                    </a:lnR>
+                    <a:lnT w="12700" cap="flat" cmpd="sng" algn="ctr">
+                      <a:solidFill>
+                        <a:srgbClr val="0B1F4B"/>
+                      </a:solidFill>
+                      <a:prstDash val="solid"/>
+                      <a:round/>
+                    </a:lnT>
+                    <a:lnB w="12700" cap="flat" cmpd="sng" algn="ctr">
+                      <a:solidFill>
+                        <a:srgbClr val="0B1F4B"/>
+                      </a:solidFill>
+                      <a:prstDash val="solid"/>
+                      <a:round/>
+                    </a:lnB>
                   </a:tcPr>
                 </a:tc>
                 <a:tc>
@@ -9525,6 +11882,34 @@
                     <a:solidFill>
                       <a:srgbClr val="FDE7E9"/>
                     </a:solidFill>
+                    <a:lnL w="12700" cap="flat" cmpd="sng" algn="ctr">
+                      <a:solidFill>
+                        <a:srgbClr val="0B1F4B"/>
+                      </a:solidFill>
+                      <a:prstDash val="solid"/>
+                      <a:round/>
+                    </a:lnL>
+                    <a:lnR w="12700" cap="flat" cmpd="sng" algn="ctr">
+                      <a:solidFill>
+                        <a:srgbClr val="0B1F4B"/>
+                      </a:solidFill>
+                      <a:prstDash val="solid"/>
+                      <a:round/>
+                    </a:lnR>
+                    <a:lnT w="12700" cap="flat" cmpd="sng" algn="ctr">
+                      <a:solidFill>
+                        <a:srgbClr val="0B1F4B"/>
+                      </a:solidFill>
+                      <a:prstDash val="solid"/>
+                      <a:round/>
+                    </a:lnT>
+                    <a:lnB w="12700" cap="flat" cmpd="sng" algn="ctr">
+                      <a:solidFill>
+                        <a:srgbClr val="0B1F4B"/>
+                      </a:solidFill>
+                      <a:prstDash val="solid"/>
+                      <a:round/>
+                    </a:lnB>
                   </a:tcPr>
                 </a:tc>
                 <a:tc>
@@ -9548,6 +11933,34 @@
                     <a:solidFill>
                       <a:srgbClr val="E6F4EA"/>
                     </a:solidFill>
+                    <a:lnL w="12700" cap="flat" cmpd="sng" algn="ctr">
+                      <a:solidFill>
+                        <a:srgbClr val="0B1F4B"/>
+                      </a:solidFill>
+                      <a:prstDash val="solid"/>
+                      <a:round/>
+                    </a:lnL>
+                    <a:lnR w="12700" cap="flat" cmpd="sng" algn="ctr">
+                      <a:solidFill>
+                        <a:srgbClr val="0B1F4B"/>
+                      </a:solidFill>
+                      <a:prstDash val="solid"/>
+                      <a:round/>
+                    </a:lnR>
+                    <a:lnT w="12700" cap="flat" cmpd="sng" algn="ctr">
+                      <a:solidFill>
+                        <a:srgbClr val="0B1F4B"/>
+                      </a:solidFill>
+                      <a:prstDash val="solid"/>
+                      <a:round/>
+                    </a:lnT>
+                    <a:lnB w="12700" cap="flat" cmpd="sng" algn="ctr">
+                      <a:solidFill>
+                        <a:srgbClr val="0B1F4B"/>
+                      </a:solidFill>
+                      <a:prstDash val="solid"/>
+                      <a:round/>
+                    </a:lnB>
                   </a:tcPr>
                 </a:tc>
               </a:tr>
@@ -9573,6 +11986,34 @@
                     <a:solidFill>
                       <a:srgbClr val="F7F9FC"/>
                     </a:solidFill>
+                    <a:lnL w="12700" cap="flat" cmpd="sng" algn="ctr">
+                      <a:solidFill>
+                        <a:srgbClr val="0B1F4B"/>
+                      </a:solidFill>
+                      <a:prstDash val="solid"/>
+                      <a:round/>
+                    </a:lnL>
+                    <a:lnR w="12700" cap="flat" cmpd="sng" algn="ctr">
+                      <a:solidFill>
+                        <a:srgbClr val="0B1F4B"/>
+                      </a:solidFill>
+                      <a:prstDash val="solid"/>
+                      <a:round/>
+                    </a:lnR>
+                    <a:lnT w="12700" cap="flat" cmpd="sng" algn="ctr">
+                      <a:solidFill>
+                        <a:srgbClr val="0B1F4B"/>
+                      </a:solidFill>
+                      <a:prstDash val="solid"/>
+                      <a:round/>
+                    </a:lnT>
+                    <a:lnB w="12700" cap="flat" cmpd="sng" algn="ctr">
+                      <a:solidFill>
+                        <a:srgbClr val="0B1F4B"/>
+                      </a:solidFill>
+                      <a:prstDash val="solid"/>
+                      <a:round/>
+                    </a:lnB>
                   </a:tcPr>
                 </a:tc>
                 <a:tc>
@@ -9596,6 +12037,34 @@
                     <a:solidFill>
                       <a:srgbClr val="F7F9FC"/>
                     </a:solidFill>
+                    <a:lnL w="12700" cap="flat" cmpd="sng" algn="ctr">
+                      <a:solidFill>
+                        <a:srgbClr val="0B1F4B"/>
+                      </a:solidFill>
+                      <a:prstDash val="solid"/>
+                      <a:round/>
+                    </a:lnL>
+                    <a:lnR w="12700" cap="flat" cmpd="sng" algn="ctr">
+                      <a:solidFill>
+                        <a:srgbClr val="0B1F4B"/>
+                      </a:solidFill>
+                      <a:prstDash val="solid"/>
+                      <a:round/>
+                    </a:lnR>
+                    <a:lnT w="12700" cap="flat" cmpd="sng" algn="ctr">
+                      <a:solidFill>
+                        <a:srgbClr val="0B1F4B"/>
+                      </a:solidFill>
+                      <a:prstDash val="solid"/>
+                      <a:round/>
+                    </a:lnT>
+                    <a:lnB w="12700" cap="flat" cmpd="sng" algn="ctr">
+                      <a:solidFill>
+                        <a:srgbClr val="0B1F4B"/>
+                      </a:solidFill>
+                      <a:prstDash val="solid"/>
+                      <a:round/>
+                    </a:lnB>
                   </a:tcPr>
                 </a:tc>
                 <a:tc>
@@ -9619,6 +12088,34 @@
                     <a:solidFill>
                       <a:srgbClr val="F7F9FC"/>
                     </a:solidFill>
+                    <a:lnL w="12700" cap="flat" cmpd="sng" algn="ctr">
+                      <a:solidFill>
+                        <a:srgbClr val="0B1F4B"/>
+                      </a:solidFill>
+                      <a:prstDash val="solid"/>
+                      <a:round/>
+                    </a:lnL>
+                    <a:lnR w="12700" cap="flat" cmpd="sng" algn="ctr">
+                      <a:solidFill>
+                        <a:srgbClr val="0B1F4B"/>
+                      </a:solidFill>
+                      <a:prstDash val="solid"/>
+                      <a:round/>
+                    </a:lnR>
+                    <a:lnT w="12700" cap="flat" cmpd="sng" algn="ctr">
+                      <a:solidFill>
+                        <a:srgbClr val="0B1F4B"/>
+                      </a:solidFill>
+                      <a:prstDash val="solid"/>
+                      <a:round/>
+                    </a:lnT>
+                    <a:lnB w="12700" cap="flat" cmpd="sng" algn="ctr">
+                      <a:solidFill>
+                        <a:srgbClr val="0B1F4B"/>
+                      </a:solidFill>
+                      <a:prstDash val="solid"/>
+                      <a:round/>
+                    </a:lnB>
                   </a:tcPr>
                 </a:tc>
                 <a:tc>
@@ -9642,6 +12139,34 @@
                     <a:solidFill>
                       <a:srgbClr val="F7F9FC"/>
                     </a:solidFill>
+                    <a:lnL w="12700" cap="flat" cmpd="sng" algn="ctr">
+                      <a:solidFill>
+                        <a:srgbClr val="0B1F4B"/>
+                      </a:solidFill>
+                      <a:prstDash val="solid"/>
+                      <a:round/>
+                    </a:lnL>
+                    <a:lnR w="12700" cap="flat" cmpd="sng" algn="ctr">
+                      <a:solidFill>
+                        <a:srgbClr val="0B1F4B"/>
+                      </a:solidFill>
+                      <a:prstDash val="solid"/>
+                      <a:round/>
+                    </a:lnR>
+                    <a:lnT w="12700" cap="flat" cmpd="sng" algn="ctr">
+                      <a:solidFill>
+                        <a:srgbClr val="0B1F4B"/>
+                      </a:solidFill>
+                      <a:prstDash val="solid"/>
+                      <a:round/>
+                    </a:lnT>
+                    <a:lnB w="12700" cap="flat" cmpd="sng" algn="ctr">
+                      <a:solidFill>
+                        <a:srgbClr val="0B1F4B"/>
+                      </a:solidFill>
+                      <a:prstDash val="solid"/>
+                      <a:round/>
+                    </a:lnB>
                   </a:tcPr>
                 </a:tc>
                 <a:tc>
@@ -9665,6 +12190,34 @@
                     <a:solidFill>
                       <a:srgbClr val="F7F9FC"/>
                     </a:solidFill>
+                    <a:lnL w="12700" cap="flat" cmpd="sng" algn="ctr">
+                      <a:solidFill>
+                        <a:srgbClr val="0B1F4B"/>
+                      </a:solidFill>
+                      <a:prstDash val="solid"/>
+                      <a:round/>
+                    </a:lnL>
+                    <a:lnR w="12700" cap="flat" cmpd="sng" algn="ctr">
+                      <a:solidFill>
+                        <a:srgbClr val="0B1F4B"/>
+                      </a:solidFill>
+                      <a:prstDash val="solid"/>
+                      <a:round/>
+                    </a:lnR>
+                    <a:lnT w="12700" cap="flat" cmpd="sng" algn="ctr">
+                      <a:solidFill>
+                        <a:srgbClr val="0B1F4B"/>
+                      </a:solidFill>
+                      <a:prstDash val="solid"/>
+                      <a:round/>
+                    </a:lnT>
+                    <a:lnB w="12700" cap="flat" cmpd="sng" algn="ctr">
+                      <a:solidFill>
+                        <a:srgbClr val="0B1F4B"/>
+                      </a:solidFill>
+                      <a:prstDash val="solid"/>
+                      <a:round/>
+                    </a:lnB>
                   </a:tcPr>
                 </a:tc>
                 <a:tc>
@@ -9688,6 +12241,34 @@
                     <a:solidFill>
                       <a:srgbClr val="F7F9FC"/>
                     </a:solidFill>
+                    <a:lnL w="12700" cap="flat" cmpd="sng" algn="ctr">
+                      <a:solidFill>
+                        <a:srgbClr val="0B1F4B"/>
+                      </a:solidFill>
+                      <a:prstDash val="solid"/>
+                      <a:round/>
+                    </a:lnL>
+                    <a:lnR w="12700" cap="flat" cmpd="sng" algn="ctr">
+                      <a:solidFill>
+                        <a:srgbClr val="0B1F4B"/>
+                      </a:solidFill>
+                      <a:prstDash val="solid"/>
+                      <a:round/>
+                    </a:lnR>
+                    <a:lnT w="12700" cap="flat" cmpd="sng" algn="ctr">
+                      <a:solidFill>
+                        <a:srgbClr val="0B1F4B"/>
+                      </a:solidFill>
+                      <a:prstDash val="solid"/>
+                      <a:round/>
+                    </a:lnT>
+                    <a:lnB w="12700" cap="flat" cmpd="sng" algn="ctr">
+                      <a:solidFill>
+                        <a:srgbClr val="0B1F4B"/>
+                      </a:solidFill>
+                      <a:prstDash val="solid"/>
+                      <a:round/>
+                    </a:lnB>
                   </a:tcPr>
                 </a:tc>
               </a:tr>
@@ -9713,6 +12294,34 @@
                     <a:solidFill>
                       <a:srgbClr val="FFFFFF"/>
                     </a:solidFill>
+                    <a:lnL w="12700" cap="flat" cmpd="sng" algn="ctr">
+                      <a:solidFill>
+                        <a:srgbClr val="0B1F4B"/>
+                      </a:solidFill>
+                      <a:prstDash val="solid"/>
+                      <a:round/>
+                    </a:lnL>
+                    <a:lnR w="12700" cap="flat" cmpd="sng" algn="ctr">
+                      <a:solidFill>
+                        <a:srgbClr val="0B1F4B"/>
+                      </a:solidFill>
+                      <a:prstDash val="solid"/>
+                      <a:round/>
+                    </a:lnR>
+                    <a:lnT w="12700" cap="flat" cmpd="sng" algn="ctr">
+                      <a:solidFill>
+                        <a:srgbClr val="0B1F4B"/>
+                      </a:solidFill>
+                      <a:prstDash val="solid"/>
+                      <a:round/>
+                    </a:lnT>
+                    <a:lnB w="12700" cap="flat" cmpd="sng" algn="ctr">
+                      <a:solidFill>
+                        <a:srgbClr val="0B1F4B"/>
+                      </a:solidFill>
+                      <a:prstDash val="solid"/>
+                      <a:round/>
+                    </a:lnB>
                   </a:tcPr>
                 </a:tc>
                 <a:tc>
@@ -9736,6 +12345,34 @@
                     <a:solidFill>
                       <a:srgbClr val="FFFFFF"/>
                     </a:solidFill>
+                    <a:lnL w="12700" cap="flat" cmpd="sng" algn="ctr">
+                      <a:solidFill>
+                        <a:srgbClr val="0B1F4B"/>
+                      </a:solidFill>
+                      <a:prstDash val="solid"/>
+                      <a:round/>
+                    </a:lnL>
+                    <a:lnR w="12700" cap="flat" cmpd="sng" algn="ctr">
+                      <a:solidFill>
+                        <a:srgbClr val="0B1F4B"/>
+                      </a:solidFill>
+                      <a:prstDash val="solid"/>
+                      <a:round/>
+                    </a:lnR>
+                    <a:lnT w="12700" cap="flat" cmpd="sng" algn="ctr">
+                      <a:solidFill>
+                        <a:srgbClr val="0B1F4B"/>
+                      </a:solidFill>
+                      <a:prstDash val="solid"/>
+                      <a:round/>
+                    </a:lnT>
+                    <a:lnB w="12700" cap="flat" cmpd="sng" algn="ctr">
+                      <a:solidFill>
+                        <a:srgbClr val="0B1F4B"/>
+                      </a:solidFill>
+                      <a:prstDash val="solid"/>
+                      <a:round/>
+                    </a:lnB>
                   </a:tcPr>
                 </a:tc>
                 <a:tc>
@@ -9759,6 +12396,34 @@
                     <a:solidFill>
                       <a:srgbClr val="FFFFFF"/>
                     </a:solidFill>
+                    <a:lnL w="12700" cap="flat" cmpd="sng" algn="ctr">
+                      <a:solidFill>
+                        <a:srgbClr val="0B1F4B"/>
+                      </a:solidFill>
+                      <a:prstDash val="solid"/>
+                      <a:round/>
+                    </a:lnL>
+                    <a:lnR w="12700" cap="flat" cmpd="sng" algn="ctr">
+                      <a:solidFill>
+                        <a:srgbClr val="0B1F4B"/>
+                      </a:solidFill>
+                      <a:prstDash val="solid"/>
+                      <a:round/>
+                    </a:lnR>
+                    <a:lnT w="12700" cap="flat" cmpd="sng" algn="ctr">
+                      <a:solidFill>
+                        <a:srgbClr val="0B1F4B"/>
+                      </a:solidFill>
+                      <a:prstDash val="solid"/>
+                      <a:round/>
+                    </a:lnT>
+                    <a:lnB w="12700" cap="flat" cmpd="sng" algn="ctr">
+                      <a:solidFill>
+                        <a:srgbClr val="0B1F4B"/>
+                      </a:solidFill>
+                      <a:prstDash val="solid"/>
+                      <a:round/>
+                    </a:lnB>
                   </a:tcPr>
                 </a:tc>
                 <a:tc>
@@ -9782,6 +12447,34 @@
                     <a:solidFill>
                       <a:srgbClr val="FFFFFF"/>
                     </a:solidFill>
+                    <a:lnL w="12700" cap="flat" cmpd="sng" algn="ctr">
+                      <a:solidFill>
+                        <a:srgbClr val="0B1F4B"/>
+                      </a:solidFill>
+                      <a:prstDash val="solid"/>
+                      <a:round/>
+                    </a:lnL>
+                    <a:lnR w="12700" cap="flat" cmpd="sng" algn="ctr">
+                      <a:solidFill>
+                        <a:srgbClr val="0B1F4B"/>
+                      </a:solidFill>
+                      <a:prstDash val="solid"/>
+                      <a:round/>
+                    </a:lnR>
+                    <a:lnT w="12700" cap="flat" cmpd="sng" algn="ctr">
+                      <a:solidFill>
+                        <a:srgbClr val="0B1F4B"/>
+                      </a:solidFill>
+                      <a:prstDash val="solid"/>
+                      <a:round/>
+                    </a:lnT>
+                    <a:lnB w="12700" cap="flat" cmpd="sng" algn="ctr">
+                      <a:solidFill>
+                        <a:srgbClr val="0B1F4B"/>
+                      </a:solidFill>
+                      <a:prstDash val="solid"/>
+                      <a:round/>
+                    </a:lnB>
                   </a:tcPr>
                 </a:tc>
                 <a:tc>
@@ -9805,6 +12498,34 @@
                     <a:solidFill>
                       <a:srgbClr val="FFFFFF"/>
                     </a:solidFill>
+                    <a:lnL w="12700" cap="flat" cmpd="sng" algn="ctr">
+                      <a:solidFill>
+                        <a:srgbClr val="0B1F4B"/>
+                      </a:solidFill>
+                      <a:prstDash val="solid"/>
+                      <a:round/>
+                    </a:lnL>
+                    <a:lnR w="12700" cap="flat" cmpd="sng" algn="ctr">
+                      <a:solidFill>
+                        <a:srgbClr val="0B1F4B"/>
+                      </a:solidFill>
+                      <a:prstDash val="solid"/>
+                      <a:round/>
+                    </a:lnR>
+                    <a:lnT w="12700" cap="flat" cmpd="sng" algn="ctr">
+                      <a:solidFill>
+                        <a:srgbClr val="0B1F4B"/>
+                      </a:solidFill>
+                      <a:prstDash val="solid"/>
+                      <a:round/>
+                    </a:lnT>
+                    <a:lnB w="12700" cap="flat" cmpd="sng" algn="ctr">
+                      <a:solidFill>
+                        <a:srgbClr val="0B1F4B"/>
+                      </a:solidFill>
+                      <a:prstDash val="solid"/>
+                      <a:round/>
+                    </a:lnB>
                   </a:tcPr>
                 </a:tc>
                 <a:tc>
@@ -9828,6 +12549,34 @@
                     <a:solidFill>
                       <a:srgbClr val="FFFFFF"/>
                     </a:solidFill>
+                    <a:lnL w="12700" cap="flat" cmpd="sng" algn="ctr">
+                      <a:solidFill>
+                        <a:srgbClr val="0B1F4B"/>
+                      </a:solidFill>
+                      <a:prstDash val="solid"/>
+                      <a:round/>
+                    </a:lnL>
+                    <a:lnR w="12700" cap="flat" cmpd="sng" algn="ctr">
+                      <a:solidFill>
+                        <a:srgbClr val="0B1F4B"/>
+                      </a:solidFill>
+                      <a:prstDash val="solid"/>
+                      <a:round/>
+                    </a:lnR>
+                    <a:lnT w="12700" cap="flat" cmpd="sng" algn="ctr">
+                      <a:solidFill>
+                        <a:srgbClr val="0B1F4B"/>
+                      </a:solidFill>
+                      <a:prstDash val="solid"/>
+                      <a:round/>
+                    </a:lnT>
+                    <a:lnB w="12700" cap="flat" cmpd="sng" algn="ctr">
+                      <a:solidFill>
+                        <a:srgbClr val="0B1F4B"/>
+                      </a:solidFill>
+                      <a:prstDash val="solid"/>
+                      <a:round/>
+                    </a:lnB>
                   </a:tcPr>
                 </a:tc>
               </a:tr>
@@ -9853,6 +12602,34 @@
                     <a:solidFill>
                       <a:srgbClr val="F7F9FC"/>
                     </a:solidFill>
+                    <a:lnL w="12700" cap="flat" cmpd="sng" algn="ctr">
+                      <a:solidFill>
+                        <a:srgbClr val="0B1F4B"/>
+                      </a:solidFill>
+                      <a:prstDash val="solid"/>
+                      <a:round/>
+                    </a:lnL>
+                    <a:lnR w="12700" cap="flat" cmpd="sng" algn="ctr">
+                      <a:solidFill>
+                        <a:srgbClr val="0B1F4B"/>
+                      </a:solidFill>
+                      <a:prstDash val="solid"/>
+                      <a:round/>
+                    </a:lnR>
+                    <a:lnT w="12700" cap="flat" cmpd="sng" algn="ctr">
+                      <a:solidFill>
+                        <a:srgbClr val="0B1F4B"/>
+                      </a:solidFill>
+                      <a:prstDash val="solid"/>
+                      <a:round/>
+                    </a:lnT>
+                    <a:lnB w="12700" cap="flat" cmpd="sng" algn="ctr">
+                      <a:solidFill>
+                        <a:srgbClr val="0B1F4B"/>
+                      </a:solidFill>
+                      <a:prstDash val="solid"/>
+                      <a:round/>
+                    </a:lnB>
                   </a:tcPr>
                 </a:tc>
                 <a:tc>
@@ -9876,6 +12653,34 @@
                     <a:solidFill>
                       <a:srgbClr val="F7F9FC"/>
                     </a:solidFill>
+                    <a:lnL w="12700" cap="flat" cmpd="sng" algn="ctr">
+                      <a:solidFill>
+                        <a:srgbClr val="0B1F4B"/>
+                      </a:solidFill>
+                      <a:prstDash val="solid"/>
+                      <a:round/>
+                    </a:lnL>
+                    <a:lnR w="12700" cap="flat" cmpd="sng" algn="ctr">
+                      <a:solidFill>
+                        <a:srgbClr val="0B1F4B"/>
+                      </a:solidFill>
+                      <a:prstDash val="solid"/>
+                      <a:round/>
+                    </a:lnR>
+                    <a:lnT w="12700" cap="flat" cmpd="sng" algn="ctr">
+                      <a:solidFill>
+                        <a:srgbClr val="0B1F4B"/>
+                      </a:solidFill>
+                      <a:prstDash val="solid"/>
+                      <a:round/>
+                    </a:lnT>
+                    <a:lnB w="12700" cap="flat" cmpd="sng" algn="ctr">
+                      <a:solidFill>
+                        <a:srgbClr val="0B1F4B"/>
+                      </a:solidFill>
+                      <a:prstDash val="solid"/>
+                      <a:round/>
+                    </a:lnB>
                   </a:tcPr>
                 </a:tc>
                 <a:tc>
@@ -9897,8 +12702,36 @@
                   </a:txBody>
                   <a:tcPr marL="73152" marR="73152" marT="45720" marB="45720" anchor="ctr">
                     <a:solidFill>
-                      <a:srgbClr val="F7F9FC"/>
+                      <a:srgbClr val="FDE7E9"/>
                     </a:solidFill>
+                    <a:lnL w="12700" cap="flat" cmpd="sng" algn="ctr">
+                      <a:solidFill>
+                        <a:srgbClr val="0B1F4B"/>
+                      </a:solidFill>
+                      <a:prstDash val="solid"/>
+                      <a:round/>
+                    </a:lnL>
+                    <a:lnR w="12700" cap="flat" cmpd="sng" algn="ctr">
+                      <a:solidFill>
+                        <a:srgbClr val="0B1F4B"/>
+                      </a:solidFill>
+                      <a:prstDash val="solid"/>
+                      <a:round/>
+                    </a:lnR>
+                    <a:lnT w="12700" cap="flat" cmpd="sng" algn="ctr">
+                      <a:solidFill>
+                        <a:srgbClr val="0B1F4B"/>
+                      </a:solidFill>
+                      <a:prstDash val="solid"/>
+                      <a:round/>
+                    </a:lnT>
+                    <a:lnB w="12700" cap="flat" cmpd="sng" algn="ctr">
+                      <a:solidFill>
+                        <a:srgbClr val="0B1F4B"/>
+                      </a:solidFill>
+                      <a:prstDash val="solid"/>
+                      <a:round/>
+                    </a:lnB>
                   </a:tcPr>
                 </a:tc>
                 <a:tc>
@@ -9920,8 +12753,36 @@
                   </a:txBody>
                   <a:tcPr marL="73152" marR="73152" marT="45720" marB="45720" anchor="ctr">
                     <a:solidFill>
-                      <a:srgbClr val="F7F9FC"/>
+                      <a:srgbClr val="E6F4EA"/>
                     </a:solidFill>
+                    <a:lnL w="12700" cap="flat" cmpd="sng" algn="ctr">
+                      <a:solidFill>
+                        <a:srgbClr val="0B1F4B"/>
+                      </a:solidFill>
+                      <a:prstDash val="solid"/>
+                      <a:round/>
+                    </a:lnL>
+                    <a:lnR w="12700" cap="flat" cmpd="sng" algn="ctr">
+                      <a:solidFill>
+                        <a:srgbClr val="0B1F4B"/>
+                      </a:solidFill>
+                      <a:prstDash val="solid"/>
+                      <a:round/>
+                    </a:lnR>
+                    <a:lnT w="12700" cap="flat" cmpd="sng" algn="ctr">
+                      <a:solidFill>
+                        <a:srgbClr val="0B1F4B"/>
+                      </a:solidFill>
+                      <a:prstDash val="solid"/>
+                      <a:round/>
+                    </a:lnT>
+                    <a:lnB w="12700" cap="flat" cmpd="sng" algn="ctr">
+                      <a:solidFill>
+                        <a:srgbClr val="0B1F4B"/>
+                      </a:solidFill>
+                      <a:prstDash val="solid"/>
+                      <a:round/>
+                    </a:lnB>
                   </a:tcPr>
                 </a:tc>
                 <a:tc>
@@ -9945,6 +12806,34 @@
                     <a:solidFill>
                       <a:srgbClr val="E6F4EA"/>
                     </a:solidFill>
+                    <a:lnL w="12700" cap="flat" cmpd="sng" algn="ctr">
+                      <a:solidFill>
+                        <a:srgbClr val="0B1F4B"/>
+                      </a:solidFill>
+                      <a:prstDash val="solid"/>
+                      <a:round/>
+                    </a:lnL>
+                    <a:lnR w="12700" cap="flat" cmpd="sng" algn="ctr">
+                      <a:solidFill>
+                        <a:srgbClr val="0B1F4B"/>
+                      </a:solidFill>
+                      <a:prstDash val="solid"/>
+                      <a:round/>
+                    </a:lnR>
+                    <a:lnT w="12700" cap="flat" cmpd="sng" algn="ctr">
+                      <a:solidFill>
+                        <a:srgbClr val="0B1F4B"/>
+                      </a:solidFill>
+                      <a:prstDash val="solid"/>
+                      <a:round/>
+                    </a:lnT>
+                    <a:lnB w="12700" cap="flat" cmpd="sng" algn="ctr">
+                      <a:solidFill>
+                        <a:srgbClr val="0B1F4B"/>
+                      </a:solidFill>
+                      <a:prstDash val="solid"/>
+                      <a:round/>
+                    </a:lnB>
                   </a:tcPr>
                 </a:tc>
                 <a:tc>
@@ -9968,6 +12857,34 @@
                     <a:solidFill>
                       <a:srgbClr val="FDE7E9"/>
                     </a:solidFill>
+                    <a:lnL w="12700" cap="flat" cmpd="sng" algn="ctr">
+                      <a:solidFill>
+                        <a:srgbClr val="0B1F4B"/>
+                      </a:solidFill>
+                      <a:prstDash val="solid"/>
+                      <a:round/>
+                    </a:lnL>
+                    <a:lnR w="12700" cap="flat" cmpd="sng" algn="ctr">
+                      <a:solidFill>
+                        <a:srgbClr val="0B1F4B"/>
+                      </a:solidFill>
+                      <a:prstDash val="solid"/>
+                      <a:round/>
+                    </a:lnR>
+                    <a:lnT w="12700" cap="flat" cmpd="sng" algn="ctr">
+                      <a:solidFill>
+                        <a:srgbClr val="0B1F4B"/>
+                      </a:solidFill>
+                      <a:prstDash val="solid"/>
+                      <a:round/>
+                    </a:lnT>
+                    <a:lnB w="12700" cap="flat" cmpd="sng" algn="ctr">
+                      <a:solidFill>
+                        <a:srgbClr val="0B1F4B"/>
+                      </a:solidFill>
+                      <a:prstDash val="solid"/>
+                      <a:round/>
+                    </a:lnB>
                   </a:tcPr>
                 </a:tc>
               </a:tr>
@@ -10130,7 +13047,19 @@
                 </a:solidFill>
                 <a:latin typeface="Segoe UI"/>
               </a:rPr>
-              <a:t>Only the Router beats all six standalone models on a substantial region of the decision map.</a:t>
+              <a:t>•  At default weights, the best reward belongs to a standalone model.</a:t>
+            </a:r>
+          </a:p>
+          <a:p>
+            <a:pPr algn="l"/>
+            <a:r>
+              <a:rPr sz="1500" b="1" i="0">
+                <a:solidFill>
+                  <a:srgbClr val="212121"/>
+                </a:solidFill>
+                <a:latin typeface="Segoe UI"/>
+              </a:rPr>
+              <a:t>•  This ordering changes as the latency and error penalty weights are varied, as the next slide shows.</a:t>
             </a:r>
           </a:p>
         </p:txBody>
@@ -10656,7 +13585,7 @@
                 </a:solidFill>
                 <a:latin typeface="Segoe UI"/>
               </a:rPr>
-              <a:t>Conclusions: Answering the Research Questions</a:t>
+              <a:t>Best Model &amp; Optimization Strategy Across the Penalty Plane</a:t>
             </a:r>
           </a:p>
         </p:txBody>
@@ -10691,7 +13620,772 @@
                 </a:solidFill>
                 <a:latin typeface="Segoe UI"/>
               </a:rPr>
-              <a:t>14 / 15</a:t>
+              <a:t>14 / 16</a:t>
+            </a:r>
+          </a:p>
+        </p:txBody>
+      </p:sp>
+      <p:sp>
+        <p:nvSpPr>
+          <p:cNvPr id="7" name="TextBox 6"/>
+          <p:cNvSpPr txBox="1"/>
+          <p:nvPr/>
+        </p:nvSpPr>
+        <p:spPr>
+          <a:xfrm>
+            <a:off x="457200" y="6446520"/>
+            <a:ext cx="5486400" cy="320040"/>
+          </a:xfrm>
+          <a:prstGeom prst="rect">
+            <a:avLst/>
+          </a:prstGeom>
+          <a:noFill/>
+        </p:spPr>
+        <p:txBody>
+          <a:bodyPr wrap="square" lIns="45720" rIns="45720" tIns="18288" bIns="18288" anchor="t">
+            <a:spAutoFit/>
+          </a:bodyPr>
+          <a:lstStyle/>
+          <a:p>
+            <a:pPr algn="l"/>
+            <a:r>
+              <a:rPr sz="1100" b="0" i="1">
+                <a:solidFill>
+                  <a:srgbClr val="605E5C"/>
+                </a:solidFill>
+                <a:latin typeface="Segoe UI"/>
+              </a:rPr>
+              <a:t>RESULTS</a:t>
+            </a:r>
+          </a:p>
+        </p:txBody>
+      </p:sp>
+      <p:pic>
+        <p:nvPicPr>
+          <p:cNvPr id="8" name="Picture 7" descr="chartUNI_unified_best_strategy_heatmap_router_diagonal.png"/>
+          <p:cNvPicPr>
+            <a:picLocks noChangeAspect="1"/>
+          </p:cNvPicPr>
+          <p:nvPr/>
+        </p:nvPicPr>
+        <p:blipFill>
+          <a:blip r:embed="rId2"/>
+          <a:stretch>
+            <a:fillRect/>
+          </a:stretch>
+        </p:blipFill>
+        <p:spPr>
+          <a:xfrm>
+            <a:off x="365760" y="1589676"/>
+            <a:ext cx="8138160" cy="4318727"/>
+          </a:xfrm>
+          <a:prstGeom prst="rect">
+            <a:avLst/>
+          </a:prstGeom>
+        </p:spPr>
+      </p:pic>
+      <p:sp>
+        <p:nvSpPr>
+          <p:cNvPr id="9" name="TextBox 8"/>
+          <p:cNvSpPr txBox="1"/>
+          <p:nvPr/>
+        </p:nvSpPr>
+        <p:spPr>
+          <a:xfrm>
+            <a:off x="8595360" y="1188720"/>
+            <a:ext cx="3383280" cy="457200"/>
+          </a:xfrm>
+          <a:prstGeom prst="rect">
+            <a:avLst/>
+          </a:prstGeom>
+          <a:noFill/>
+        </p:spPr>
+        <p:txBody>
+          <a:bodyPr wrap="square" lIns="45720" rIns="45720" tIns="18288" bIns="18288" anchor="t">
+            <a:spAutoFit/>
+          </a:bodyPr>
+          <a:lstStyle/>
+          <a:p>
+            <a:pPr algn="l"/>
+            <a:r>
+              <a:rPr sz="1600" b="1" i="0">
+                <a:solidFill>
+                  <a:srgbClr val="0B1F4B"/>
+                </a:solidFill>
+                <a:latin typeface="Segoe UI"/>
+              </a:rPr>
+              <a:t>Who wins each cell</a:t>
+            </a:r>
+          </a:p>
+        </p:txBody>
+      </p:sp>
+      <p:sp>
+        <p:nvSpPr>
+          <p:cNvPr id="10" name="Rectangle 9"/>
+          <p:cNvSpPr/>
+          <p:nvPr/>
+        </p:nvSpPr>
+        <p:spPr>
+          <a:xfrm>
+            <a:off x="8595360" y="1691640"/>
+            <a:ext cx="1097280" cy="36576"/>
+          </a:xfrm>
+          <a:prstGeom prst="rect">
+            <a:avLst/>
+          </a:prstGeom>
+          <a:solidFill>
+            <a:srgbClr val="0078D4"/>
+          </a:solidFill>
+          <a:ln>
+            <a:noFill/>
+          </a:ln>
+          <a:effectLst/>
+        </p:spPr>
+        <p:style>
+          <a:lnRef idx="1">
+            <a:schemeClr val="accent1"/>
+          </a:lnRef>
+          <a:fillRef idx="3">
+            <a:schemeClr val="accent1"/>
+          </a:fillRef>
+          <a:effectRef idx="2">
+            <a:schemeClr val="accent1"/>
+          </a:effectRef>
+          <a:fontRef idx="minor">
+            <a:schemeClr val="lt1"/>
+          </a:fontRef>
+        </p:style>
+        <p:txBody>
+          <a:bodyPr rtlCol="0" anchor="ctr"/>
+          <a:lstStyle/>
+          <a:p>
+            <a:pPr algn="ctr"/>
+          </a:p>
+        </p:txBody>
+      </p:sp>
+      <p:sp>
+        <p:nvSpPr>
+          <p:cNvPr id="11" name="TextBox 10"/>
+          <p:cNvSpPr txBox="1"/>
+          <p:nvPr/>
+        </p:nvSpPr>
+        <p:spPr>
+          <a:xfrm>
+            <a:off x="8595360" y="1828800"/>
+            <a:ext cx="3383280" cy="3017520"/>
+          </a:xfrm>
+          <a:prstGeom prst="rect">
+            <a:avLst/>
+          </a:prstGeom>
+          <a:noFill/>
+        </p:spPr>
+        <p:txBody>
+          <a:bodyPr wrap="square" lIns="45720" rIns="45720">
+            <a:spAutoFit/>
+          </a:bodyPr>
+          <a:lstStyle/>
+          <a:p>
+            <a:pPr algn="l">
+              <a:lnSpc>
+                <a:spcPct val="115000"/>
+              </a:lnSpc>
+              <a:spcAft>
+                <a:spcPts val="800"/>
+              </a:spcAft>
+            </a:pPr>
+            <a:r>
+              <a:rPr sz="1300" b="1" i="0">
+                <a:solidFill>
+                  <a:srgbClr val="0078D4"/>
+                </a:solidFill>
+                <a:latin typeface="Segoe UI"/>
+              </a:rPr>
+              <a:t>• </a:t>
+            </a:r>
+            <a:r>
+              <a:rPr sz="1300" b="0" i="0">
+                <a:solidFill>
+                  <a:srgbClr val="212121"/>
+                </a:solidFill>
+                <a:latin typeface="Segoe UI"/>
+              </a:rPr>
+              <a:t>SC gpt-4.1-mini (N=3): removes noise from a cheap and fast model, but accuracy still trails the standalone models</a:t>
+            </a:r>
+          </a:p>
+          <a:p>
+            <a:pPr algn="l">
+              <a:lnSpc>
+                <a:spcPct val="115000"/>
+              </a:lnSpc>
+              <a:spcAft>
+                <a:spcPts val="800"/>
+              </a:spcAft>
+            </a:pPr>
+            <a:r>
+              <a:rPr sz="1300" b="1" i="0">
+                <a:solidFill>
+                  <a:srgbClr val="0078D4"/>
+                </a:solidFill>
+                <a:latin typeface="Segoe UI"/>
+              </a:rPr>
+              <a:t>• </a:t>
+            </a:r>
+            <a:r>
+              <a:rPr sz="1300" b="0" i="0">
+                <a:solidFill>
+                  <a:srgbClr val="212121"/>
+                </a:solidFill>
+                <a:latin typeface="Segoe UI"/>
+              </a:rPr>
+              <a:t>gpt-5.4: slower than SC, but reaches higher accuracy (fewer errors) — ★ default sits here</a:t>
+            </a:r>
+          </a:p>
+          <a:p>
+            <a:pPr algn="l">
+              <a:lnSpc>
+                <a:spcPct val="115000"/>
+              </a:lnSpc>
+              <a:spcAft>
+                <a:spcPts val="800"/>
+              </a:spcAft>
+            </a:pPr>
+            <a:r>
+              <a:rPr sz="1300" b="1" i="0">
+                <a:solidFill>
+                  <a:srgbClr val="0078D4"/>
+                </a:solidFill>
+                <a:latin typeface="Segoe UI"/>
+              </a:rPr>
+              <a:t>• </a:t>
+            </a:r>
+            <a:r>
+              <a:rPr sz="1300" b="0" i="0">
+                <a:solidFill>
+                  <a:srgbClr val="212121"/>
+                </a:solidFill>
+                <a:latin typeface="Segoe UI"/>
+              </a:rPr>
+              <a:t>gpt-5.4-pro: highest accuracy of all, wins where error penalty is high and latency penalty is low</a:t>
+            </a:r>
+          </a:p>
+          <a:p>
+            <a:pPr algn="l">
+              <a:lnSpc>
+                <a:spcPct val="115000"/>
+              </a:lnSpc>
+              <a:spcAft>
+                <a:spcPts val="800"/>
+              </a:spcAft>
+            </a:pPr>
+            <a:r>
+              <a:rPr sz="1300" b="1" i="0">
+                <a:solidFill>
+                  <a:srgbClr val="0078D4"/>
+                </a:solidFill>
+                <a:latin typeface="Segoe UI"/>
+              </a:rPr>
+              <a:t>• </a:t>
+            </a:r>
+            <a:r>
+              <a:rPr sz="1300" b="0" i="0">
+                <a:solidFill>
+                  <a:srgbClr val="212121"/>
+                </a:solidFill>
+                <a:latin typeface="Segoe UI"/>
+              </a:rPr>
+              <a:t>Router: accurate at a much lower cost than the large models, but latency stays high</a:t>
+            </a:r>
+          </a:p>
+        </p:txBody>
+      </p:sp>
+    </p:spTree>
+  </p:cSld>
+  <p:clrMapOvr>
+    <a:masterClrMapping/>
+  </p:clrMapOvr>
+  <p:timing>
+    <p:tnLst>
+      <p:par>
+        <p:cTn id="1" dur="indefinite" restart="never" nodeType="tmRoot">
+          <p:childTnLst>
+            <p:seq concurrent="1" nextAc="seek">
+              <p:cTn id="2" dur="indefinite" nodeType="mainSeq">
+                <p:childTnLst>
+                  <p:par>
+                    <p:cTn id="100" fill="hold">
+                      <p:stCondLst>
+                        <p:cond delay="indefinite"/>
+                      </p:stCondLst>
+                      <p:childTnLst>
+                        <p:par>
+                          <p:cTn id="101" fill="hold">
+                            <p:stCondLst>
+                              <p:cond delay="0"/>
+                            </p:stCondLst>
+                            <p:childTnLst>
+                              <p:par>
+                                <p:cTn id="110" presetID="10" presetClass="entr" presetSubtype="0" fill="hold" grpId="0" nodeType="clickEffect">
+                                  <p:stCondLst>
+                                    <p:cond delay="0"/>
+                                  </p:stCondLst>
+                                  <p:childTnLst>
+                                    <p:set>
+                                      <p:cBhvr>
+                                        <p:cTn id="111" dur="1" fill="hold">
+                                          <p:stCondLst>
+                                            <p:cond delay="0"/>
+                                          </p:stCondLst>
+                                        </p:cTn>
+                                        <p:tgtEl>
+                                          <p:spTgt spid="8"/>
+                                        </p:tgtEl>
+                                        <p:attrNameLst>
+                                          <p:attrName>style.visibility</p:attrName>
+                                        </p:attrNameLst>
+                                      </p:cBhvr>
+                                      <p:to>
+                                        <p:strVal val="visible"/>
+                                      </p:to>
+                                    </p:set>
+                                    <p:anim calcmode="lin" valueType="num">
+                                      <p:cBhvr additive="base">
+                                        <p:cTn id="112" dur="500" fill="hold"/>
+                                        <p:tgtEl>
+                                          <p:spTgt spid="8"/>
+                                        </p:tgtEl>
+                                        <p:attrNameLst>
+                                          <p:attrName>style.opacity</p:attrName>
+                                        </p:attrNameLst>
+                                      </p:cBhvr>
+                                      <p:tavLst>
+                                        <p:tav tm="0">
+                                          <p:val>
+                                            <p:fltVal val="0"/>
+                                          </p:val>
+                                        </p:tav>
+                                        <p:tav tm="100000">
+                                          <p:val>
+                                            <p:fltVal val="1"/>
+                                          </p:val>
+                                        </p:tav>
+                                      </p:tavLst>
+                                    </p:anim>
+                                  </p:childTnLst>
+                                </p:cTn>
+                              </p:par>
+                            </p:childTnLst>
+                          </p:cTn>
+                        </p:par>
+                      </p:childTnLst>
+                    </p:cTn>
+                  </p:par>
+                  <p:par>
+                    <p:cTn id="1100" fill="hold">
+                      <p:stCondLst>
+                        <p:cond delay="indefinite"/>
+                      </p:stCondLst>
+                      <p:childTnLst>
+                        <p:par>
+                          <p:cTn id="1101" fill="hold">
+                            <p:stCondLst>
+                              <p:cond delay="0"/>
+                            </p:stCondLst>
+                            <p:childTnLst>
+                              <p:par>
+                                <p:cTn id="1110" presetID="10" presetClass="entr" presetSubtype="0" fill="hold" grpId="0" nodeType="clickEffect">
+                                  <p:stCondLst>
+                                    <p:cond delay="0"/>
+                                  </p:stCondLst>
+                                  <p:childTnLst>
+                                    <p:set>
+                                      <p:cBhvr>
+                                        <p:cTn id="1111" dur="1" fill="hold">
+                                          <p:stCondLst>
+                                            <p:cond delay="0"/>
+                                          </p:stCondLst>
+                                        </p:cTn>
+                                        <p:tgtEl>
+                                          <p:spTgt spid="9"/>
+                                        </p:tgtEl>
+                                        <p:attrNameLst>
+                                          <p:attrName>style.visibility</p:attrName>
+                                        </p:attrNameLst>
+                                      </p:cBhvr>
+                                      <p:to>
+                                        <p:strVal val="visible"/>
+                                      </p:to>
+                                    </p:set>
+                                    <p:anim calcmode="lin" valueType="num">
+                                      <p:cBhvr additive="base">
+                                        <p:cTn id="1112" dur="500" fill="hold"/>
+                                        <p:tgtEl>
+                                          <p:spTgt spid="9"/>
+                                        </p:tgtEl>
+                                        <p:attrNameLst>
+                                          <p:attrName>style.opacity</p:attrName>
+                                        </p:attrNameLst>
+                                      </p:cBhvr>
+                                      <p:tavLst>
+                                        <p:tav tm="0">
+                                          <p:val>
+                                            <p:fltVal val="0"/>
+                                          </p:val>
+                                        </p:tav>
+                                        <p:tav tm="100000">
+                                          <p:val>
+                                            <p:fltVal val="1"/>
+                                          </p:val>
+                                        </p:tav>
+                                      </p:tavLst>
+                                    </p:anim>
+                                  </p:childTnLst>
+                                </p:cTn>
+                              </p:par>
+                              <p:par>
+                                <p:cTn id="1116" presetID="10" presetClass="entr" presetSubtype="0" fill="hold" grpId="0" nodeType="withEffect">
+                                  <p:stCondLst>
+                                    <p:cond delay="0"/>
+                                  </p:stCondLst>
+                                  <p:childTnLst>
+                                    <p:set>
+                                      <p:cBhvr>
+                                        <p:cTn id="1117" dur="1" fill="hold">
+                                          <p:stCondLst>
+                                            <p:cond delay="0"/>
+                                          </p:stCondLst>
+                                        </p:cTn>
+                                        <p:tgtEl>
+                                          <p:spTgt spid="10"/>
+                                        </p:tgtEl>
+                                        <p:attrNameLst>
+                                          <p:attrName>style.visibility</p:attrName>
+                                        </p:attrNameLst>
+                                      </p:cBhvr>
+                                      <p:to>
+                                        <p:strVal val="visible"/>
+                                      </p:to>
+                                    </p:set>
+                                    <p:anim calcmode="lin" valueType="num">
+                                      <p:cBhvr additive="base">
+                                        <p:cTn id="1118" dur="500" fill="hold"/>
+                                        <p:tgtEl>
+                                          <p:spTgt spid="10"/>
+                                        </p:tgtEl>
+                                        <p:attrNameLst>
+                                          <p:attrName>style.opacity</p:attrName>
+                                        </p:attrNameLst>
+                                      </p:cBhvr>
+                                      <p:tavLst>
+                                        <p:tav tm="0">
+                                          <p:val>
+                                            <p:fltVal val="0"/>
+                                          </p:val>
+                                        </p:tav>
+                                        <p:tav tm="100000">
+                                          <p:val>
+                                            <p:fltVal val="1"/>
+                                          </p:val>
+                                        </p:tav>
+                                      </p:tavLst>
+                                    </p:anim>
+                                  </p:childTnLst>
+                                </p:cTn>
+                              </p:par>
+                              <p:par>
+                                <p:cTn id="1122" presetID="10" presetClass="entr" presetSubtype="0" fill="hold" grpId="0" nodeType="withEffect">
+                                  <p:stCondLst>
+                                    <p:cond delay="0"/>
+                                  </p:stCondLst>
+                                  <p:childTnLst>
+                                    <p:set>
+                                      <p:cBhvr>
+                                        <p:cTn id="1123" dur="1" fill="hold">
+                                          <p:stCondLst>
+                                            <p:cond delay="0"/>
+                                          </p:stCondLst>
+                                        </p:cTn>
+                                        <p:tgtEl>
+                                          <p:spTgt spid="11"/>
+                                        </p:tgtEl>
+                                        <p:attrNameLst>
+                                          <p:attrName>style.visibility</p:attrName>
+                                        </p:attrNameLst>
+                                      </p:cBhvr>
+                                      <p:to>
+                                        <p:strVal val="visible"/>
+                                      </p:to>
+                                    </p:set>
+                                    <p:anim calcmode="lin" valueType="num">
+                                      <p:cBhvr additive="base">
+                                        <p:cTn id="1124" dur="500" fill="hold"/>
+                                        <p:tgtEl>
+                                          <p:spTgt spid="11"/>
+                                        </p:tgtEl>
+                                        <p:attrNameLst>
+                                          <p:attrName>style.opacity</p:attrName>
+                                        </p:attrNameLst>
+                                      </p:cBhvr>
+                                      <p:tavLst>
+                                        <p:tav tm="0">
+                                          <p:val>
+                                            <p:fltVal val="0"/>
+                                          </p:val>
+                                        </p:tav>
+                                        <p:tav tm="100000">
+                                          <p:val>
+                                            <p:fltVal val="1"/>
+                                          </p:val>
+                                        </p:tav>
+                                      </p:tavLst>
+                                    </p:anim>
+                                  </p:childTnLst>
+                                </p:cTn>
+                              </p:par>
+                            </p:childTnLst>
+                          </p:cTn>
+                        </p:par>
+                      </p:childTnLst>
+                    </p:cTn>
+                  </p:par>
+                </p:childTnLst>
+              </p:cTn>
+              <p:prevCondLst>
+                <p:cond evt="onPrev" delay="0">
+                  <p:tgtEl>
+                    <p:sldTgt/>
+                  </p:tgtEl>
+                </p:cond>
+              </p:prevCondLst>
+              <p:nextCondLst>
+                <p:cond evt="onNext" delay="0">
+                  <p:tgtEl>
+                    <p:sldTgt/>
+                  </p:tgtEl>
+                </p:cond>
+              </p:nextCondLst>
+            </p:seq>
+          </p:childTnLst>
+        </p:cTn>
+      </p:par>
+    </p:tnLst>
+    <p:bldLst>
+      <p:bldP spid="8" grpId="0"/>
+      <p:bldP spid="9" grpId="0"/>
+      <p:bldP spid="10" grpId="0"/>
+      <p:bldP spid="11" grpId="0"/>
+    </p:bldLst>
+  </p:timing>
+</p:sld>
+</file>
+
+<file path=ppt/slides/slide15.xml><?xml version="1.0" encoding="utf-8"?>
+<p:sld xmlns:a="http://schemas.openxmlformats.org/drawingml/2006/main" xmlns:p="http://schemas.openxmlformats.org/presentationml/2006/main" xmlns:r="http://schemas.openxmlformats.org/officeDocument/2006/relationships">
+  <p:cSld>
+    <p:spTree>
+      <p:nvGrpSpPr>
+        <p:cNvPr id="1" name=""/>
+        <p:cNvGrpSpPr/>
+        <p:nvPr/>
+      </p:nvGrpSpPr>
+      <p:grpSpPr/>
+      <p:sp>
+        <p:nvSpPr>
+          <p:cNvPr id="2" name="Rectangle 1"/>
+          <p:cNvSpPr/>
+          <p:nvPr/>
+        </p:nvSpPr>
+        <p:spPr>
+          <a:xfrm>
+            <a:off x="0" y="0"/>
+            <a:ext cx="12191695" cy="6858000"/>
+          </a:xfrm>
+          <a:prstGeom prst="rect">
+            <a:avLst/>
+          </a:prstGeom>
+          <a:solidFill>
+            <a:srgbClr val="FFFFFF"/>
+          </a:solidFill>
+          <a:ln>
+            <a:noFill/>
+          </a:ln>
+          <a:effectLst/>
+        </p:spPr>
+        <p:style>
+          <a:lnRef idx="1">
+            <a:schemeClr val="accent1"/>
+          </a:lnRef>
+          <a:fillRef idx="3">
+            <a:schemeClr val="accent1"/>
+          </a:fillRef>
+          <a:effectRef idx="2">
+            <a:schemeClr val="accent1"/>
+          </a:effectRef>
+          <a:fontRef idx="minor">
+            <a:schemeClr val="lt1"/>
+          </a:fontRef>
+        </p:style>
+        <p:txBody>
+          <a:bodyPr rtlCol="0" anchor="ctr"/>
+          <a:lstStyle/>
+          <a:p>
+            <a:pPr algn="ctr"/>
+          </a:p>
+        </p:txBody>
+      </p:sp>
+      <p:sp>
+        <p:nvSpPr>
+          <p:cNvPr id="3" name="Rectangle 2"/>
+          <p:cNvSpPr/>
+          <p:nvPr/>
+        </p:nvSpPr>
+        <p:spPr>
+          <a:xfrm>
+            <a:off x="0" y="0"/>
+            <a:ext cx="12191695" cy="868680"/>
+          </a:xfrm>
+          <a:prstGeom prst="rect">
+            <a:avLst/>
+          </a:prstGeom>
+          <a:solidFill>
+            <a:srgbClr val="0B1F4B"/>
+          </a:solidFill>
+          <a:ln>
+            <a:noFill/>
+          </a:ln>
+          <a:effectLst/>
+        </p:spPr>
+        <p:style>
+          <a:lnRef idx="1">
+            <a:schemeClr val="accent1"/>
+          </a:lnRef>
+          <a:fillRef idx="3">
+            <a:schemeClr val="accent1"/>
+          </a:fillRef>
+          <a:effectRef idx="2">
+            <a:schemeClr val="accent1"/>
+          </a:effectRef>
+          <a:fontRef idx="minor">
+            <a:schemeClr val="lt1"/>
+          </a:fontRef>
+        </p:style>
+        <p:txBody>
+          <a:bodyPr rtlCol="0" anchor="ctr"/>
+          <a:lstStyle/>
+          <a:p>
+            <a:pPr algn="ctr"/>
+          </a:p>
+        </p:txBody>
+      </p:sp>
+      <p:sp>
+        <p:nvSpPr>
+          <p:cNvPr id="4" name="Rectangle 3"/>
+          <p:cNvSpPr/>
+          <p:nvPr/>
+        </p:nvSpPr>
+        <p:spPr>
+          <a:xfrm>
+            <a:off x="0" y="868680"/>
+            <a:ext cx="12191695" cy="54864"/>
+          </a:xfrm>
+          <a:prstGeom prst="rect">
+            <a:avLst/>
+          </a:prstGeom>
+          <a:solidFill>
+            <a:srgbClr val="0078D4"/>
+          </a:solidFill>
+          <a:ln>
+            <a:noFill/>
+          </a:ln>
+          <a:effectLst/>
+        </p:spPr>
+        <p:style>
+          <a:lnRef idx="1">
+            <a:schemeClr val="accent1"/>
+          </a:lnRef>
+          <a:fillRef idx="3">
+            <a:schemeClr val="accent1"/>
+          </a:fillRef>
+          <a:effectRef idx="2">
+            <a:schemeClr val="accent1"/>
+          </a:effectRef>
+          <a:fontRef idx="minor">
+            <a:schemeClr val="lt1"/>
+          </a:fontRef>
+        </p:style>
+        <p:txBody>
+          <a:bodyPr rtlCol="0" anchor="ctr"/>
+          <a:lstStyle/>
+          <a:p>
+            <a:pPr algn="ctr"/>
+          </a:p>
+        </p:txBody>
+      </p:sp>
+      <p:sp>
+        <p:nvSpPr>
+          <p:cNvPr id="5" name="TextBox 4"/>
+          <p:cNvSpPr txBox="1"/>
+          <p:nvPr/>
+        </p:nvSpPr>
+        <p:spPr>
+          <a:xfrm>
+            <a:off x="457200" y="137160"/>
+            <a:ext cx="10058400" cy="640080"/>
+          </a:xfrm>
+          <a:prstGeom prst="rect">
+            <a:avLst/>
+          </a:prstGeom>
+          <a:noFill/>
+        </p:spPr>
+        <p:txBody>
+          <a:bodyPr wrap="square" lIns="45720" rIns="45720" tIns="18288" bIns="18288" anchor="ctr">
+            <a:spAutoFit/>
+          </a:bodyPr>
+          <a:lstStyle/>
+          <a:p>
+            <a:pPr algn="l"/>
+            <a:r>
+              <a:rPr sz="2600" b="1" i="0">
+                <a:solidFill>
+                  <a:srgbClr val="FFFFFF"/>
+                </a:solidFill>
+                <a:latin typeface="Segoe UI"/>
+              </a:rPr>
+              <a:t>Conclusions: Answering the Research Questions</a:t>
+            </a:r>
+          </a:p>
+        </p:txBody>
+      </p:sp>
+      <p:sp>
+        <p:nvSpPr>
+          <p:cNvPr id="6" name="TextBox 5"/>
+          <p:cNvSpPr txBox="1"/>
+          <p:nvPr/>
+        </p:nvSpPr>
+        <p:spPr>
+          <a:xfrm>
+            <a:off x="10515600" y="6446520"/>
+            <a:ext cx="1554480" cy="320040"/>
+          </a:xfrm>
+          <a:prstGeom prst="rect">
+            <a:avLst/>
+          </a:prstGeom>
+          <a:noFill/>
+        </p:spPr>
+        <p:txBody>
+          <a:bodyPr wrap="square" lIns="45720" rIns="45720" tIns="18288" bIns="18288" anchor="t">
+            <a:spAutoFit/>
+          </a:bodyPr>
+          <a:lstStyle/>
+          <a:p>
+            <a:pPr algn="r"/>
+            <a:r>
+              <a:rPr sz="1100" b="0" i="1">
+                <a:solidFill>
+                  <a:srgbClr val="605E5C"/>
+                </a:solidFill>
+                <a:latin typeface="Segoe UI"/>
+              </a:rPr>
+              <a:t>15 / 16</a:t>
             </a:r>
           </a:p>
         </p:txBody>
@@ -10908,7 +14602,7 @@
           <a:noFill/>
         </p:spPr>
         <p:txBody>
-          <a:bodyPr wrap="square" lIns="45720" rIns="45720" tIns="18288" bIns="18288" anchor="t">
+          <a:bodyPr wrap="square" anchor="t">
             <a:spAutoFit/>
           </a:bodyPr>
           <a:lstStyle/>
@@ -10921,7 +14615,7 @@
                 </a:solidFill>
                 <a:latin typeface="Segoe UI"/>
               </a:rPr>
-              <a:t>Two-tier structure: 15 pp accuracy gap, 770× cost gap.  No model Pareto-dominates.  gpt-5.4 = best balanced choice at default weights.</a:t>
+              <a:t>Two-tier structure: 15 pp accuracy gap and ≈7× cost gap at the tier boundary (o3-mini vs gpt-4.1).  No model Pareto-dominates.  gpt-5.4 = best balanced choice at default weights.</a:t>
             </a:r>
           </a:p>
         </p:txBody>
@@ -11103,7 +14797,7 @@
           <a:noFill/>
         </p:spPr>
         <p:txBody>
-          <a:bodyPr wrap="square" lIns="45720" rIns="45720" tIns="18288" bIns="18288" anchor="t">
+          <a:bodyPr wrap="square" anchor="t">
             <a:spAutoFit/>
           </a:bodyPr>
           <a:lstStyle/>
@@ -11298,7 +14992,7 @@
           <a:noFill/>
         </p:spPr>
         <p:txBody>
-          <a:bodyPr wrap="square" lIns="45720" rIns="45720" tIns="18288" bIns="18288" anchor="t">
+          <a:bodyPr wrap="square" anchor="t">
             <a:spAutoFit/>
           </a:bodyPr>
           <a:lstStyle/>
@@ -11311,7 +15005,31 @@
                 </a:solidFill>
                 <a:latin typeface="Segoe UI"/>
               </a:rPr>
-              <a:t>Router: YES. Wins a diagonal band in the decision map.   Self-Consistency: partially. Modest accuracy at 3× cost.   Cascade: NO. Neutralized by LLM overconfidence.</a:t>
+              <a:t>•  Cascade fails to optimize because neutralized by LLM overconfidence.</a:t>
+            </a:r>
+          </a:p>
+          <a:p>
+            <a:pPr algn="l"/>
+            <a:r>
+              <a:rPr sz="1400" b="0" i="0">
+                <a:solidFill>
+                  <a:srgbClr val="212121"/>
+                </a:solidFill>
+                <a:latin typeface="Segoe UI"/>
+              </a:rPr>
+              <a:t>•  Self-Consistency optimizes the cheap/fast regime by reducing noise.</a:t>
+            </a:r>
+          </a:p>
+          <a:p>
+            <a:pPr algn="l"/>
+            <a:r>
+              <a:rPr sz="1400" b="0" i="0">
+                <a:solidFill>
+                  <a:srgbClr val="212121"/>
+                </a:solidFill>
+                <a:latin typeface="Segoe UI"/>
+              </a:rPr>
+              <a:t>•  Router optimizes the accuracy-vs-cost trade-off, winning a band of the decision map.</a:t>
             </a:r>
           </a:p>
         </p:txBody>
@@ -12175,7 +15893,333 @@
 </p:sld>
 </file>
 
-<file path=ppt/slides/slide15.xml><?xml version="1.0" encoding="utf-8"?>
+<file path=ppt/slides/slide16.xml><?xml version="1.0" encoding="utf-8"?>
+<p:sld xmlns:a="http://schemas.openxmlformats.org/drawingml/2006/main" xmlns:p="http://schemas.openxmlformats.org/presentationml/2006/main" xmlns:r="http://schemas.openxmlformats.org/officeDocument/2006/relationships">
+  <p:cSld>
+    <p:spTree>
+      <p:nvGrpSpPr>
+        <p:cNvPr id="1" name=""/>
+        <p:cNvGrpSpPr/>
+        <p:nvPr/>
+      </p:nvGrpSpPr>
+      <p:grpSpPr/>
+      <p:sp>
+        <p:nvSpPr>
+          <p:cNvPr id="2" name="Rectangle 1"/>
+          <p:cNvSpPr/>
+          <p:nvPr/>
+        </p:nvSpPr>
+        <p:spPr>
+          <a:xfrm>
+            <a:off x="0" y="0"/>
+            <a:ext cx="12191695" cy="6858000"/>
+          </a:xfrm>
+          <a:prstGeom prst="rect">
+            <a:avLst/>
+          </a:prstGeom>
+          <a:solidFill>
+            <a:srgbClr val="FFFFFF"/>
+          </a:solidFill>
+          <a:ln>
+            <a:noFill/>
+          </a:ln>
+          <a:effectLst/>
+        </p:spPr>
+        <p:style>
+          <a:lnRef idx="1">
+            <a:schemeClr val="accent1"/>
+          </a:lnRef>
+          <a:fillRef idx="3">
+            <a:schemeClr val="accent1"/>
+          </a:fillRef>
+          <a:effectRef idx="2">
+            <a:schemeClr val="accent1"/>
+          </a:effectRef>
+          <a:fontRef idx="minor">
+            <a:schemeClr val="lt1"/>
+          </a:fontRef>
+        </p:style>
+        <p:txBody>
+          <a:bodyPr rtlCol="0" anchor="ctr"/>
+          <a:lstStyle/>
+          <a:p>
+            <a:pPr algn="ctr"/>
+          </a:p>
+        </p:txBody>
+      </p:sp>
+      <p:sp>
+        <p:nvSpPr>
+          <p:cNvPr id="3" name="Rectangle 2"/>
+          <p:cNvSpPr/>
+          <p:nvPr/>
+        </p:nvSpPr>
+        <p:spPr>
+          <a:xfrm>
+            <a:off x="0" y="0"/>
+            <a:ext cx="12191695" cy="6858000"/>
+          </a:xfrm>
+          <a:prstGeom prst="rect">
+            <a:avLst/>
+          </a:prstGeom>
+          <a:solidFill>
+            <a:srgbClr val="0B1F4B"/>
+          </a:solidFill>
+          <a:ln>
+            <a:noFill/>
+          </a:ln>
+          <a:effectLst/>
+        </p:spPr>
+        <p:style>
+          <a:lnRef idx="1">
+            <a:schemeClr val="accent1"/>
+          </a:lnRef>
+          <a:fillRef idx="3">
+            <a:schemeClr val="accent1"/>
+          </a:fillRef>
+          <a:effectRef idx="2">
+            <a:schemeClr val="accent1"/>
+          </a:effectRef>
+          <a:fontRef idx="minor">
+            <a:schemeClr val="lt1"/>
+          </a:fontRef>
+        </p:style>
+        <p:txBody>
+          <a:bodyPr rtlCol="0" anchor="ctr"/>
+          <a:lstStyle/>
+          <a:p>
+            <a:pPr algn="ctr"/>
+          </a:p>
+        </p:txBody>
+      </p:sp>
+      <p:sp>
+        <p:nvSpPr>
+          <p:cNvPr id="4" name="TextBox 3"/>
+          <p:cNvSpPr txBox="1"/>
+          <p:nvPr/>
+        </p:nvSpPr>
+        <p:spPr>
+          <a:xfrm>
+            <a:off x="640080" y="1828800"/>
+            <a:ext cx="10881360" cy="1463040"/>
+          </a:xfrm>
+          <a:prstGeom prst="rect">
+            <a:avLst/>
+          </a:prstGeom>
+          <a:noFill/>
+        </p:spPr>
+        <p:txBody>
+          <a:bodyPr wrap="square" lIns="45720" rIns="45720" tIns="18288" bIns="18288" anchor="ctr">
+            <a:spAutoFit/>
+          </a:bodyPr>
+          <a:lstStyle/>
+          <a:p>
+            <a:pPr algn="ctr"/>
+            <a:r>
+              <a:rPr sz="7200" b="1" i="0">
+                <a:solidFill>
+                  <a:srgbClr val="FFFFFF"/>
+                </a:solidFill>
+                <a:latin typeface="Segoe UI"/>
+              </a:rPr>
+              <a:t>Thank You</a:t>
+            </a:r>
+          </a:p>
+        </p:txBody>
+      </p:sp>
+      <p:sp>
+        <p:nvSpPr>
+          <p:cNvPr id="5" name="TextBox 4"/>
+          <p:cNvSpPr txBox="1"/>
+          <p:nvPr/>
+        </p:nvSpPr>
+        <p:spPr>
+          <a:xfrm>
+            <a:off x="640080" y="3383280"/>
+            <a:ext cx="10881360" cy="640080"/>
+          </a:xfrm>
+          <a:prstGeom prst="rect">
+            <a:avLst/>
+          </a:prstGeom>
+          <a:noFill/>
+        </p:spPr>
+        <p:txBody>
+          <a:bodyPr wrap="square" lIns="45720" rIns="45720" tIns="18288" bIns="18288" anchor="t">
+            <a:spAutoFit/>
+          </a:bodyPr>
+          <a:lstStyle/>
+          <a:p>
+            <a:pPr algn="ctr"/>
+            <a:r>
+              <a:rPr sz="2400" b="0" i="1">
+                <a:solidFill>
+                  <a:srgbClr val="FFFFFF"/>
+                </a:solidFill>
+                <a:latin typeface="Segoe UI"/>
+              </a:rPr>
+              <a:t>Questions &amp; Discussion</a:t>
+            </a:r>
+          </a:p>
+        </p:txBody>
+      </p:sp>
+      <p:sp>
+        <p:nvSpPr>
+          <p:cNvPr id="6" name="Rectangle 5"/>
+          <p:cNvSpPr/>
+          <p:nvPr/>
+        </p:nvSpPr>
+        <p:spPr>
+          <a:xfrm>
+            <a:off x="4114800" y="4160520"/>
+            <a:ext cx="3962095" cy="45720"/>
+          </a:xfrm>
+          <a:prstGeom prst="rect">
+            <a:avLst/>
+          </a:prstGeom>
+          <a:solidFill>
+            <a:srgbClr val="0078D4"/>
+          </a:solidFill>
+          <a:ln>
+            <a:noFill/>
+          </a:ln>
+          <a:effectLst/>
+        </p:spPr>
+        <p:style>
+          <a:lnRef idx="1">
+            <a:schemeClr val="accent1"/>
+          </a:lnRef>
+          <a:fillRef idx="3">
+            <a:schemeClr val="accent1"/>
+          </a:fillRef>
+          <a:effectRef idx="2">
+            <a:schemeClr val="accent1"/>
+          </a:effectRef>
+          <a:fontRef idx="minor">
+            <a:schemeClr val="lt1"/>
+          </a:fontRef>
+        </p:style>
+        <p:txBody>
+          <a:bodyPr rtlCol="0" anchor="ctr"/>
+          <a:lstStyle/>
+          <a:p>
+            <a:pPr algn="ctr"/>
+          </a:p>
+        </p:txBody>
+      </p:sp>
+      <p:sp>
+        <p:nvSpPr>
+          <p:cNvPr id="7" name="TextBox 6"/>
+          <p:cNvSpPr txBox="1"/>
+          <p:nvPr/>
+        </p:nvSpPr>
+        <p:spPr>
+          <a:xfrm>
+            <a:off x="640080" y="4434840"/>
+            <a:ext cx="10881360" cy="914400"/>
+          </a:xfrm>
+          <a:prstGeom prst="rect">
+            <a:avLst/>
+          </a:prstGeom>
+          <a:noFill/>
+        </p:spPr>
+        <p:txBody>
+          <a:bodyPr wrap="square" lIns="45720" rIns="45720" tIns="18288" bIns="18288" anchor="ctr">
+            <a:spAutoFit/>
+          </a:bodyPr>
+          <a:lstStyle/>
+          <a:p>
+            <a:pPr algn="ctr"/>
+            <a:r>
+              <a:rPr sz="2000" b="1" i="0">
+                <a:solidFill>
+                  <a:srgbClr val="FFFFFF"/>
+                </a:solidFill>
+                <a:latin typeface="Segoe UI"/>
+              </a:rPr>
+              <a:t>Empirical Evaluation and Cost Optimization
+of Large Language Models in Azure Cloud Environments</a:t>
+            </a:r>
+          </a:p>
+        </p:txBody>
+      </p:sp>
+      <p:sp>
+        <p:nvSpPr>
+          <p:cNvPr id="8" name="TextBox 7"/>
+          <p:cNvSpPr txBox="1"/>
+          <p:nvPr/>
+        </p:nvSpPr>
+        <p:spPr>
+          <a:xfrm>
+            <a:off x="640080" y="5440680"/>
+            <a:ext cx="10881360" cy="457200"/>
+          </a:xfrm>
+          <a:prstGeom prst="rect">
+            <a:avLst/>
+          </a:prstGeom>
+          <a:noFill/>
+        </p:spPr>
+        <p:txBody>
+          <a:bodyPr wrap="square" lIns="45720" rIns="45720" tIns="18288" bIns="18288" anchor="t">
+            <a:spAutoFit/>
+          </a:bodyPr>
+          <a:lstStyle/>
+          <a:p>
+            <a:pPr algn="ctr"/>
+            <a:r>
+              <a:rPr sz="2000" b="1" i="0">
+                <a:solidFill>
+                  <a:srgbClr val="FFFFFF"/>
+                </a:solidFill>
+                <a:latin typeface="Segoe UI"/>
+              </a:rPr>
+              <a:t>Matin Abaszada</a:t>
+            </a:r>
+          </a:p>
+        </p:txBody>
+      </p:sp>
+      <p:sp>
+        <p:nvSpPr>
+          <p:cNvPr id="9" name="TextBox 8"/>
+          <p:cNvSpPr txBox="1"/>
+          <p:nvPr/>
+        </p:nvSpPr>
+        <p:spPr>
+          <a:xfrm>
+            <a:off x="640080" y="5897880"/>
+            <a:ext cx="10881360" cy="411480"/>
+          </a:xfrm>
+          <a:prstGeom prst="rect">
+            <a:avLst/>
+          </a:prstGeom>
+          <a:noFill/>
+        </p:spPr>
+        <p:txBody>
+          <a:bodyPr wrap="square" lIns="45720" rIns="45720" tIns="18288" bIns="18288" anchor="t">
+            <a:spAutoFit/>
+          </a:bodyPr>
+          <a:lstStyle/>
+          <a:p>
+            <a:pPr algn="ctr"/>
+            <a:r>
+              <a:rPr sz="1400" b="0" i="1">
+                <a:solidFill>
+                  <a:srgbClr val="FFFFFF"/>
+                </a:solidFill>
+                <a:latin typeface="Segoe UI"/>
+              </a:rPr>
+              <a:t>Supervisor: Prof. Dr. Ivan Ovsyannikov   •   Constructor University, May 2026</a:t>
+            </a:r>
+          </a:p>
+        </p:txBody>
+      </p:sp>
+    </p:spTree>
+  </p:cSld>
+  <p:clrMapOvr>
+    <a:masterClrMapping/>
+  </p:clrMapOvr>
+</p:sld>
+</file>
+
+<file path=ppt/slides/slide17.xml><?xml version="1.0" encoding="utf-8"?>
 <p:sld xmlns:a="http://schemas.openxmlformats.org/drawingml/2006/main" xmlns:p="http://schemas.openxmlformats.org/presentationml/2006/main" xmlns:r="http://schemas.openxmlformats.org/officeDocument/2006/relationships">
   <p:cSld>
     <p:spTree>
@@ -12382,7 +16426,7 @@
                 </a:solidFill>
                 <a:latin typeface="Segoe UI"/>
               </a:rPr>
-              <a:t>15 / 15</a:t>
+              <a:t>17 / 16</a:t>
             </a:r>
           </a:p>
         </p:txBody>
@@ -13711,7 +17755,7 @@
 </p:sld>
 </file>
 
-<file path=ppt/slides/slide16.xml><?xml version="1.0" encoding="utf-8"?>
+<file path=ppt/slides/slide18.xml><?xml version="1.0" encoding="utf-8"?>
 <p:sld xmlns:a="http://schemas.openxmlformats.org/drawingml/2006/main" xmlns:p="http://schemas.openxmlformats.org/presentationml/2006/main" xmlns:r="http://schemas.openxmlformats.org/officeDocument/2006/relationships">
   <p:cSld>
     <p:spTree>
@@ -13931,7 +17975,7 @@
 </p:sld>
 </file>
 
-<file path=ppt/slides/slide17.xml><?xml version="1.0" encoding="utf-8"?>
+<file path=ppt/slides/slide19.xml><?xml version="1.0" encoding="utf-8"?>
 <p:sld xmlns:a="http://schemas.openxmlformats.org/drawingml/2006/main" xmlns:p="http://schemas.openxmlformats.org/presentationml/2006/main" xmlns:r="http://schemas.openxmlformats.org/officeDocument/2006/relationships">
   <p:cSld>
     <p:spTree>
@@ -14169,128 +18213,14 @@
       </p:pic>
       <p:sp>
         <p:nvSpPr>
-          <p:cNvPr id="8" name="TextBox 7"/>
-          <p:cNvSpPr txBox="1"/>
+          <p:cNvPr id="8" name="Rectangle 7"/>
+          <p:cNvSpPr/>
           <p:nvPr/>
         </p:nvSpPr>
         <p:spPr>
           <a:xfrm>
             <a:off x="8595360" y="1188720"/>
-            <a:ext cx="3383280" cy="457200"/>
-          </a:xfrm>
-          <a:prstGeom prst="rect">
-            <a:avLst/>
-          </a:prstGeom>
-          <a:noFill/>
-        </p:spPr>
-        <p:txBody>
-          <a:bodyPr wrap="square" lIns="45720" rIns="45720" tIns="18288" bIns="18288" anchor="t">
-            <a:spAutoFit/>
-          </a:bodyPr>
-          <a:lstStyle/>
-          <a:p>
-            <a:pPr algn="l"/>
-            <a:r>
-              <a:rPr sz="1600" b="1" i="0">
-                <a:solidFill>
-                  <a:srgbClr val="0B1F4B"/>
-                </a:solidFill>
-                <a:latin typeface="Segoe UI"/>
-              </a:rPr>
-              <a:t>When to use</a:t>
-            </a:r>
-          </a:p>
-        </p:txBody>
-      </p:sp>
-      <p:sp>
-        <p:nvSpPr>
-          <p:cNvPr id="9" name="Rectangle 8"/>
-          <p:cNvSpPr/>
-          <p:nvPr/>
-        </p:nvSpPr>
-        <p:spPr>
-          <a:xfrm>
-            <a:off x="8595360" y="1627632"/>
-            <a:ext cx="731520" cy="36576"/>
-          </a:xfrm>
-          <a:prstGeom prst="rect">
-            <a:avLst/>
-          </a:prstGeom>
-          <a:solidFill>
-            <a:srgbClr val="0078D4"/>
-          </a:solidFill>
-          <a:ln>
-            <a:noFill/>
-          </a:ln>
-          <a:effectLst/>
-        </p:spPr>
-        <p:style>
-          <a:lnRef idx="1">
-            <a:schemeClr val="accent1"/>
-          </a:lnRef>
-          <a:fillRef idx="3">
-            <a:schemeClr val="accent1"/>
-          </a:fillRef>
-          <a:effectRef idx="2">
-            <a:schemeClr val="accent1"/>
-          </a:effectRef>
-          <a:fontRef idx="minor">
-            <a:schemeClr val="lt1"/>
-          </a:fontRef>
-        </p:style>
-        <p:txBody>
-          <a:bodyPr rtlCol="0" anchor="ctr"/>
-          <a:lstStyle/>
-          <a:p>
-            <a:pPr algn="ctr"/>
-          </a:p>
-        </p:txBody>
-      </p:sp>
-      <p:sp>
-        <p:nvSpPr>
-          <p:cNvPr id="10" name="TextBox 9"/>
-          <p:cNvSpPr txBox="1"/>
-          <p:nvPr/>
-        </p:nvSpPr>
-        <p:spPr>
-          <a:xfrm>
-            <a:off x="8595360" y="1783080"/>
-            <a:ext cx="3383280" cy="2011680"/>
-          </a:xfrm>
-          <a:prstGeom prst="rect">
-            <a:avLst/>
-          </a:prstGeom>
-          <a:noFill/>
-        </p:spPr>
-        <p:txBody>
-          <a:bodyPr wrap="square" lIns="45720" rIns="45720" tIns="18288" bIns="18288" anchor="t">
-            <a:spAutoFit/>
-          </a:bodyPr>
-          <a:lstStyle/>
-          <a:p>
-            <a:pPr algn="l"/>
-            <a:r>
-              <a:rPr sz="1300" b="0" i="0">
-                <a:solidFill>
-                  <a:srgbClr val="212121"/>
-                </a:solidFill>
-                <a:latin typeface="Segoe UI"/>
-              </a:rPr>
-              <a:t>Use if asked about model performance on a specific benchmark (e.g. coding tasks, GPQA).</a:t>
-            </a:r>
-          </a:p>
-        </p:txBody>
-      </p:sp>
-      <p:sp>
-        <p:nvSpPr>
-          <p:cNvPr id="11" name="Rectangle 10"/>
-          <p:cNvSpPr/>
-          <p:nvPr/>
-        </p:nvSpPr>
-        <p:spPr>
-          <a:xfrm>
-            <a:off x="8595360" y="4023360"/>
-            <a:ext cx="3383280" cy="2286000"/>
+            <a:ext cx="3383280" cy="5120640"/>
           </a:xfrm>
           <a:prstGeom prst="rect">
             <a:avLst/>
@@ -14329,14 +18259,14 @@
       </p:sp>
       <p:sp>
         <p:nvSpPr>
-          <p:cNvPr id="12" name="Rectangle 11"/>
+          <p:cNvPr id="9" name="Rectangle 8"/>
           <p:cNvSpPr/>
           <p:nvPr/>
         </p:nvSpPr>
         <p:spPr>
           <a:xfrm>
-            <a:off x="8595360" y="4023360"/>
-            <a:ext cx="73152" cy="2286000"/>
+            <a:off x="8595360" y="1188720"/>
+            <a:ext cx="73152" cy="5120640"/>
           </a:xfrm>
           <a:prstGeom prst="rect">
             <a:avLst/>
@@ -14373,14 +18303,14 @@
       </p:sp>
       <p:sp>
         <p:nvSpPr>
-          <p:cNvPr id="13" name="TextBox 12"/>
+          <p:cNvPr id="10" name="TextBox 9"/>
           <p:cNvSpPr txBox="1"/>
           <p:nvPr/>
         </p:nvSpPr>
         <p:spPr>
           <a:xfrm>
-            <a:off x="8759952" y="4069080"/>
-            <a:ext cx="3154680" cy="2194560"/>
+            <a:off x="8759952" y="1234440"/>
+            <a:ext cx="3154680" cy="5029200"/>
           </a:xfrm>
           <a:prstGeom prst="rect">
             <a:avLst/>
@@ -14395,7 +18325,7 @@
           <a:p>
             <a:pPr algn="l"/>
             <a:r>
-              <a:rPr sz="1200" b="0" i="0">
+              <a:rPr sz="1300" b="0" i="0">
                 <a:solidFill>
                   <a:srgbClr val="212121"/>
                 </a:solidFill>
@@ -14655,174 +18585,6 @@
                       </p:childTnLst>
                     </p:cTn>
                   </p:par>
-                  <p:par>
-                    <p:cTn id="2100" fill="hold">
-                      <p:stCondLst>
-                        <p:cond delay="indefinite"/>
-                      </p:stCondLst>
-                      <p:childTnLst>
-                        <p:par>
-                          <p:cTn id="2101" fill="hold">
-                            <p:stCondLst>
-                              <p:cond delay="0"/>
-                            </p:stCondLst>
-                            <p:childTnLst>
-                              <p:par>
-                                <p:cTn id="2110" presetID="10" presetClass="entr" presetSubtype="0" fill="hold" grpId="0" nodeType="clickEffect">
-                                  <p:stCondLst>
-                                    <p:cond delay="0"/>
-                                  </p:stCondLst>
-                                  <p:childTnLst>
-                                    <p:set>
-                                      <p:cBhvr>
-                                        <p:cTn id="2111" dur="1" fill="hold">
-                                          <p:stCondLst>
-                                            <p:cond delay="0"/>
-                                          </p:stCondLst>
-                                        </p:cTn>
-                                        <p:tgtEl>
-                                          <p:spTgt spid="11"/>
-                                        </p:tgtEl>
-                                        <p:attrNameLst>
-                                          <p:attrName>style.visibility</p:attrName>
-                                        </p:attrNameLst>
-                                      </p:cBhvr>
-                                      <p:to>
-                                        <p:strVal val="visible"/>
-                                      </p:to>
-                                    </p:set>
-                                    <p:anim calcmode="lin" valueType="num">
-                                      <p:cBhvr additive="base">
-                                        <p:cTn id="2112" dur="500" fill="hold"/>
-                                        <p:tgtEl>
-                                          <p:spTgt spid="11"/>
-                                        </p:tgtEl>
-                                        <p:attrNameLst>
-                                          <p:attrName>style.opacity</p:attrName>
-                                        </p:attrNameLst>
-                                      </p:cBhvr>
-                                      <p:tavLst>
-                                        <p:tav tm="0">
-                                          <p:val>
-                                            <p:fltVal val="0"/>
-                                          </p:val>
-                                        </p:tav>
-                                        <p:tav tm="100000">
-                                          <p:val>
-                                            <p:fltVal val="1"/>
-                                          </p:val>
-                                        </p:tav>
-                                      </p:tavLst>
-                                    </p:anim>
-                                  </p:childTnLst>
-                                </p:cTn>
-                              </p:par>
-                              <p:par>
-                                <p:cTn id="2116" presetID="10" presetClass="entr" presetSubtype="0" fill="hold" grpId="0" nodeType="withEffect">
-                                  <p:stCondLst>
-                                    <p:cond delay="0"/>
-                                  </p:stCondLst>
-                                  <p:childTnLst>
-                                    <p:set>
-                                      <p:cBhvr>
-                                        <p:cTn id="2117" dur="1" fill="hold">
-                                          <p:stCondLst>
-                                            <p:cond delay="0"/>
-                                          </p:stCondLst>
-                                        </p:cTn>
-                                        <p:tgtEl>
-                                          <p:spTgt spid="12"/>
-                                        </p:tgtEl>
-                                        <p:attrNameLst>
-                                          <p:attrName>style.visibility</p:attrName>
-                                        </p:attrNameLst>
-                                      </p:cBhvr>
-                                      <p:to>
-                                        <p:strVal val="visible"/>
-                                      </p:to>
-                                    </p:set>
-                                    <p:anim calcmode="lin" valueType="num">
-                                      <p:cBhvr additive="base">
-                                        <p:cTn id="2118" dur="500" fill="hold"/>
-                                        <p:tgtEl>
-                                          <p:spTgt spid="12"/>
-                                        </p:tgtEl>
-                                        <p:attrNameLst>
-                                          <p:attrName>style.opacity</p:attrName>
-                                        </p:attrNameLst>
-                                      </p:cBhvr>
-                                      <p:tavLst>
-                                        <p:tav tm="0">
-                                          <p:val>
-                                            <p:fltVal val="0"/>
-                                          </p:val>
-                                        </p:tav>
-                                        <p:tav tm="100000">
-                                          <p:val>
-                                            <p:fltVal val="1"/>
-                                          </p:val>
-                                        </p:tav>
-                                      </p:tavLst>
-                                    </p:anim>
-                                  </p:childTnLst>
-                                </p:cTn>
-                              </p:par>
-                              <p:par>
-                                <p:cTn id="2122" presetID="10" presetClass="entr" presetSubtype="0" fill="hold" grpId="0" nodeType="withEffect">
-                                  <p:stCondLst>
-                                    <p:cond delay="0"/>
-                                  </p:stCondLst>
-                                  <p:childTnLst>
-                                    <p:set>
-                                      <p:cBhvr>
-                                        <p:cTn id="2123" dur="1" fill="hold">
-                                          <p:stCondLst>
-                                            <p:cond delay="0"/>
-                                          </p:stCondLst>
-                                        </p:cTn>
-                                        <p:tgtEl>
-                                          <p:spTgt spid="13"/>
-                                        </p:tgtEl>
-                                        <p:attrNameLst>
-                                          <p:attrName>style.visibility</p:attrName>
-                                        </p:attrNameLst>
-                                      </p:cBhvr>
-                                      <p:to>
-                                        <p:strVal val="visible"/>
-                                      </p:to>
-                                    </p:set>
-                                    <p:anim calcmode="lin" valueType="num">
-                                      <p:cBhvr additive="base">
-                                        <p:cTn id="2124" dur="500" fill="hold"/>
-                                        <p:tgtEl>
-                                          <p:spTgt spid="13"/>
-                                        </p:tgtEl>
-                                        <p:attrNameLst>
-                                          <p:attrName>style.opacity</p:attrName>
-                                        </p:attrNameLst>
-                                      </p:cBhvr>
-                                      <p:tavLst>
-                                        <p:tav tm="0">
-                                          <p:val>
-                                            <p:fltVal val="0"/>
-                                          </p:val>
-                                        </p:tav>
-                                        <p:tav tm="100000">
-                                          <p:val>
-                                            <p:fltVal val="1"/>
-                                          </p:val>
-                                        </p:tav>
-                                      </p:tavLst>
-                                    </p:anim>
-                                  </p:childTnLst>
-                                </p:cTn>
-                              </p:par>
-                            </p:childTnLst>
-                          </p:cTn>
-                        </p:par>
-                      </p:childTnLst>
-                    </p:cTn>
-                  </p:par>
                 </p:childTnLst>
               </p:cTn>
               <p:prevCondLst>
@@ -14849,1861 +18611,6 @@
       <p:bldP spid="8" grpId="0"/>
       <p:bldP spid="9" grpId="0"/>
       <p:bldP spid="10" grpId="0"/>
-      <p:bldP spid="11" grpId="0"/>
-      <p:bldP spid="12" grpId="0"/>
-      <p:bldP spid="13" grpId="0"/>
-    </p:bldLst>
-  </p:timing>
-</p:sld>
-</file>
-
-<file path=ppt/slides/slide18.xml><?xml version="1.0" encoding="utf-8"?>
-<p:sld xmlns:a="http://schemas.openxmlformats.org/drawingml/2006/main" xmlns:p="http://schemas.openxmlformats.org/presentationml/2006/main" xmlns:r="http://schemas.openxmlformats.org/officeDocument/2006/relationships">
-  <p:cSld>
-    <p:spTree>
-      <p:nvGrpSpPr>
-        <p:cNvPr id="1" name=""/>
-        <p:cNvGrpSpPr/>
-        <p:nvPr/>
-      </p:nvGrpSpPr>
-      <p:grpSpPr/>
-      <p:sp>
-        <p:nvSpPr>
-          <p:cNvPr id="2" name="Rectangle 1"/>
-          <p:cNvSpPr/>
-          <p:nvPr/>
-        </p:nvSpPr>
-        <p:spPr>
-          <a:xfrm>
-            <a:off x="0" y="0"/>
-            <a:ext cx="12191695" cy="6858000"/>
-          </a:xfrm>
-          <a:prstGeom prst="rect">
-            <a:avLst/>
-          </a:prstGeom>
-          <a:solidFill>
-            <a:srgbClr val="FFFFFF"/>
-          </a:solidFill>
-          <a:ln>
-            <a:noFill/>
-          </a:ln>
-          <a:effectLst/>
-        </p:spPr>
-        <p:style>
-          <a:lnRef idx="1">
-            <a:schemeClr val="accent1"/>
-          </a:lnRef>
-          <a:fillRef idx="3">
-            <a:schemeClr val="accent1"/>
-          </a:fillRef>
-          <a:effectRef idx="2">
-            <a:schemeClr val="accent1"/>
-          </a:effectRef>
-          <a:fontRef idx="minor">
-            <a:schemeClr val="lt1"/>
-          </a:fontRef>
-        </p:style>
-        <p:txBody>
-          <a:bodyPr rtlCol="0" anchor="ctr"/>
-          <a:lstStyle/>
-          <a:p>
-            <a:pPr algn="ctr"/>
-          </a:p>
-        </p:txBody>
-      </p:sp>
-      <p:sp>
-        <p:nvSpPr>
-          <p:cNvPr id="3" name="Rectangle 2"/>
-          <p:cNvSpPr/>
-          <p:nvPr/>
-        </p:nvSpPr>
-        <p:spPr>
-          <a:xfrm>
-            <a:off x="0" y="0"/>
-            <a:ext cx="12191695" cy="868680"/>
-          </a:xfrm>
-          <a:prstGeom prst="rect">
-            <a:avLst/>
-          </a:prstGeom>
-          <a:solidFill>
-            <a:srgbClr val="0B1F4B"/>
-          </a:solidFill>
-          <a:ln>
-            <a:noFill/>
-          </a:ln>
-          <a:effectLst/>
-        </p:spPr>
-        <p:style>
-          <a:lnRef idx="1">
-            <a:schemeClr val="accent1"/>
-          </a:lnRef>
-          <a:fillRef idx="3">
-            <a:schemeClr val="accent1"/>
-          </a:fillRef>
-          <a:effectRef idx="2">
-            <a:schemeClr val="accent1"/>
-          </a:effectRef>
-          <a:fontRef idx="minor">
-            <a:schemeClr val="lt1"/>
-          </a:fontRef>
-        </p:style>
-        <p:txBody>
-          <a:bodyPr rtlCol="0" anchor="ctr"/>
-          <a:lstStyle/>
-          <a:p>
-            <a:pPr algn="ctr"/>
-          </a:p>
-        </p:txBody>
-      </p:sp>
-      <p:sp>
-        <p:nvSpPr>
-          <p:cNvPr id="4" name="Rectangle 3"/>
-          <p:cNvSpPr/>
-          <p:nvPr/>
-        </p:nvSpPr>
-        <p:spPr>
-          <a:xfrm>
-            <a:off x="0" y="868680"/>
-            <a:ext cx="12191695" cy="54864"/>
-          </a:xfrm>
-          <a:prstGeom prst="rect">
-            <a:avLst/>
-          </a:prstGeom>
-          <a:solidFill>
-            <a:srgbClr val="0078D4"/>
-          </a:solidFill>
-          <a:ln>
-            <a:noFill/>
-          </a:ln>
-          <a:effectLst/>
-        </p:spPr>
-        <p:style>
-          <a:lnRef idx="1">
-            <a:schemeClr val="accent1"/>
-          </a:lnRef>
-          <a:fillRef idx="3">
-            <a:schemeClr val="accent1"/>
-          </a:fillRef>
-          <a:effectRef idx="2">
-            <a:schemeClr val="accent1"/>
-          </a:effectRef>
-          <a:fontRef idx="minor">
-            <a:schemeClr val="lt1"/>
-          </a:fontRef>
-        </p:style>
-        <p:txBody>
-          <a:bodyPr rtlCol="0" anchor="ctr"/>
-          <a:lstStyle/>
-          <a:p>
-            <a:pPr algn="ctr"/>
-          </a:p>
-        </p:txBody>
-      </p:sp>
-      <p:sp>
-        <p:nvSpPr>
-          <p:cNvPr id="5" name="TextBox 4"/>
-          <p:cNvSpPr txBox="1"/>
-          <p:nvPr/>
-        </p:nvSpPr>
-        <p:spPr>
-          <a:xfrm>
-            <a:off x="457200" y="137160"/>
-            <a:ext cx="10058400" cy="640080"/>
-          </a:xfrm>
-          <a:prstGeom prst="rect">
-            <a:avLst/>
-          </a:prstGeom>
-          <a:noFill/>
-        </p:spPr>
-        <p:txBody>
-          <a:bodyPr wrap="square" lIns="45720" rIns="45720" tIns="18288" bIns="18288" anchor="ctr">
-            <a:spAutoFit/>
-          </a:bodyPr>
-          <a:lstStyle/>
-          <a:p>
-            <a:pPr algn="l"/>
-            <a:r>
-              <a:rPr sz="2600" b="1" i="0">
-                <a:solidFill>
-                  <a:srgbClr val="FFFFFF"/>
-                </a:solidFill>
-                <a:latin typeface="Segoe UI"/>
-              </a:rPr>
-              <a:t>Self-Consistency Decision Map</a:t>
-            </a:r>
-          </a:p>
-        </p:txBody>
-      </p:sp>
-      <p:sp>
-        <p:nvSpPr>
-          <p:cNvPr id="6" name="TextBox 5"/>
-          <p:cNvSpPr txBox="1"/>
-          <p:nvPr/>
-        </p:nvSpPr>
-        <p:spPr>
-          <a:xfrm>
-            <a:off x="457200" y="6446520"/>
-            <a:ext cx="5486400" cy="320040"/>
-          </a:xfrm>
-          <a:prstGeom prst="rect">
-            <a:avLst/>
-          </a:prstGeom>
-          <a:noFill/>
-        </p:spPr>
-        <p:txBody>
-          <a:bodyPr wrap="square" lIns="45720" rIns="45720" tIns="18288" bIns="18288" anchor="t">
-            <a:spAutoFit/>
-          </a:bodyPr>
-          <a:lstStyle/>
-          <a:p>
-            <a:pPr algn="l"/>
-            <a:r>
-              <a:rPr sz="1100" b="0" i="1">
-                <a:solidFill>
-                  <a:srgbClr val="605E5C"/>
-                </a:solidFill>
-                <a:latin typeface="Segoe UI"/>
-              </a:rPr>
-              <a:t>BACKUP  •  B2</a:t>
-            </a:r>
-          </a:p>
-        </p:txBody>
-      </p:sp>
-      <p:pic>
-        <p:nvPicPr>
-          <p:cNvPr id="7" name="Picture 6" descr="chartSC3_selfcons_best_config_heatmap.png"/>
-          <p:cNvPicPr>
-            <a:picLocks noChangeAspect="1"/>
-          </p:cNvPicPr>
-          <p:nvPr/>
-        </p:nvPicPr>
-        <p:blipFill>
-          <a:blip r:embed="rId2"/>
-          <a:stretch>
-            <a:fillRect/>
-          </a:stretch>
-        </p:blipFill>
-        <p:spPr>
-          <a:xfrm>
-            <a:off x="457200" y="1687590"/>
-            <a:ext cx="7955279" cy="4214340"/>
-          </a:xfrm>
-          <a:prstGeom prst="rect">
-            <a:avLst/>
-          </a:prstGeom>
-        </p:spPr>
-      </p:pic>
-      <p:sp>
-        <p:nvSpPr>
-          <p:cNvPr id="8" name="TextBox 7"/>
-          <p:cNvSpPr txBox="1"/>
-          <p:nvPr/>
-        </p:nvSpPr>
-        <p:spPr>
-          <a:xfrm>
-            <a:off x="8595360" y="1188720"/>
-            <a:ext cx="3383280" cy="457200"/>
-          </a:xfrm>
-          <a:prstGeom prst="rect">
-            <a:avLst/>
-          </a:prstGeom>
-          <a:noFill/>
-        </p:spPr>
-        <p:txBody>
-          <a:bodyPr wrap="square" lIns="45720" rIns="45720" tIns="18288" bIns="18288" anchor="t">
-            <a:spAutoFit/>
-          </a:bodyPr>
-          <a:lstStyle/>
-          <a:p>
-            <a:pPr algn="l"/>
-            <a:r>
-              <a:rPr sz="1600" b="1" i="0">
-                <a:solidFill>
-                  <a:srgbClr val="0B1F4B"/>
-                </a:solidFill>
-                <a:latin typeface="Segoe UI"/>
-              </a:rPr>
-              <a:t>When to use</a:t>
-            </a:r>
-          </a:p>
-        </p:txBody>
-      </p:sp>
-      <p:sp>
-        <p:nvSpPr>
-          <p:cNvPr id="9" name="Rectangle 8"/>
-          <p:cNvSpPr/>
-          <p:nvPr/>
-        </p:nvSpPr>
-        <p:spPr>
-          <a:xfrm>
-            <a:off x="8595360" y="1627632"/>
-            <a:ext cx="731520" cy="36576"/>
-          </a:xfrm>
-          <a:prstGeom prst="rect">
-            <a:avLst/>
-          </a:prstGeom>
-          <a:solidFill>
-            <a:srgbClr val="0078D4"/>
-          </a:solidFill>
-          <a:ln>
-            <a:noFill/>
-          </a:ln>
-          <a:effectLst/>
-        </p:spPr>
-        <p:style>
-          <a:lnRef idx="1">
-            <a:schemeClr val="accent1"/>
-          </a:lnRef>
-          <a:fillRef idx="3">
-            <a:schemeClr val="accent1"/>
-          </a:fillRef>
-          <a:effectRef idx="2">
-            <a:schemeClr val="accent1"/>
-          </a:effectRef>
-          <a:fontRef idx="minor">
-            <a:schemeClr val="lt1"/>
-          </a:fontRef>
-        </p:style>
-        <p:txBody>
-          <a:bodyPr rtlCol="0" anchor="ctr"/>
-          <a:lstStyle/>
-          <a:p>
-            <a:pPr algn="ctr"/>
-          </a:p>
-        </p:txBody>
-      </p:sp>
-      <p:sp>
-        <p:nvSpPr>
-          <p:cNvPr id="10" name="TextBox 9"/>
-          <p:cNvSpPr txBox="1"/>
-          <p:nvPr/>
-        </p:nvSpPr>
-        <p:spPr>
-          <a:xfrm>
-            <a:off x="8595360" y="1783080"/>
-            <a:ext cx="3383280" cy="2011680"/>
-          </a:xfrm>
-          <a:prstGeom prst="rect">
-            <a:avLst/>
-          </a:prstGeom>
-          <a:noFill/>
-        </p:spPr>
-        <p:txBody>
-          <a:bodyPr wrap="square" lIns="45720" rIns="45720" tIns="18288" bIns="18288" anchor="t">
-            <a:spAutoFit/>
-          </a:bodyPr>
-          <a:lstStyle/>
-          <a:p>
-            <a:pPr algn="l"/>
-            <a:r>
-              <a:rPr sz="1300" b="0" i="0">
-                <a:solidFill>
-                  <a:srgbClr val="212121"/>
-                </a:solidFill>
-                <a:latin typeface="Segoe UI"/>
-              </a:rPr>
-              <a:t>Use if asked when self-consistency is worth it.</a:t>
-            </a:r>
-          </a:p>
-        </p:txBody>
-      </p:sp>
-      <p:sp>
-        <p:nvSpPr>
-          <p:cNvPr id="11" name="Rectangle 10"/>
-          <p:cNvSpPr/>
-          <p:nvPr/>
-        </p:nvSpPr>
-        <p:spPr>
-          <a:xfrm>
-            <a:off x="8595360" y="4023360"/>
-            <a:ext cx="3383280" cy="2286000"/>
-          </a:xfrm>
-          <a:prstGeom prst="rect">
-            <a:avLst/>
-          </a:prstGeom>
-          <a:solidFill>
-            <a:srgbClr val="EBF4FF"/>
-          </a:solidFill>
-          <a:ln w="9525">
-            <a:solidFill>
-              <a:srgbClr val="0078D4"/>
-            </a:solidFill>
-          </a:ln>
-          <a:effectLst/>
-        </p:spPr>
-        <p:style>
-          <a:lnRef idx="1">
-            <a:schemeClr val="accent1"/>
-          </a:lnRef>
-          <a:fillRef idx="3">
-            <a:schemeClr val="accent1"/>
-          </a:fillRef>
-          <a:effectRef idx="2">
-            <a:schemeClr val="accent1"/>
-          </a:effectRef>
-          <a:fontRef idx="minor">
-            <a:schemeClr val="lt1"/>
-          </a:fontRef>
-        </p:style>
-        <p:txBody>
-          <a:bodyPr rtlCol="0" anchor="ctr"/>
-          <a:lstStyle/>
-          <a:p>
-            <a:pPr algn="ctr"/>
-          </a:p>
-        </p:txBody>
-      </p:sp>
-      <p:sp>
-        <p:nvSpPr>
-          <p:cNvPr id="12" name="Rectangle 11"/>
-          <p:cNvSpPr/>
-          <p:nvPr/>
-        </p:nvSpPr>
-        <p:spPr>
-          <a:xfrm>
-            <a:off x="8595360" y="4023360"/>
-            <a:ext cx="73152" cy="2286000"/>
-          </a:xfrm>
-          <a:prstGeom prst="rect">
-            <a:avLst/>
-          </a:prstGeom>
-          <a:solidFill>
-            <a:srgbClr val="0078D4"/>
-          </a:solidFill>
-          <a:ln>
-            <a:noFill/>
-          </a:ln>
-          <a:effectLst/>
-        </p:spPr>
-        <p:style>
-          <a:lnRef idx="1">
-            <a:schemeClr val="accent1"/>
-          </a:lnRef>
-          <a:fillRef idx="3">
-            <a:schemeClr val="accent1"/>
-          </a:fillRef>
-          <a:effectRef idx="2">
-            <a:schemeClr val="accent1"/>
-          </a:effectRef>
-          <a:fontRef idx="minor">
-            <a:schemeClr val="lt1"/>
-          </a:fontRef>
-        </p:style>
-        <p:txBody>
-          <a:bodyPr rtlCol="0" anchor="ctr"/>
-          <a:lstStyle/>
-          <a:p>
-            <a:pPr algn="ctr"/>
-          </a:p>
-        </p:txBody>
-      </p:sp>
-      <p:sp>
-        <p:nvSpPr>
-          <p:cNvPr id="13" name="TextBox 12"/>
-          <p:cNvSpPr txBox="1"/>
-          <p:nvPr/>
-        </p:nvSpPr>
-        <p:spPr>
-          <a:xfrm>
-            <a:off x="8759952" y="4069080"/>
-            <a:ext cx="3154680" cy="2194560"/>
-          </a:xfrm>
-          <a:prstGeom prst="rect">
-            <a:avLst/>
-          </a:prstGeom>
-          <a:noFill/>
-        </p:spPr>
-        <p:txBody>
-          <a:bodyPr wrap="square" anchor="ctr" lIns="45720" rIns="45720">
-            <a:spAutoFit/>
-          </a:bodyPr>
-          <a:lstStyle/>
-          <a:p>
-            <a:pPr algn="l"/>
-            <a:r>
-              <a:rPr sz="1200" b="0" i="0">
-                <a:solidFill>
-                  <a:srgbClr val="212121"/>
-                </a:solidFill>
-                <a:latin typeface="Segoe UI"/>
-              </a:rPr>
-              <a:t>gpt-4.1-mini N=3 dominates the upper-left (latency-tolerant, accuracy-important) region.</a:t>
-            </a:r>
-          </a:p>
-        </p:txBody>
-      </p:sp>
-    </p:spTree>
-  </p:cSld>
-  <p:clrMapOvr>
-    <a:masterClrMapping/>
-  </p:clrMapOvr>
-  <p:timing>
-    <p:tnLst>
-      <p:par>
-        <p:cTn id="1" dur="indefinite" restart="never" nodeType="tmRoot">
-          <p:childTnLst>
-            <p:seq concurrent="1" nextAc="seek">
-              <p:cTn id="2" dur="indefinite" nodeType="mainSeq">
-                <p:childTnLst>
-                  <p:par>
-                    <p:cTn id="100" fill="hold">
-                      <p:stCondLst>
-                        <p:cond delay="indefinite"/>
-                      </p:stCondLst>
-                      <p:childTnLst>
-                        <p:par>
-                          <p:cTn id="101" fill="hold">
-                            <p:stCondLst>
-                              <p:cond delay="0"/>
-                            </p:stCondLst>
-                            <p:childTnLst>
-                              <p:par>
-                                <p:cTn id="110" presetID="10" presetClass="entr" presetSubtype="0" fill="hold" grpId="0" nodeType="clickEffect">
-                                  <p:stCondLst>
-                                    <p:cond delay="0"/>
-                                  </p:stCondLst>
-                                  <p:childTnLst>
-                                    <p:set>
-                                      <p:cBhvr>
-                                        <p:cTn id="111" dur="1" fill="hold">
-                                          <p:stCondLst>
-                                            <p:cond delay="0"/>
-                                          </p:stCondLst>
-                                        </p:cTn>
-                                        <p:tgtEl>
-                                          <p:spTgt spid="7"/>
-                                        </p:tgtEl>
-                                        <p:attrNameLst>
-                                          <p:attrName>style.visibility</p:attrName>
-                                        </p:attrNameLst>
-                                      </p:cBhvr>
-                                      <p:to>
-                                        <p:strVal val="visible"/>
-                                      </p:to>
-                                    </p:set>
-                                    <p:anim calcmode="lin" valueType="num">
-                                      <p:cBhvr additive="base">
-                                        <p:cTn id="112" dur="500" fill="hold"/>
-                                        <p:tgtEl>
-                                          <p:spTgt spid="7"/>
-                                        </p:tgtEl>
-                                        <p:attrNameLst>
-                                          <p:attrName>style.opacity</p:attrName>
-                                        </p:attrNameLst>
-                                      </p:cBhvr>
-                                      <p:tavLst>
-                                        <p:tav tm="0">
-                                          <p:val>
-                                            <p:fltVal val="0"/>
-                                          </p:val>
-                                        </p:tav>
-                                        <p:tav tm="100000">
-                                          <p:val>
-                                            <p:fltVal val="1"/>
-                                          </p:val>
-                                        </p:tav>
-                                      </p:tavLst>
-                                    </p:anim>
-                                  </p:childTnLst>
-                                </p:cTn>
-                              </p:par>
-                            </p:childTnLst>
-                          </p:cTn>
-                        </p:par>
-                      </p:childTnLst>
-                    </p:cTn>
-                  </p:par>
-                  <p:par>
-                    <p:cTn id="1100" fill="hold">
-                      <p:stCondLst>
-                        <p:cond delay="indefinite"/>
-                      </p:stCondLst>
-                      <p:childTnLst>
-                        <p:par>
-                          <p:cTn id="1101" fill="hold">
-                            <p:stCondLst>
-                              <p:cond delay="0"/>
-                            </p:stCondLst>
-                            <p:childTnLst>
-                              <p:par>
-                                <p:cTn id="1110" presetID="10" presetClass="entr" presetSubtype="0" fill="hold" grpId="0" nodeType="clickEffect">
-                                  <p:stCondLst>
-                                    <p:cond delay="0"/>
-                                  </p:stCondLst>
-                                  <p:childTnLst>
-                                    <p:set>
-                                      <p:cBhvr>
-                                        <p:cTn id="1111" dur="1" fill="hold">
-                                          <p:stCondLst>
-                                            <p:cond delay="0"/>
-                                          </p:stCondLst>
-                                        </p:cTn>
-                                        <p:tgtEl>
-                                          <p:spTgt spid="8"/>
-                                        </p:tgtEl>
-                                        <p:attrNameLst>
-                                          <p:attrName>style.visibility</p:attrName>
-                                        </p:attrNameLst>
-                                      </p:cBhvr>
-                                      <p:to>
-                                        <p:strVal val="visible"/>
-                                      </p:to>
-                                    </p:set>
-                                    <p:anim calcmode="lin" valueType="num">
-                                      <p:cBhvr additive="base">
-                                        <p:cTn id="1112" dur="500" fill="hold"/>
-                                        <p:tgtEl>
-                                          <p:spTgt spid="8"/>
-                                        </p:tgtEl>
-                                        <p:attrNameLst>
-                                          <p:attrName>style.opacity</p:attrName>
-                                        </p:attrNameLst>
-                                      </p:cBhvr>
-                                      <p:tavLst>
-                                        <p:tav tm="0">
-                                          <p:val>
-                                            <p:fltVal val="0"/>
-                                          </p:val>
-                                        </p:tav>
-                                        <p:tav tm="100000">
-                                          <p:val>
-                                            <p:fltVal val="1"/>
-                                          </p:val>
-                                        </p:tav>
-                                      </p:tavLst>
-                                    </p:anim>
-                                  </p:childTnLst>
-                                </p:cTn>
-                              </p:par>
-                              <p:par>
-                                <p:cTn id="1116" presetID="10" presetClass="entr" presetSubtype="0" fill="hold" grpId="0" nodeType="withEffect">
-                                  <p:stCondLst>
-                                    <p:cond delay="0"/>
-                                  </p:stCondLst>
-                                  <p:childTnLst>
-                                    <p:set>
-                                      <p:cBhvr>
-                                        <p:cTn id="1117" dur="1" fill="hold">
-                                          <p:stCondLst>
-                                            <p:cond delay="0"/>
-                                          </p:stCondLst>
-                                        </p:cTn>
-                                        <p:tgtEl>
-                                          <p:spTgt spid="9"/>
-                                        </p:tgtEl>
-                                        <p:attrNameLst>
-                                          <p:attrName>style.visibility</p:attrName>
-                                        </p:attrNameLst>
-                                      </p:cBhvr>
-                                      <p:to>
-                                        <p:strVal val="visible"/>
-                                      </p:to>
-                                    </p:set>
-                                    <p:anim calcmode="lin" valueType="num">
-                                      <p:cBhvr additive="base">
-                                        <p:cTn id="1118" dur="500" fill="hold"/>
-                                        <p:tgtEl>
-                                          <p:spTgt spid="9"/>
-                                        </p:tgtEl>
-                                        <p:attrNameLst>
-                                          <p:attrName>style.opacity</p:attrName>
-                                        </p:attrNameLst>
-                                      </p:cBhvr>
-                                      <p:tavLst>
-                                        <p:tav tm="0">
-                                          <p:val>
-                                            <p:fltVal val="0"/>
-                                          </p:val>
-                                        </p:tav>
-                                        <p:tav tm="100000">
-                                          <p:val>
-                                            <p:fltVal val="1"/>
-                                          </p:val>
-                                        </p:tav>
-                                      </p:tavLst>
-                                    </p:anim>
-                                  </p:childTnLst>
-                                </p:cTn>
-                              </p:par>
-                              <p:par>
-                                <p:cTn id="1122" presetID="10" presetClass="entr" presetSubtype="0" fill="hold" grpId="0" nodeType="withEffect">
-                                  <p:stCondLst>
-                                    <p:cond delay="0"/>
-                                  </p:stCondLst>
-                                  <p:childTnLst>
-                                    <p:set>
-                                      <p:cBhvr>
-                                        <p:cTn id="1123" dur="1" fill="hold">
-                                          <p:stCondLst>
-                                            <p:cond delay="0"/>
-                                          </p:stCondLst>
-                                        </p:cTn>
-                                        <p:tgtEl>
-                                          <p:spTgt spid="10"/>
-                                        </p:tgtEl>
-                                        <p:attrNameLst>
-                                          <p:attrName>style.visibility</p:attrName>
-                                        </p:attrNameLst>
-                                      </p:cBhvr>
-                                      <p:to>
-                                        <p:strVal val="visible"/>
-                                      </p:to>
-                                    </p:set>
-                                    <p:anim calcmode="lin" valueType="num">
-                                      <p:cBhvr additive="base">
-                                        <p:cTn id="1124" dur="500" fill="hold"/>
-                                        <p:tgtEl>
-                                          <p:spTgt spid="10"/>
-                                        </p:tgtEl>
-                                        <p:attrNameLst>
-                                          <p:attrName>style.opacity</p:attrName>
-                                        </p:attrNameLst>
-                                      </p:cBhvr>
-                                      <p:tavLst>
-                                        <p:tav tm="0">
-                                          <p:val>
-                                            <p:fltVal val="0"/>
-                                          </p:val>
-                                        </p:tav>
-                                        <p:tav tm="100000">
-                                          <p:val>
-                                            <p:fltVal val="1"/>
-                                          </p:val>
-                                        </p:tav>
-                                      </p:tavLst>
-                                    </p:anim>
-                                  </p:childTnLst>
-                                </p:cTn>
-                              </p:par>
-                            </p:childTnLst>
-                          </p:cTn>
-                        </p:par>
-                      </p:childTnLst>
-                    </p:cTn>
-                  </p:par>
-                  <p:par>
-                    <p:cTn id="2100" fill="hold">
-                      <p:stCondLst>
-                        <p:cond delay="indefinite"/>
-                      </p:stCondLst>
-                      <p:childTnLst>
-                        <p:par>
-                          <p:cTn id="2101" fill="hold">
-                            <p:stCondLst>
-                              <p:cond delay="0"/>
-                            </p:stCondLst>
-                            <p:childTnLst>
-                              <p:par>
-                                <p:cTn id="2110" presetID="10" presetClass="entr" presetSubtype="0" fill="hold" grpId="0" nodeType="clickEffect">
-                                  <p:stCondLst>
-                                    <p:cond delay="0"/>
-                                  </p:stCondLst>
-                                  <p:childTnLst>
-                                    <p:set>
-                                      <p:cBhvr>
-                                        <p:cTn id="2111" dur="1" fill="hold">
-                                          <p:stCondLst>
-                                            <p:cond delay="0"/>
-                                          </p:stCondLst>
-                                        </p:cTn>
-                                        <p:tgtEl>
-                                          <p:spTgt spid="11"/>
-                                        </p:tgtEl>
-                                        <p:attrNameLst>
-                                          <p:attrName>style.visibility</p:attrName>
-                                        </p:attrNameLst>
-                                      </p:cBhvr>
-                                      <p:to>
-                                        <p:strVal val="visible"/>
-                                      </p:to>
-                                    </p:set>
-                                    <p:anim calcmode="lin" valueType="num">
-                                      <p:cBhvr additive="base">
-                                        <p:cTn id="2112" dur="500" fill="hold"/>
-                                        <p:tgtEl>
-                                          <p:spTgt spid="11"/>
-                                        </p:tgtEl>
-                                        <p:attrNameLst>
-                                          <p:attrName>style.opacity</p:attrName>
-                                        </p:attrNameLst>
-                                      </p:cBhvr>
-                                      <p:tavLst>
-                                        <p:tav tm="0">
-                                          <p:val>
-                                            <p:fltVal val="0"/>
-                                          </p:val>
-                                        </p:tav>
-                                        <p:tav tm="100000">
-                                          <p:val>
-                                            <p:fltVal val="1"/>
-                                          </p:val>
-                                        </p:tav>
-                                      </p:tavLst>
-                                    </p:anim>
-                                  </p:childTnLst>
-                                </p:cTn>
-                              </p:par>
-                              <p:par>
-                                <p:cTn id="2116" presetID="10" presetClass="entr" presetSubtype="0" fill="hold" grpId="0" nodeType="withEffect">
-                                  <p:stCondLst>
-                                    <p:cond delay="0"/>
-                                  </p:stCondLst>
-                                  <p:childTnLst>
-                                    <p:set>
-                                      <p:cBhvr>
-                                        <p:cTn id="2117" dur="1" fill="hold">
-                                          <p:stCondLst>
-                                            <p:cond delay="0"/>
-                                          </p:stCondLst>
-                                        </p:cTn>
-                                        <p:tgtEl>
-                                          <p:spTgt spid="12"/>
-                                        </p:tgtEl>
-                                        <p:attrNameLst>
-                                          <p:attrName>style.visibility</p:attrName>
-                                        </p:attrNameLst>
-                                      </p:cBhvr>
-                                      <p:to>
-                                        <p:strVal val="visible"/>
-                                      </p:to>
-                                    </p:set>
-                                    <p:anim calcmode="lin" valueType="num">
-                                      <p:cBhvr additive="base">
-                                        <p:cTn id="2118" dur="500" fill="hold"/>
-                                        <p:tgtEl>
-                                          <p:spTgt spid="12"/>
-                                        </p:tgtEl>
-                                        <p:attrNameLst>
-                                          <p:attrName>style.opacity</p:attrName>
-                                        </p:attrNameLst>
-                                      </p:cBhvr>
-                                      <p:tavLst>
-                                        <p:tav tm="0">
-                                          <p:val>
-                                            <p:fltVal val="0"/>
-                                          </p:val>
-                                        </p:tav>
-                                        <p:tav tm="100000">
-                                          <p:val>
-                                            <p:fltVal val="1"/>
-                                          </p:val>
-                                        </p:tav>
-                                      </p:tavLst>
-                                    </p:anim>
-                                  </p:childTnLst>
-                                </p:cTn>
-                              </p:par>
-                              <p:par>
-                                <p:cTn id="2122" presetID="10" presetClass="entr" presetSubtype="0" fill="hold" grpId="0" nodeType="withEffect">
-                                  <p:stCondLst>
-                                    <p:cond delay="0"/>
-                                  </p:stCondLst>
-                                  <p:childTnLst>
-                                    <p:set>
-                                      <p:cBhvr>
-                                        <p:cTn id="2123" dur="1" fill="hold">
-                                          <p:stCondLst>
-                                            <p:cond delay="0"/>
-                                          </p:stCondLst>
-                                        </p:cTn>
-                                        <p:tgtEl>
-                                          <p:spTgt spid="13"/>
-                                        </p:tgtEl>
-                                        <p:attrNameLst>
-                                          <p:attrName>style.visibility</p:attrName>
-                                        </p:attrNameLst>
-                                      </p:cBhvr>
-                                      <p:to>
-                                        <p:strVal val="visible"/>
-                                      </p:to>
-                                    </p:set>
-                                    <p:anim calcmode="lin" valueType="num">
-                                      <p:cBhvr additive="base">
-                                        <p:cTn id="2124" dur="500" fill="hold"/>
-                                        <p:tgtEl>
-                                          <p:spTgt spid="13"/>
-                                        </p:tgtEl>
-                                        <p:attrNameLst>
-                                          <p:attrName>style.opacity</p:attrName>
-                                        </p:attrNameLst>
-                                      </p:cBhvr>
-                                      <p:tavLst>
-                                        <p:tav tm="0">
-                                          <p:val>
-                                            <p:fltVal val="0"/>
-                                          </p:val>
-                                        </p:tav>
-                                        <p:tav tm="100000">
-                                          <p:val>
-                                            <p:fltVal val="1"/>
-                                          </p:val>
-                                        </p:tav>
-                                      </p:tavLst>
-                                    </p:anim>
-                                  </p:childTnLst>
-                                </p:cTn>
-                              </p:par>
-                            </p:childTnLst>
-                          </p:cTn>
-                        </p:par>
-                      </p:childTnLst>
-                    </p:cTn>
-                  </p:par>
-                </p:childTnLst>
-              </p:cTn>
-              <p:prevCondLst>
-                <p:cond evt="onPrev" delay="0">
-                  <p:tgtEl>
-                    <p:sldTgt/>
-                  </p:tgtEl>
-                </p:cond>
-              </p:prevCondLst>
-              <p:nextCondLst>
-                <p:cond evt="onNext" delay="0">
-                  <p:tgtEl>
-                    <p:sldTgt/>
-                  </p:tgtEl>
-                </p:cond>
-              </p:nextCondLst>
-            </p:seq>
-          </p:childTnLst>
-        </p:cTn>
-      </p:par>
-    </p:tnLst>
-    <p:bldLst>
-      <p:bldP spid="7" grpId="0"/>
-      <p:bldP spid="8" grpId="0"/>
-      <p:bldP spid="9" grpId="0"/>
-      <p:bldP spid="10" grpId="0"/>
-      <p:bldP spid="11" grpId="0"/>
-      <p:bldP spid="12" grpId="0"/>
-      <p:bldP spid="13" grpId="0"/>
-    </p:bldLst>
-  </p:timing>
-</p:sld>
-</file>
-
-<file path=ppt/slides/slide19.xml><?xml version="1.0" encoding="utf-8"?>
-<p:sld xmlns:a="http://schemas.openxmlformats.org/drawingml/2006/main" xmlns:p="http://schemas.openxmlformats.org/presentationml/2006/main" xmlns:r="http://schemas.openxmlformats.org/officeDocument/2006/relationships">
-  <p:cSld>
-    <p:spTree>
-      <p:nvGrpSpPr>
-        <p:cNvPr id="1" name=""/>
-        <p:cNvGrpSpPr/>
-        <p:nvPr/>
-      </p:nvGrpSpPr>
-      <p:grpSpPr/>
-      <p:sp>
-        <p:nvSpPr>
-          <p:cNvPr id="2" name="Rectangle 1"/>
-          <p:cNvSpPr/>
-          <p:nvPr/>
-        </p:nvSpPr>
-        <p:spPr>
-          <a:xfrm>
-            <a:off x="0" y="0"/>
-            <a:ext cx="12191695" cy="6858000"/>
-          </a:xfrm>
-          <a:prstGeom prst="rect">
-            <a:avLst/>
-          </a:prstGeom>
-          <a:solidFill>
-            <a:srgbClr val="FFFFFF"/>
-          </a:solidFill>
-          <a:ln>
-            <a:noFill/>
-          </a:ln>
-          <a:effectLst/>
-        </p:spPr>
-        <p:style>
-          <a:lnRef idx="1">
-            <a:schemeClr val="accent1"/>
-          </a:lnRef>
-          <a:fillRef idx="3">
-            <a:schemeClr val="accent1"/>
-          </a:fillRef>
-          <a:effectRef idx="2">
-            <a:schemeClr val="accent1"/>
-          </a:effectRef>
-          <a:fontRef idx="minor">
-            <a:schemeClr val="lt1"/>
-          </a:fontRef>
-        </p:style>
-        <p:txBody>
-          <a:bodyPr rtlCol="0" anchor="ctr"/>
-          <a:lstStyle/>
-          <a:p>
-            <a:pPr algn="ctr"/>
-          </a:p>
-        </p:txBody>
-      </p:sp>
-      <p:sp>
-        <p:nvSpPr>
-          <p:cNvPr id="3" name="Rectangle 2"/>
-          <p:cNvSpPr/>
-          <p:nvPr/>
-        </p:nvSpPr>
-        <p:spPr>
-          <a:xfrm>
-            <a:off x="0" y="0"/>
-            <a:ext cx="12191695" cy="868680"/>
-          </a:xfrm>
-          <a:prstGeom prst="rect">
-            <a:avLst/>
-          </a:prstGeom>
-          <a:solidFill>
-            <a:srgbClr val="0B1F4B"/>
-          </a:solidFill>
-          <a:ln>
-            <a:noFill/>
-          </a:ln>
-          <a:effectLst/>
-        </p:spPr>
-        <p:style>
-          <a:lnRef idx="1">
-            <a:schemeClr val="accent1"/>
-          </a:lnRef>
-          <a:fillRef idx="3">
-            <a:schemeClr val="accent1"/>
-          </a:fillRef>
-          <a:effectRef idx="2">
-            <a:schemeClr val="accent1"/>
-          </a:effectRef>
-          <a:fontRef idx="minor">
-            <a:schemeClr val="lt1"/>
-          </a:fontRef>
-        </p:style>
-        <p:txBody>
-          <a:bodyPr rtlCol="0" anchor="ctr"/>
-          <a:lstStyle/>
-          <a:p>
-            <a:pPr algn="ctr"/>
-          </a:p>
-        </p:txBody>
-      </p:sp>
-      <p:sp>
-        <p:nvSpPr>
-          <p:cNvPr id="4" name="Rectangle 3"/>
-          <p:cNvSpPr/>
-          <p:nvPr/>
-        </p:nvSpPr>
-        <p:spPr>
-          <a:xfrm>
-            <a:off x="0" y="868680"/>
-            <a:ext cx="12191695" cy="54864"/>
-          </a:xfrm>
-          <a:prstGeom prst="rect">
-            <a:avLst/>
-          </a:prstGeom>
-          <a:solidFill>
-            <a:srgbClr val="0078D4"/>
-          </a:solidFill>
-          <a:ln>
-            <a:noFill/>
-          </a:ln>
-          <a:effectLst/>
-        </p:spPr>
-        <p:style>
-          <a:lnRef idx="1">
-            <a:schemeClr val="accent1"/>
-          </a:lnRef>
-          <a:fillRef idx="3">
-            <a:schemeClr val="accent1"/>
-          </a:fillRef>
-          <a:effectRef idx="2">
-            <a:schemeClr val="accent1"/>
-          </a:effectRef>
-          <a:fontRef idx="minor">
-            <a:schemeClr val="lt1"/>
-          </a:fontRef>
-        </p:style>
-        <p:txBody>
-          <a:bodyPr rtlCol="0" anchor="ctr"/>
-          <a:lstStyle/>
-          <a:p>
-            <a:pPr algn="ctr"/>
-          </a:p>
-        </p:txBody>
-      </p:sp>
-      <p:sp>
-        <p:nvSpPr>
-          <p:cNvPr id="5" name="TextBox 4"/>
-          <p:cNvSpPr txBox="1"/>
-          <p:nvPr/>
-        </p:nvSpPr>
-        <p:spPr>
-          <a:xfrm>
-            <a:off x="457200" y="137160"/>
-            <a:ext cx="10058400" cy="640080"/>
-          </a:xfrm>
-          <a:prstGeom prst="rect">
-            <a:avLst/>
-          </a:prstGeom>
-          <a:noFill/>
-        </p:spPr>
-        <p:txBody>
-          <a:bodyPr wrap="square" lIns="45720" rIns="45720" tIns="18288" bIns="18288" anchor="ctr">
-            <a:spAutoFit/>
-          </a:bodyPr>
-          <a:lstStyle/>
-          <a:p>
-            <a:pPr algn="l"/>
-            <a:r>
-              <a:rPr sz="2600" b="1" i="0">
-                <a:solidFill>
-                  <a:srgbClr val="FFFFFF"/>
-                </a:solidFill>
-                <a:latin typeface="Segoe UI"/>
-              </a:rPr>
-              <a:t>Router Detail: Routing Behavior by Dataset</a:t>
-            </a:r>
-          </a:p>
-        </p:txBody>
-      </p:sp>
-      <p:sp>
-        <p:nvSpPr>
-          <p:cNvPr id="6" name="TextBox 5"/>
-          <p:cNvSpPr txBox="1"/>
-          <p:nvPr/>
-        </p:nvSpPr>
-        <p:spPr>
-          <a:xfrm>
-            <a:off x="457200" y="6446520"/>
-            <a:ext cx="5486400" cy="320040"/>
-          </a:xfrm>
-          <a:prstGeom prst="rect">
-            <a:avLst/>
-          </a:prstGeom>
-          <a:noFill/>
-        </p:spPr>
-        <p:txBody>
-          <a:bodyPr wrap="square" lIns="45720" rIns="45720" tIns="18288" bIns="18288" anchor="t">
-            <a:spAutoFit/>
-          </a:bodyPr>
-          <a:lstStyle/>
-          <a:p>
-            <a:pPr algn="l"/>
-            <a:r>
-              <a:rPr sz="1100" b="0" i="1">
-                <a:solidFill>
-                  <a:srgbClr val="605E5C"/>
-                </a:solidFill>
-                <a:latin typeface="Segoe UI"/>
-              </a:rPr>
-              <a:t>BACKUP  •  B3</a:t>
-            </a:r>
-          </a:p>
-        </p:txBody>
-      </p:sp>
-      <p:pic>
-        <p:nvPicPr>
-          <p:cNvPr id="7" name="Picture 6" descr="chartR1_router_overview.png"/>
-          <p:cNvPicPr>
-            <a:picLocks noChangeAspect="1"/>
-          </p:cNvPicPr>
-          <p:nvPr/>
-        </p:nvPicPr>
-        <p:blipFill>
-          <a:blip r:embed="rId2"/>
-          <a:stretch>
-            <a:fillRect/>
-          </a:stretch>
-        </p:blipFill>
-        <p:spPr>
-          <a:xfrm>
-            <a:off x="1350627" y="1188720"/>
-            <a:ext cx="6168424" cy="5212080"/>
-          </a:xfrm>
-          <a:prstGeom prst="rect">
-            <a:avLst/>
-          </a:prstGeom>
-        </p:spPr>
-      </p:pic>
-      <p:sp>
-        <p:nvSpPr>
-          <p:cNvPr id="8" name="TextBox 7"/>
-          <p:cNvSpPr txBox="1"/>
-          <p:nvPr/>
-        </p:nvSpPr>
-        <p:spPr>
-          <a:xfrm>
-            <a:off x="8595360" y="1188720"/>
-            <a:ext cx="3383280" cy="457200"/>
-          </a:xfrm>
-          <a:prstGeom prst="rect">
-            <a:avLst/>
-          </a:prstGeom>
-          <a:noFill/>
-        </p:spPr>
-        <p:txBody>
-          <a:bodyPr wrap="square" lIns="45720" rIns="45720" tIns="18288" bIns="18288" anchor="t">
-            <a:spAutoFit/>
-          </a:bodyPr>
-          <a:lstStyle/>
-          <a:p>
-            <a:pPr algn="l"/>
-            <a:r>
-              <a:rPr sz="1600" b="1" i="0">
-                <a:solidFill>
-                  <a:srgbClr val="0B1F4B"/>
-                </a:solidFill>
-                <a:latin typeface="Segoe UI"/>
-              </a:rPr>
-              <a:t>When to use</a:t>
-            </a:r>
-          </a:p>
-        </p:txBody>
-      </p:sp>
-      <p:sp>
-        <p:nvSpPr>
-          <p:cNvPr id="9" name="Rectangle 8"/>
-          <p:cNvSpPr/>
-          <p:nvPr/>
-        </p:nvSpPr>
-        <p:spPr>
-          <a:xfrm>
-            <a:off x="8595360" y="1627632"/>
-            <a:ext cx="731520" cy="36576"/>
-          </a:xfrm>
-          <a:prstGeom prst="rect">
-            <a:avLst/>
-          </a:prstGeom>
-          <a:solidFill>
-            <a:srgbClr val="0078D4"/>
-          </a:solidFill>
-          <a:ln>
-            <a:noFill/>
-          </a:ln>
-          <a:effectLst/>
-        </p:spPr>
-        <p:style>
-          <a:lnRef idx="1">
-            <a:schemeClr val="accent1"/>
-          </a:lnRef>
-          <a:fillRef idx="3">
-            <a:schemeClr val="accent1"/>
-          </a:fillRef>
-          <a:effectRef idx="2">
-            <a:schemeClr val="accent1"/>
-          </a:effectRef>
-          <a:fontRef idx="minor">
-            <a:schemeClr val="lt1"/>
-          </a:fontRef>
-        </p:style>
-        <p:txBody>
-          <a:bodyPr rtlCol="0" anchor="ctr"/>
-          <a:lstStyle/>
-          <a:p>
-            <a:pPr algn="ctr"/>
-          </a:p>
-        </p:txBody>
-      </p:sp>
-      <p:sp>
-        <p:nvSpPr>
-          <p:cNvPr id="10" name="TextBox 9"/>
-          <p:cNvSpPr txBox="1"/>
-          <p:nvPr/>
-        </p:nvSpPr>
-        <p:spPr>
-          <a:xfrm>
-            <a:off x="8595360" y="1783080"/>
-            <a:ext cx="3383280" cy="2011680"/>
-          </a:xfrm>
-          <a:prstGeom prst="rect">
-            <a:avLst/>
-          </a:prstGeom>
-          <a:noFill/>
-        </p:spPr>
-        <p:txBody>
-          <a:bodyPr wrap="square" lIns="45720" rIns="45720" tIns="18288" bIns="18288" anchor="t">
-            <a:spAutoFit/>
-          </a:bodyPr>
-          <a:lstStyle/>
-          <a:p>
-            <a:pPr algn="l"/>
-            <a:r>
-              <a:rPr sz="1300" b="0" i="0">
-                <a:solidFill>
-                  <a:srgbClr val="212121"/>
-                </a:solidFill>
-                <a:latin typeface="Segoe UI"/>
-              </a:rPr>
-              <a:t>Use if asked how the router decides which questions to escalate.</a:t>
-            </a:r>
-          </a:p>
-        </p:txBody>
-      </p:sp>
-      <p:sp>
-        <p:nvSpPr>
-          <p:cNvPr id="11" name="Rectangle 10"/>
-          <p:cNvSpPr/>
-          <p:nvPr/>
-        </p:nvSpPr>
-        <p:spPr>
-          <a:xfrm>
-            <a:off x="8595360" y="4023360"/>
-            <a:ext cx="3383280" cy="2286000"/>
-          </a:xfrm>
-          <a:prstGeom prst="rect">
-            <a:avLst/>
-          </a:prstGeom>
-          <a:solidFill>
-            <a:srgbClr val="EBF4FF"/>
-          </a:solidFill>
-          <a:ln w="9525">
-            <a:solidFill>
-              <a:srgbClr val="0078D4"/>
-            </a:solidFill>
-          </a:ln>
-          <a:effectLst/>
-        </p:spPr>
-        <p:style>
-          <a:lnRef idx="1">
-            <a:schemeClr val="accent1"/>
-          </a:lnRef>
-          <a:fillRef idx="3">
-            <a:schemeClr val="accent1"/>
-          </a:fillRef>
-          <a:effectRef idx="2">
-            <a:schemeClr val="accent1"/>
-          </a:effectRef>
-          <a:fontRef idx="minor">
-            <a:schemeClr val="lt1"/>
-          </a:fontRef>
-        </p:style>
-        <p:txBody>
-          <a:bodyPr rtlCol="0" anchor="ctr"/>
-          <a:lstStyle/>
-          <a:p>
-            <a:pPr algn="ctr"/>
-          </a:p>
-        </p:txBody>
-      </p:sp>
-      <p:sp>
-        <p:nvSpPr>
-          <p:cNvPr id="12" name="Rectangle 11"/>
-          <p:cNvSpPr/>
-          <p:nvPr/>
-        </p:nvSpPr>
-        <p:spPr>
-          <a:xfrm>
-            <a:off x="8595360" y="4023360"/>
-            <a:ext cx="73152" cy="2286000"/>
-          </a:xfrm>
-          <a:prstGeom prst="rect">
-            <a:avLst/>
-          </a:prstGeom>
-          <a:solidFill>
-            <a:srgbClr val="0078D4"/>
-          </a:solidFill>
-          <a:ln>
-            <a:noFill/>
-          </a:ln>
-          <a:effectLst/>
-        </p:spPr>
-        <p:style>
-          <a:lnRef idx="1">
-            <a:schemeClr val="accent1"/>
-          </a:lnRef>
-          <a:fillRef idx="3">
-            <a:schemeClr val="accent1"/>
-          </a:fillRef>
-          <a:effectRef idx="2">
-            <a:schemeClr val="accent1"/>
-          </a:effectRef>
-          <a:fontRef idx="minor">
-            <a:schemeClr val="lt1"/>
-          </a:fontRef>
-        </p:style>
-        <p:txBody>
-          <a:bodyPr rtlCol="0" anchor="ctr"/>
-          <a:lstStyle/>
-          <a:p>
-            <a:pPr algn="ctr"/>
-          </a:p>
-        </p:txBody>
-      </p:sp>
-      <p:sp>
-        <p:nvSpPr>
-          <p:cNvPr id="13" name="TextBox 12"/>
-          <p:cNvSpPr txBox="1"/>
-          <p:nvPr/>
-        </p:nvSpPr>
-        <p:spPr>
-          <a:xfrm>
-            <a:off x="8759952" y="4069080"/>
-            <a:ext cx="3154680" cy="2194560"/>
-          </a:xfrm>
-          <a:prstGeom prst="rect">
-            <a:avLst/>
-          </a:prstGeom>
-          <a:noFill/>
-        </p:spPr>
-        <p:txBody>
-          <a:bodyPr wrap="square" anchor="ctr" lIns="45720" rIns="45720">
-            <a:spAutoFit/>
-          </a:bodyPr>
-          <a:lstStyle/>
-          <a:p>
-            <a:pPr algn="l"/>
-            <a:r>
-              <a:rPr sz="1200" b="0" i="0">
-                <a:solidFill>
-                  <a:srgbClr val="212121"/>
-                </a:solidFill>
-                <a:latin typeface="Segoe UI"/>
-              </a:rPr>
-              <a:t>Coding tasks are almost never escalated; GPQA gets 40%+ escalation rate.</a:t>
-            </a:r>
-          </a:p>
-        </p:txBody>
-      </p:sp>
-    </p:spTree>
-  </p:cSld>
-  <p:clrMapOvr>
-    <a:masterClrMapping/>
-  </p:clrMapOvr>
-  <p:timing>
-    <p:tnLst>
-      <p:par>
-        <p:cTn id="1" dur="indefinite" restart="never" nodeType="tmRoot">
-          <p:childTnLst>
-            <p:seq concurrent="1" nextAc="seek">
-              <p:cTn id="2" dur="indefinite" nodeType="mainSeq">
-                <p:childTnLst>
-                  <p:par>
-                    <p:cTn id="100" fill="hold">
-                      <p:stCondLst>
-                        <p:cond delay="indefinite"/>
-                      </p:stCondLst>
-                      <p:childTnLst>
-                        <p:par>
-                          <p:cTn id="101" fill="hold">
-                            <p:stCondLst>
-                              <p:cond delay="0"/>
-                            </p:stCondLst>
-                            <p:childTnLst>
-                              <p:par>
-                                <p:cTn id="110" presetID="10" presetClass="entr" presetSubtype="0" fill="hold" grpId="0" nodeType="clickEffect">
-                                  <p:stCondLst>
-                                    <p:cond delay="0"/>
-                                  </p:stCondLst>
-                                  <p:childTnLst>
-                                    <p:set>
-                                      <p:cBhvr>
-                                        <p:cTn id="111" dur="1" fill="hold">
-                                          <p:stCondLst>
-                                            <p:cond delay="0"/>
-                                          </p:stCondLst>
-                                        </p:cTn>
-                                        <p:tgtEl>
-                                          <p:spTgt spid="7"/>
-                                        </p:tgtEl>
-                                        <p:attrNameLst>
-                                          <p:attrName>style.visibility</p:attrName>
-                                        </p:attrNameLst>
-                                      </p:cBhvr>
-                                      <p:to>
-                                        <p:strVal val="visible"/>
-                                      </p:to>
-                                    </p:set>
-                                    <p:anim calcmode="lin" valueType="num">
-                                      <p:cBhvr additive="base">
-                                        <p:cTn id="112" dur="500" fill="hold"/>
-                                        <p:tgtEl>
-                                          <p:spTgt spid="7"/>
-                                        </p:tgtEl>
-                                        <p:attrNameLst>
-                                          <p:attrName>style.opacity</p:attrName>
-                                        </p:attrNameLst>
-                                      </p:cBhvr>
-                                      <p:tavLst>
-                                        <p:tav tm="0">
-                                          <p:val>
-                                            <p:fltVal val="0"/>
-                                          </p:val>
-                                        </p:tav>
-                                        <p:tav tm="100000">
-                                          <p:val>
-                                            <p:fltVal val="1"/>
-                                          </p:val>
-                                        </p:tav>
-                                      </p:tavLst>
-                                    </p:anim>
-                                  </p:childTnLst>
-                                </p:cTn>
-                              </p:par>
-                            </p:childTnLst>
-                          </p:cTn>
-                        </p:par>
-                      </p:childTnLst>
-                    </p:cTn>
-                  </p:par>
-                  <p:par>
-                    <p:cTn id="1100" fill="hold">
-                      <p:stCondLst>
-                        <p:cond delay="indefinite"/>
-                      </p:stCondLst>
-                      <p:childTnLst>
-                        <p:par>
-                          <p:cTn id="1101" fill="hold">
-                            <p:stCondLst>
-                              <p:cond delay="0"/>
-                            </p:stCondLst>
-                            <p:childTnLst>
-                              <p:par>
-                                <p:cTn id="1110" presetID="10" presetClass="entr" presetSubtype="0" fill="hold" grpId="0" nodeType="clickEffect">
-                                  <p:stCondLst>
-                                    <p:cond delay="0"/>
-                                  </p:stCondLst>
-                                  <p:childTnLst>
-                                    <p:set>
-                                      <p:cBhvr>
-                                        <p:cTn id="1111" dur="1" fill="hold">
-                                          <p:stCondLst>
-                                            <p:cond delay="0"/>
-                                          </p:stCondLst>
-                                        </p:cTn>
-                                        <p:tgtEl>
-                                          <p:spTgt spid="8"/>
-                                        </p:tgtEl>
-                                        <p:attrNameLst>
-                                          <p:attrName>style.visibility</p:attrName>
-                                        </p:attrNameLst>
-                                      </p:cBhvr>
-                                      <p:to>
-                                        <p:strVal val="visible"/>
-                                      </p:to>
-                                    </p:set>
-                                    <p:anim calcmode="lin" valueType="num">
-                                      <p:cBhvr additive="base">
-                                        <p:cTn id="1112" dur="500" fill="hold"/>
-                                        <p:tgtEl>
-                                          <p:spTgt spid="8"/>
-                                        </p:tgtEl>
-                                        <p:attrNameLst>
-                                          <p:attrName>style.opacity</p:attrName>
-                                        </p:attrNameLst>
-                                      </p:cBhvr>
-                                      <p:tavLst>
-                                        <p:tav tm="0">
-                                          <p:val>
-                                            <p:fltVal val="0"/>
-                                          </p:val>
-                                        </p:tav>
-                                        <p:tav tm="100000">
-                                          <p:val>
-                                            <p:fltVal val="1"/>
-                                          </p:val>
-                                        </p:tav>
-                                      </p:tavLst>
-                                    </p:anim>
-                                  </p:childTnLst>
-                                </p:cTn>
-                              </p:par>
-                              <p:par>
-                                <p:cTn id="1116" presetID="10" presetClass="entr" presetSubtype="0" fill="hold" grpId="0" nodeType="withEffect">
-                                  <p:stCondLst>
-                                    <p:cond delay="0"/>
-                                  </p:stCondLst>
-                                  <p:childTnLst>
-                                    <p:set>
-                                      <p:cBhvr>
-                                        <p:cTn id="1117" dur="1" fill="hold">
-                                          <p:stCondLst>
-                                            <p:cond delay="0"/>
-                                          </p:stCondLst>
-                                        </p:cTn>
-                                        <p:tgtEl>
-                                          <p:spTgt spid="9"/>
-                                        </p:tgtEl>
-                                        <p:attrNameLst>
-                                          <p:attrName>style.visibility</p:attrName>
-                                        </p:attrNameLst>
-                                      </p:cBhvr>
-                                      <p:to>
-                                        <p:strVal val="visible"/>
-                                      </p:to>
-                                    </p:set>
-                                    <p:anim calcmode="lin" valueType="num">
-                                      <p:cBhvr additive="base">
-                                        <p:cTn id="1118" dur="500" fill="hold"/>
-                                        <p:tgtEl>
-                                          <p:spTgt spid="9"/>
-                                        </p:tgtEl>
-                                        <p:attrNameLst>
-                                          <p:attrName>style.opacity</p:attrName>
-                                        </p:attrNameLst>
-                                      </p:cBhvr>
-                                      <p:tavLst>
-                                        <p:tav tm="0">
-                                          <p:val>
-                                            <p:fltVal val="0"/>
-                                          </p:val>
-                                        </p:tav>
-                                        <p:tav tm="100000">
-                                          <p:val>
-                                            <p:fltVal val="1"/>
-                                          </p:val>
-                                        </p:tav>
-                                      </p:tavLst>
-                                    </p:anim>
-                                  </p:childTnLst>
-                                </p:cTn>
-                              </p:par>
-                              <p:par>
-                                <p:cTn id="1122" presetID="10" presetClass="entr" presetSubtype="0" fill="hold" grpId="0" nodeType="withEffect">
-                                  <p:stCondLst>
-                                    <p:cond delay="0"/>
-                                  </p:stCondLst>
-                                  <p:childTnLst>
-                                    <p:set>
-                                      <p:cBhvr>
-                                        <p:cTn id="1123" dur="1" fill="hold">
-                                          <p:stCondLst>
-                                            <p:cond delay="0"/>
-                                          </p:stCondLst>
-                                        </p:cTn>
-                                        <p:tgtEl>
-                                          <p:spTgt spid="10"/>
-                                        </p:tgtEl>
-                                        <p:attrNameLst>
-                                          <p:attrName>style.visibility</p:attrName>
-                                        </p:attrNameLst>
-                                      </p:cBhvr>
-                                      <p:to>
-                                        <p:strVal val="visible"/>
-                                      </p:to>
-                                    </p:set>
-                                    <p:anim calcmode="lin" valueType="num">
-                                      <p:cBhvr additive="base">
-                                        <p:cTn id="1124" dur="500" fill="hold"/>
-                                        <p:tgtEl>
-                                          <p:spTgt spid="10"/>
-                                        </p:tgtEl>
-                                        <p:attrNameLst>
-                                          <p:attrName>style.opacity</p:attrName>
-                                        </p:attrNameLst>
-                                      </p:cBhvr>
-                                      <p:tavLst>
-                                        <p:tav tm="0">
-                                          <p:val>
-                                            <p:fltVal val="0"/>
-                                          </p:val>
-                                        </p:tav>
-                                        <p:tav tm="100000">
-                                          <p:val>
-                                            <p:fltVal val="1"/>
-                                          </p:val>
-                                        </p:tav>
-                                      </p:tavLst>
-                                    </p:anim>
-                                  </p:childTnLst>
-                                </p:cTn>
-                              </p:par>
-                            </p:childTnLst>
-                          </p:cTn>
-                        </p:par>
-                      </p:childTnLst>
-                    </p:cTn>
-                  </p:par>
-                  <p:par>
-                    <p:cTn id="2100" fill="hold">
-                      <p:stCondLst>
-                        <p:cond delay="indefinite"/>
-                      </p:stCondLst>
-                      <p:childTnLst>
-                        <p:par>
-                          <p:cTn id="2101" fill="hold">
-                            <p:stCondLst>
-                              <p:cond delay="0"/>
-                            </p:stCondLst>
-                            <p:childTnLst>
-                              <p:par>
-                                <p:cTn id="2110" presetID="10" presetClass="entr" presetSubtype="0" fill="hold" grpId="0" nodeType="clickEffect">
-                                  <p:stCondLst>
-                                    <p:cond delay="0"/>
-                                  </p:stCondLst>
-                                  <p:childTnLst>
-                                    <p:set>
-                                      <p:cBhvr>
-                                        <p:cTn id="2111" dur="1" fill="hold">
-                                          <p:stCondLst>
-                                            <p:cond delay="0"/>
-                                          </p:stCondLst>
-                                        </p:cTn>
-                                        <p:tgtEl>
-                                          <p:spTgt spid="11"/>
-                                        </p:tgtEl>
-                                        <p:attrNameLst>
-                                          <p:attrName>style.visibility</p:attrName>
-                                        </p:attrNameLst>
-                                      </p:cBhvr>
-                                      <p:to>
-                                        <p:strVal val="visible"/>
-                                      </p:to>
-                                    </p:set>
-                                    <p:anim calcmode="lin" valueType="num">
-                                      <p:cBhvr additive="base">
-                                        <p:cTn id="2112" dur="500" fill="hold"/>
-                                        <p:tgtEl>
-                                          <p:spTgt spid="11"/>
-                                        </p:tgtEl>
-                                        <p:attrNameLst>
-                                          <p:attrName>style.opacity</p:attrName>
-                                        </p:attrNameLst>
-                                      </p:cBhvr>
-                                      <p:tavLst>
-                                        <p:tav tm="0">
-                                          <p:val>
-                                            <p:fltVal val="0"/>
-                                          </p:val>
-                                        </p:tav>
-                                        <p:tav tm="100000">
-                                          <p:val>
-                                            <p:fltVal val="1"/>
-                                          </p:val>
-                                        </p:tav>
-                                      </p:tavLst>
-                                    </p:anim>
-                                  </p:childTnLst>
-                                </p:cTn>
-                              </p:par>
-                              <p:par>
-                                <p:cTn id="2116" presetID="10" presetClass="entr" presetSubtype="0" fill="hold" grpId="0" nodeType="withEffect">
-                                  <p:stCondLst>
-                                    <p:cond delay="0"/>
-                                  </p:stCondLst>
-                                  <p:childTnLst>
-                                    <p:set>
-                                      <p:cBhvr>
-                                        <p:cTn id="2117" dur="1" fill="hold">
-                                          <p:stCondLst>
-                                            <p:cond delay="0"/>
-                                          </p:stCondLst>
-                                        </p:cTn>
-                                        <p:tgtEl>
-                                          <p:spTgt spid="12"/>
-                                        </p:tgtEl>
-                                        <p:attrNameLst>
-                                          <p:attrName>style.visibility</p:attrName>
-                                        </p:attrNameLst>
-                                      </p:cBhvr>
-                                      <p:to>
-                                        <p:strVal val="visible"/>
-                                      </p:to>
-                                    </p:set>
-                                    <p:anim calcmode="lin" valueType="num">
-                                      <p:cBhvr additive="base">
-                                        <p:cTn id="2118" dur="500" fill="hold"/>
-                                        <p:tgtEl>
-                                          <p:spTgt spid="12"/>
-                                        </p:tgtEl>
-                                        <p:attrNameLst>
-                                          <p:attrName>style.opacity</p:attrName>
-                                        </p:attrNameLst>
-                                      </p:cBhvr>
-                                      <p:tavLst>
-                                        <p:tav tm="0">
-                                          <p:val>
-                                            <p:fltVal val="0"/>
-                                          </p:val>
-                                        </p:tav>
-                                        <p:tav tm="100000">
-                                          <p:val>
-                                            <p:fltVal val="1"/>
-                                          </p:val>
-                                        </p:tav>
-                                      </p:tavLst>
-                                    </p:anim>
-                                  </p:childTnLst>
-                                </p:cTn>
-                              </p:par>
-                              <p:par>
-                                <p:cTn id="2122" presetID="10" presetClass="entr" presetSubtype="0" fill="hold" grpId="0" nodeType="withEffect">
-                                  <p:stCondLst>
-                                    <p:cond delay="0"/>
-                                  </p:stCondLst>
-                                  <p:childTnLst>
-                                    <p:set>
-                                      <p:cBhvr>
-                                        <p:cTn id="2123" dur="1" fill="hold">
-                                          <p:stCondLst>
-                                            <p:cond delay="0"/>
-                                          </p:stCondLst>
-                                        </p:cTn>
-                                        <p:tgtEl>
-                                          <p:spTgt spid="13"/>
-                                        </p:tgtEl>
-                                        <p:attrNameLst>
-                                          <p:attrName>style.visibility</p:attrName>
-                                        </p:attrNameLst>
-                                      </p:cBhvr>
-                                      <p:to>
-                                        <p:strVal val="visible"/>
-                                      </p:to>
-                                    </p:set>
-                                    <p:anim calcmode="lin" valueType="num">
-                                      <p:cBhvr additive="base">
-                                        <p:cTn id="2124" dur="500" fill="hold"/>
-                                        <p:tgtEl>
-                                          <p:spTgt spid="13"/>
-                                        </p:tgtEl>
-                                        <p:attrNameLst>
-                                          <p:attrName>style.opacity</p:attrName>
-                                        </p:attrNameLst>
-                                      </p:cBhvr>
-                                      <p:tavLst>
-                                        <p:tav tm="0">
-                                          <p:val>
-                                            <p:fltVal val="0"/>
-                                          </p:val>
-                                        </p:tav>
-                                        <p:tav tm="100000">
-                                          <p:val>
-                                            <p:fltVal val="1"/>
-                                          </p:val>
-                                        </p:tav>
-                                      </p:tavLst>
-                                    </p:anim>
-                                  </p:childTnLst>
-                                </p:cTn>
-                              </p:par>
-                            </p:childTnLst>
-                          </p:cTn>
-                        </p:par>
-                      </p:childTnLst>
-                    </p:cTn>
-                  </p:par>
-                </p:childTnLst>
-              </p:cTn>
-              <p:prevCondLst>
-                <p:cond evt="onPrev" delay="0">
-                  <p:tgtEl>
-                    <p:sldTgt/>
-                  </p:tgtEl>
-                </p:cond>
-              </p:prevCondLst>
-              <p:nextCondLst>
-                <p:cond evt="onNext" delay="0">
-                  <p:tgtEl>
-                    <p:sldTgt/>
-                  </p:tgtEl>
-                </p:cond>
-              </p:nextCondLst>
-            </p:seq>
-          </p:childTnLst>
-        </p:cTn>
-      </p:par>
-    </p:tnLst>
-    <p:bldLst>
-      <p:bldP spid="7" grpId="0"/>
-      <p:bldP spid="8" grpId="0"/>
-      <p:bldP spid="9" grpId="0"/>
-      <p:bldP spid="10" grpId="0"/>
-      <p:bldP spid="11" grpId="0"/>
-      <p:bldP spid="12" grpId="0"/>
-      <p:bldP spid="13" grpId="0"/>
     </p:bldLst>
   </p:timing>
 </p:sld>
@@ -16916,7 +18823,7 @@
                 </a:solidFill>
                 <a:latin typeface="Segoe UI"/>
               </a:rPr>
-              <a:t>2 / 15</a:t>
+              <a:t>2 / 16</a:t>
             </a:r>
           </a:p>
         </p:txBody>
@@ -17661,9 +19568,31 @@
                 </a:solidFill>
                 <a:latin typeface="Segoe UI"/>
               </a:rPr>
-              <a:t>In the cloud, “best model” ≠ “strongest model”.
-A model at 93% accuracy that costs 770× more per request may be the wrong enterprise choice.
-Accuracy, cost, and latency must all be evaluated together.</a:t>
+              <a:t>In the cloud, “best model” ≠ “strongest model”.</a:t>
+            </a:r>
+          </a:p>
+          <a:p>
+            <a:pPr algn="l"/>
+            <a:r>
+              <a:rPr sz="1600" b="0" i="0">
+                <a:solidFill>
+                  <a:srgbClr val="212121"/>
+                </a:solidFill>
+                <a:latin typeface="Segoe UI"/>
+              </a:rPr>
+              <a:t>A top-accuracy model that costs ~20× more per request than the next-best may be the wrong enterprise choice.</a:t>
+            </a:r>
+          </a:p>
+          <a:p>
+            <a:pPr algn="l"/>
+            <a:r>
+              <a:rPr sz="1600" b="0" i="0">
+                <a:solidFill>
+                  <a:srgbClr val="212121"/>
+                </a:solidFill>
+                <a:latin typeface="Segoe UI"/>
+              </a:rPr>
+              <a:t>Accuracy, cost, and latency must all be evaluated together.</a:t>
             </a:r>
           </a:p>
         </p:txBody>
@@ -18870,6 +20799,1929 @@
                 </a:solidFill>
                 <a:latin typeface="Segoe UI"/>
               </a:rPr>
+              <a:t>Self-Consistency Decision Map</a:t>
+            </a:r>
+          </a:p>
+        </p:txBody>
+      </p:sp>
+      <p:sp>
+        <p:nvSpPr>
+          <p:cNvPr id="6" name="TextBox 5"/>
+          <p:cNvSpPr txBox="1"/>
+          <p:nvPr/>
+        </p:nvSpPr>
+        <p:spPr>
+          <a:xfrm>
+            <a:off x="457200" y="6446520"/>
+            <a:ext cx="5486400" cy="320040"/>
+          </a:xfrm>
+          <a:prstGeom prst="rect">
+            <a:avLst/>
+          </a:prstGeom>
+          <a:noFill/>
+        </p:spPr>
+        <p:txBody>
+          <a:bodyPr wrap="square" lIns="45720" rIns="45720" tIns="18288" bIns="18288" anchor="t">
+            <a:spAutoFit/>
+          </a:bodyPr>
+          <a:lstStyle/>
+          <a:p>
+            <a:pPr algn="l"/>
+            <a:r>
+              <a:rPr sz="1100" b="0" i="1">
+                <a:solidFill>
+                  <a:srgbClr val="605E5C"/>
+                </a:solidFill>
+                <a:latin typeface="Segoe UI"/>
+              </a:rPr>
+              <a:t>BACKUP  •  B2</a:t>
+            </a:r>
+          </a:p>
+        </p:txBody>
+      </p:sp>
+      <p:pic>
+        <p:nvPicPr>
+          <p:cNvPr id="7" name="Picture 6" descr="chartSC3_selfcons_best_config_heatmap.png"/>
+          <p:cNvPicPr>
+            <a:picLocks noChangeAspect="1"/>
+          </p:cNvPicPr>
+          <p:nvPr/>
+        </p:nvPicPr>
+        <p:blipFill>
+          <a:blip r:embed="rId2"/>
+          <a:stretch>
+            <a:fillRect/>
+          </a:stretch>
+        </p:blipFill>
+        <p:spPr>
+          <a:xfrm>
+            <a:off x="457200" y="1687590"/>
+            <a:ext cx="7955279" cy="4214340"/>
+          </a:xfrm>
+          <a:prstGeom prst="rect">
+            <a:avLst/>
+          </a:prstGeom>
+        </p:spPr>
+      </p:pic>
+      <p:sp>
+        <p:nvSpPr>
+          <p:cNvPr id="8" name="Rectangle 7"/>
+          <p:cNvSpPr/>
+          <p:nvPr/>
+        </p:nvSpPr>
+        <p:spPr>
+          <a:xfrm>
+            <a:off x="8595360" y="1188720"/>
+            <a:ext cx="3383280" cy="5120640"/>
+          </a:xfrm>
+          <a:prstGeom prst="rect">
+            <a:avLst/>
+          </a:prstGeom>
+          <a:solidFill>
+            <a:srgbClr val="EBF4FF"/>
+          </a:solidFill>
+          <a:ln w="9525">
+            <a:solidFill>
+              <a:srgbClr val="0078D4"/>
+            </a:solidFill>
+          </a:ln>
+          <a:effectLst/>
+        </p:spPr>
+        <p:style>
+          <a:lnRef idx="1">
+            <a:schemeClr val="accent1"/>
+          </a:lnRef>
+          <a:fillRef idx="3">
+            <a:schemeClr val="accent1"/>
+          </a:fillRef>
+          <a:effectRef idx="2">
+            <a:schemeClr val="accent1"/>
+          </a:effectRef>
+          <a:fontRef idx="minor">
+            <a:schemeClr val="lt1"/>
+          </a:fontRef>
+        </p:style>
+        <p:txBody>
+          <a:bodyPr rtlCol="0" anchor="ctr"/>
+          <a:lstStyle/>
+          <a:p>
+            <a:pPr algn="ctr"/>
+          </a:p>
+        </p:txBody>
+      </p:sp>
+      <p:sp>
+        <p:nvSpPr>
+          <p:cNvPr id="9" name="Rectangle 8"/>
+          <p:cNvSpPr/>
+          <p:nvPr/>
+        </p:nvSpPr>
+        <p:spPr>
+          <a:xfrm>
+            <a:off x="8595360" y="1188720"/>
+            <a:ext cx="73152" cy="5120640"/>
+          </a:xfrm>
+          <a:prstGeom prst="rect">
+            <a:avLst/>
+          </a:prstGeom>
+          <a:solidFill>
+            <a:srgbClr val="0078D4"/>
+          </a:solidFill>
+          <a:ln>
+            <a:noFill/>
+          </a:ln>
+          <a:effectLst/>
+        </p:spPr>
+        <p:style>
+          <a:lnRef idx="1">
+            <a:schemeClr val="accent1"/>
+          </a:lnRef>
+          <a:fillRef idx="3">
+            <a:schemeClr val="accent1"/>
+          </a:fillRef>
+          <a:effectRef idx="2">
+            <a:schemeClr val="accent1"/>
+          </a:effectRef>
+          <a:fontRef idx="minor">
+            <a:schemeClr val="lt1"/>
+          </a:fontRef>
+        </p:style>
+        <p:txBody>
+          <a:bodyPr rtlCol="0" anchor="ctr"/>
+          <a:lstStyle/>
+          <a:p>
+            <a:pPr algn="ctr"/>
+          </a:p>
+        </p:txBody>
+      </p:sp>
+      <p:sp>
+        <p:nvSpPr>
+          <p:cNvPr id="10" name="TextBox 9"/>
+          <p:cNvSpPr txBox="1"/>
+          <p:nvPr/>
+        </p:nvSpPr>
+        <p:spPr>
+          <a:xfrm>
+            <a:off x="8759952" y="1234440"/>
+            <a:ext cx="3154680" cy="5029200"/>
+          </a:xfrm>
+          <a:prstGeom prst="rect">
+            <a:avLst/>
+          </a:prstGeom>
+          <a:noFill/>
+        </p:spPr>
+        <p:txBody>
+          <a:bodyPr wrap="square" anchor="ctr" lIns="45720" rIns="45720">
+            <a:spAutoFit/>
+          </a:bodyPr>
+          <a:lstStyle/>
+          <a:p>
+            <a:pPr algn="l"/>
+            <a:r>
+              <a:rPr sz="1300" b="0" i="0">
+                <a:solidFill>
+                  <a:srgbClr val="212121"/>
+                </a:solidFill>
+                <a:latin typeface="Segoe UI"/>
+              </a:rPr>
+              <a:t>gpt-4.1-mini N=3 dominates the upper-left (latency-tolerant, accuracy-important) region.</a:t>
+            </a:r>
+          </a:p>
+        </p:txBody>
+      </p:sp>
+    </p:spTree>
+  </p:cSld>
+  <p:clrMapOvr>
+    <a:masterClrMapping/>
+  </p:clrMapOvr>
+  <p:timing>
+    <p:tnLst>
+      <p:par>
+        <p:cTn id="1" dur="indefinite" restart="never" nodeType="tmRoot">
+          <p:childTnLst>
+            <p:seq concurrent="1" nextAc="seek">
+              <p:cTn id="2" dur="indefinite" nodeType="mainSeq">
+                <p:childTnLst>
+                  <p:par>
+                    <p:cTn id="100" fill="hold">
+                      <p:stCondLst>
+                        <p:cond delay="indefinite"/>
+                      </p:stCondLst>
+                      <p:childTnLst>
+                        <p:par>
+                          <p:cTn id="101" fill="hold">
+                            <p:stCondLst>
+                              <p:cond delay="0"/>
+                            </p:stCondLst>
+                            <p:childTnLst>
+                              <p:par>
+                                <p:cTn id="110" presetID="10" presetClass="entr" presetSubtype="0" fill="hold" grpId="0" nodeType="clickEffect">
+                                  <p:stCondLst>
+                                    <p:cond delay="0"/>
+                                  </p:stCondLst>
+                                  <p:childTnLst>
+                                    <p:set>
+                                      <p:cBhvr>
+                                        <p:cTn id="111" dur="1" fill="hold">
+                                          <p:stCondLst>
+                                            <p:cond delay="0"/>
+                                          </p:stCondLst>
+                                        </p:cTn>
+                                        <p:tgtEl>
+                                          <p:spTgt spid="7"/>
+                                        </p:tgtEl>
+                                        <p:attrNameLst>
+                                          <p:attrName>style.visibility</p:attrName>
+                                        </p:attrNameLst>
+                                      </p:cBhvr>
+                                      <p:to>
+                                        <p:strVal val="visible"/>
+                                      </p:to>
+                                    </p:set>
+                                    <p:anim calcmode="lin" valueType="num">
+                                      <p:cBhvr additive="base">
+                                        <p:cTn id="112" dur="500" fill="hold"/>
+                                        <p:tgtEl>
+                                          <p:spTgt spid="7"/>
+                                        </p:tgtEl>
+                                        <p:attrNameLst>
+                                          <p:attrName>style.opacity</p:attrName>
+                                        </p:attrNameLst>
+                                      </p:cBhvr>
+                                      <p:tavLst>
+                                        <p:tav tm="0">
+                                          <p:val>
+                                            <p:fltVal val="0"/>
+                                          </p:val>
+                                        </p:tav>
+                                        <p:tav tm="100000">
+                                          <p:val>
+                                            <p:fltVal val="1"/>
+                                          </p:val>
+                                        </p:tav>
+                                      </p:tavLst>
+                                    </p:anim>
+                                  </p:childTnLst>
+                                </p:cTn>
+                              </p:par>
+                            </p:childTnLst>
+                          </p:cTn>
+                        </p:par>
+                      </p:childTnLst>
+                    </p:cTn>
+                  </p:par>
+                  <p:par>
+                    <p:cTn id="1100" fill="hold">
+                      <p:stCondLst>
+                        <p:cond delay="indefinite"/>
+                      </p:stCondLst>
+                      <p:childTnLst>
+                        <p:par>
+                          <p:cTn id="1101" fill="hold">
+                            <p:stCondLst>
+                              <p:cond delay="0"/>
+                            </p:stCondLst>
+                            <p:childTnLst>
+                              <p:par>
+                                <p:cTn id="1110" presetID="10" presetClass="entr" presetSubtype="0" fill="hold" grpId="0" nodeType="clickEffect">
+                                  <p:stCondLst>
+                                    <p:cond delay="0"/>
+                                  </p:stCondLst>
+                                  <p:childTnLst>
+                                    <p:set>
+                                      <p:cBhvr>
+                                        <p:cTn id="1111" dur="1" fill="hold">
+                                          <p:stCondLst>
+                                            <p:cond delay="0"/>
+                                          </p:stCondLst>
+                                        </p:cTn>
+                                        <p:tgtEl>
+                                          <p:spTgt spid="8"/>
+                                        </p:tgtEl>
+                                        <p:attrNameLst>
+                                          <p:attrName>style.visibility</p:attrName>
+                                        </p:attrNameLst>
+                                      </p:cBhvr>
+                                      <p:to>
+                                        <p:strVal val="visible"/>
+                                      </p:to>
+                                    </p:set>
+                                    <p:anim calcmode="lin" valueType="num">
+                                      <p:cBhvr additive="base">
+                                        <p:cTn id="1112" dur="500" fill="hold"/>
+                                        <p:tgtEl>
+                                          <p:spTgt spid="8"/>
+                                        </p:tgtEl>
+                                        <p:attrNameLst>
+                                          <p:attrName>style.opacity</p:attrName>
+                                        </p:attrNameLst>
+                                      </p:cBhvr>
+                                      <p:tavLst>
+                                        <p:tav tm="0">
+                                          <p:val>
+                                            <p:fltVal val="0"/>
+                                          </p:val>
+                                        </p:tav>
+                                        <p:tav tm="100000">
+                                          <p:val>
+                                            <p:fltVal val="1"/>
+                                          </p:val>
+                                        </p:tav>
+                                      </p:tavLst>
+                                    </p:anim>
+                                  </p:childTnLst>
+                                </p:cTn>
+                              </p:par>
+                              <p:par>
+                                <p:cTn id="1116" presetID="10" presetClass="entr" presetSubtype="0" fill="hold" grpId="0" nodeType="withEffect">
+                                  <p:stCondLst>
+                                    <p:cond delay="0"/>
+                                  </p:stCondLst>
+                                  <p:childTnLst>
+                                    <p:set>
+                                      <p:cBhvr>
+                                        <p:cTn id="1117" dur="1" fill="hold">
+                                          <p:stCondLst>
+                                            <p:cond delay="0"/>
+                                          </p:stCondLst>
+                                        </p:cTn>
+                                        <p:tgtEl>
+                                          <p:spTgt spid="9"/>
+                                        </p:tgtEl>
+                                        <p:attrNameLst>
+                                          <p:attrName>style.visibility</p:attrName>
+                                        </p:attrNameLst>
+                                      </p:cBhvr>
+                                      <p:to>
+                                        <p:strVal val="visible"/>
+                                      </p:to>
+                                    </p:set>
+                                    <p:anim calcmode="lin" valueType="num">
+                                      <p:cBhvr additive="base">
+                                        <p:cTn id="1118" dur="500" fill="hold"/>
+                                        <p:tgtEl>
+                                          <p:spTgt spid="9"/>
+                                        </p:tgtEl>
+                                        <p:attrNameLst>
+                                          <p:attrName>style.opacity</p:attrName>
+                                        </p:attrNameLst>
+                                      </p:cBhvr>
+                                      <p:tavLst>
+                                        <p:tav tm="0">
+                                          <p:val>
+                                            <p:fltVal val="0"/>
+                                          </p:val>
+                                        </p:tav>
+                                        <p:tav tm="100000">
+                                          <p:val>
+                                            <p:fltVal val="1"/>
+                                          </p:val>
+                                        </p:tav>
+                                      </p:tavLst>
+                                    </p:anim>
+                                  </p:childTnLst>
+                                </p:cTn>
+                              </p:par>
+                              <p:par>
+                                <p:cTn id="1122" presetID="10" presetClass="entr" presetSubtype="0" fill="hold" grpId="0" nodeType="withEffect">
+                                  <p:stCondLst>
+                                    <p:cond delay="0"/>
+                                  </p:stCondLst>
+                                  <p:childTnLst>
+                                    <p:set>
+                                      <p:cBhvr>
+                                        <p:cTn id="1123" dur="1" fill="hold">
+                                          <p:stCondLst>
+                                            <p:cond delay="0"/>
+                                          </p:stCondLst>
+                                        </p:cTn>
+                                        <p:tgtEl>
+                                          <p:spTgt spid="10"/>
+                                        </p:tgtEl>
+                                        <p:attrNameLst>
+                                          <p:attrName>style.visibility</p:attrName>
+                                        </p:attrNameLst>
+                                      </p:cBhvr>
+                                      <p:to>
+                                        <p:strVal val="visible"/>
+                                      </p:to>
+                                    </p:set>
+                                    <p:anim calcmode="lin" valueType="num">
+                                      <p:cBhvr additive="base">
+                                        <p:cTn id="1124" dur="500" fill="hold"/>
+                                        <p:tgtEl>
+                                          <p:spTgt spid="10"/>
+                                        </p:tgtEl>
+                                        <p:attrNameLst>
+                                          <p:attrName>style.opacity</p:attrName>
+                                        </p:attrNameLst>
+                                      </p:cBhvr>
+                                      <p:tavLst>
+                                        <p:tav tm="0">
+                                          <p:val>
+                                            <p:fltVal val="0"/>
+                                          </p:val>
+                                        </p:tav>
+                                        <p:tav tm="100000">
+                                          <p:val>
+                                            <p:fltVal val="1"/>
+                                          </p:val>
+                                        </p:tav>
+                                      </p:tavLst>
+                                    </p:anim>
+                                  </p:childTnLst>
+                                </p:cTn>
+                              </p:par>
+                            </p:childTnLst>
+                          </p:cTn>
+                        </p:par>
+                      </p:childTnLst>
+                    </p:cTn>
+                  </p:par>
+                </p:childTnLst>
+              </p:cTn>
+              <p:prevCondLst>
+                <p:cond evt="onPrev" delay="0">
+                  <p:tgtEl>
+                    <p:sldTgt/>
+                  </p:tgtEl>
+                </p:cond>
+              </p:prevCondLst>
+              <p:nextCondLst>
+                <p:cond evt="onNext" delay="0">
+                  <p:tgtEl>
+                    <p:sldTgt/>
+                  </p:tgtEl>
+                </p:cond>
+              </p:nextCondLst>
+            </p:seq>
+          </p:childTnLst>
+        </p:cTn>
+      </p:par>
+    </p:tnLst>
+    <p:bldLst>
+      <p:bldP spid="7" grpId="0"/>
+      <p:bldP spid="8" grpId="0"/>
+      <p:bldP spid="9" grpId="0"/>
+      <p:bldP spid="10" grpId="0"/>
+    </p:bldLst>
+  </p:timing>
+</p:sld>
+</file>
+
+<file path=ppt/slides/slide21.xml><?xml version="1.0" encoding="utf-8"?>
+<p:sld xmlns:a="http://schemas.openxmlformats.org/drawingml/2006/main" xmlns:p="http://schemas.openxmlformats.org/presentationml/2006/main" xmlns:r="http://schemas.openxmlformats.org/officeDocument/2006/relationships">
+  <p:cSld>
+    <p:spTree>
+      <p:nvGrpSpPr>
+        <p:cNvPr id="1" name=""/>
+        <p:cNvGrpSpPr/>
+        <p:nvPr/>
+      </p:nvGrpSpPr>
+      <p:grpSpPr/>
+      <p:sp>
+        <p:nvSpPr>
+          <p:cNvPr id="2" name="Rectangle 1"/>
+          <p:cNvSpPr/>
+          <p:nvPr/>
+        </p:nvSpPr>
+        <p:spPr>
+          <a:xfrm>
+            <a:off x="0" y="0"/>
+            <a:ext cx="12191695" cy="6858000"/>
+          </a:xfrm>
+          <a:prstGeom prst="rect">
+            <a:avLst/>
+          </a:prstGeom>
+          <a:solidFill>
+            <a:srgbClr val="FFFFFF"/>
+          </a:solidFill>
+          <a:ln>
+            <a:noFill/>
+          </a:ln>
+          <a:effectLst/>
+        </p:spPr>
+        <p:style>
+          <a:lnRef idx="1">
+            <a:schemeClr val="accent1"/>
+          </a:lnRef>
+          <a:fillRef idx="3">
+            <a:schemeClr val="accent1"/>
+          </a:fillRef>
+          <a:effectRef idx="2">
+            <a:schemeClr val="accent1"/>
+          </a:effectRef>
+          <a:fontRef idx="minor">
+            <a:schemeClr val="lt1"/>
+          </a:fontRef>
+        </p:style>
+        <p:txBody>
+          <a:bodyPr rtlCol="0" anchor="ctr"/>
+          <a:lstStyle/>
+          <a:p>
+            <a:pPr algn="ctr"/>
+          </a:p>
+        </p:txBody>
+      </p:sp>
+      <p:sp>
+        <p:nvSpPr>
+          <p:cNvPr id="3" name="Rectangle 2"/>
+          <p:cNvSpPr/>
+          <p:nvPr/>
+        </p:nvSpPr>
+        <p:spPr>
+          <a:xfrm>
+            <a:off x="0" y="0"/>
+            <a:ext cx="12191695" cy="868680"/>
+          </a:xfrm>
+          <a:prstGeom prst="rect">
+            <a:avLst/>
+          </a:prstGeom>
+          <a:solidFill>
+            <a:srgbClr val="0B1F4B"/>
+          </a:solidFill>
+          <a:ln>
+            <a:noFill/>
+          </a:ln>
+          <a:effectLst/>
+        </p:spPr>
+        <p:style>
+          <a:lnRef idx="1">
+            <a:schemeClr val="accent1"/>
+          </a:lnRef>
+          <a:fillRef idx="3">
+            <a:schemeClr val="accent1"/>
+          </a:fillRef>
+          <a:effectRef idx="2">
+            <a:schemeClr val="accent1"/>
+          </a:effectRef>
+          <a:fontRef idx="minor">
+            <a:schemeClr val="lt1"/>
+          </a:fontRef>
+        </p:style>
+        <p:txBody>
+          <a:bodyPr rtlCol="0" anchor="ctr"/>
+          <a:lstStyle/>
+          <a:p>
+            <a:pPr algn="ctr"/>
+          </a:p>
+        </p:txBody>
+      </p:sp>
+      <p:sp>
+        <p:nvSpPr>
+          <p:cNvPr id="4" name="Rectangle 3"/>
+          <p:cNvSpPr/>
+          <p:nvPr/>
+        </p:nvSpPr>
+        <p:spPr>
+          <a:xfrm>
+            <a:off x="0" y="868680"/>
+            <a:ext cx="12191695" cy="54864"/>
+          </a:xfrm>
+          <a:prstGeom prst="rect">
+            <a:avLst/>
+          </a:prstGeom>
+          <a:solidFill>
+            <a:srgbClr val="0078D4"/>
+          </a:solidFill>
+          <a:ln>
+            <a:noFill/>
+          </a:ln>
+          <a:effectLst/>
+        </p:spPr>
+        <p:style>
+          <a:lnRef idx="1">
+            <a:schemeClr val="accent1"/>
+          </a:lnRef>
+          <a:fillRef idx="3">
+            <a:schemeClr val="accent1"/>
+          </a:fillRef>
+          <a:effectRef idx="2">
+            <a:schemeClr val="accent1"/>
+          </a:effectRef>
+          <a:fontRef idx="minor">
+            <a:schemeClr val="lt1"/>
+          </a:fontRef>
+        </p:style>
+        <p:txBody>
+          <a:bodyPr rtlCol="0" anchor="ctr"/>
+          <a:lstStyle/>
+          <a:p>
+            <a:pPr algn="ctr"/>
+          </a:p>
+        </p:txBody>
+      </p:sp>
+      <p:sp>
+        <p:nvSpPr>
+          <p:cNvPr id="5" name="TextBox 4"/>
+          <p:cNvSpPr txBox="1"/>
+          <p:nvPr/>
+        </p:nvSpPr>
+        <p:spPr>
+          <a:xfrm>
+            <a:off x="457200" y="137160"/>
+            <a:ext cx="10058400" cy="640080"/>
+          </a:xfrm>
+          <a:prstGeom prst="rect">
+            <a:avLst/>
+          </a:prstGeom>
+          <a:noFill/>
+        </p:spPr>
+        <p:txBody>
+          <a:bodyPr wrap="square" lIns="45720" rIns="45720" tIns="18288" bIns="18288" anchor="ctr">
+            <a:spAutoFit/>
+          </a:bodyPr>
+          <a:lstStyle/>
+          <a:p>
+            <a:pPr algn="l"/>
+            <a:r>
+              <a:rPr sz="2600" b="1" i="0">
+                <a:solidFill>
+                  <a:srgbClr val="FFFFFF"/>
+                </a:solidFill>
+                <a:latin typeface="Segoe UI"/>
+              </a:rPr>
+              <a:t>Router Detail: Routing Behavior by Dataset</a:t>
+            </a:r>
+          </a:p>
+        </p:txBody>
+      </p:sp>
+      <p:sp>
+        <p:nvSpPr>
+          <p:cNvPr id="6" name="TextBox 5"/>
+          <p:cNvSpPr txBox="1"/>
+          <p:nvPr/>
+        </p:nvSpPr>
+        <p:spPr>
+          <a:xfrm>
+            <a:off x="457200" y="6446520"/>
+            <a:ext cx="5486400" cy="320040"/>
+          </a:xfrm>
+          <a:prstGeom prst="rect">
+            <a:avLst/>
+          </a:prstGeom>
+          <a:noFill/>
+        </p:spPr>
+        <p:txBody>
+          <a:bodyPr wrap="square" lIns="45720" rIns="45720" tIns="18288" bIns="18288" anchor="t">
+            <a:spAutoFit/>
+          </a:bodyPr>
+          <a:lstStyle/>
+          <a:p>
+            <a:pPr algn="l"/>
+            <a:r>
+              <a:rPr sz="1100" b="0" i="1">
+                <a:solidFill>
+                  <a:srgbClr val="605E5C"/>
+                </a:solidFill>
+                <a:latin typeface="Segoe UI"/>
+              </a:rPr>
+              <a:t>BACKUP  •  B3</a:t>
+            </a:r>
+          </a:p>
+        </p:txBody>
+      </p:sp>
+      <p:pic>
+        <p:nvPicPr>
+          <p:cNvPr id="7" name="Picture 6" descr="chartR1_router_overview.png"/>
+          <p:cNvPicPr>
+            <a:picLocks noChangeAspect="1"/>
+          </p:cNvPicPr>
+          <p:nvPr/>
+        </p:nvPicPr>
+        <p:blipFill>
+          <a:blip r:embed="rId2"/>
+          <a:stretch>
+            <a:fillRect/>
+          </a:stretch>
+        </p:blipFill>
+        <p:spPr>
+          <a:xfrm>
+            <a:off x="1350627" y="1188720"/>
+            <a:ext cx="6168424" cy="5212080"/>
+          </a:xfrm>
+          <a:prstGeom prst="rect">
+            <a:avLst/>
+          </a:prstGeom>
+        </p:spPr>
+      </p:pic>
+      <p:sp>
+        <p:nvSpPr>
+          <p:cNvPr id="8" name="Rectangle 7"/>
+          <p:cNvSpPr/>
+          <p:nvPr/>
+        </p:nvSpPr>
+        <p:spPr>
+          <a:xfrm>
+            <a:off x="8595360" y="1188720"/>
+            <a:ext cx="3383280" cy="5120640"/>
+          </a:xfrm>
+          <a:prstGeom prst="rect">
+            <a:avLst/>
+          </a:prstGeom>
+          <a:solidFill>
+            <a:srgbClr val="EBF4FF"/>
+          </a:solidFill>
+          <a:ln w="9525">
+            <a:solidFill>
+              <a:srgbClr val="0078D4"/>
+            </a:solidFill>
+          </a:ln>
+          <a:effectLst/>
+        </p:spPr>
+        <p:style>
+          <a:lnRef idx="1">
+            <a:schemeClr val="accent1"/>
+          </a:lnRef>
+          <a:fillRef idx="3">
+            <a:schemeClr val="accent1"/>
+          </a:fillRef>
+          <a:effectRef idx="2">
+            <a:schemeClr val="accent1"/>
+          </a:effectRef>
+          <a:fontRef idx="minor">
+            <a:schemeClr val="lt1"/>
+          </a:fontRef>
+        </p:style>
+        <p:txBody>
+          <a:bodyPr rtlCol="0" anchor="ctr"/>
+          <a:lstStyle/>
+          <a:p>
+            <a:pPr algn="ctr"/>
+          </a:p>
+        </p:txBody>
+      </p:sp>
+      <p:sp>
+        <p:nvSpPr>
+          <p:cNvPr id="9" name="Rectangle 8"/>
+          <p:cNvSpPr/>
+          <p:nvPr/>
+        </p:nvSpPr>
+        <p:spPr>
+          <a:xfrm>
+            <a:off x="8595360" y="1188720"/>
+            <a:ext cx="73152" cy="5120640"/>
+          </a:xfrm>
+          <a:prstGeom prst="rect">
+            <a:avLst/>
+          </a:prstGeom>
+          <a:solidFill>
+            <a:srgbClr val="0078D4"/>
+          </a:solidFill>
+          <a:ln>
+            <a:noFill/>
+          </a:ln>
+          <a:effectLst/>
+        </p:spPr>
+        <p:style>
+          <a:lnRef idx="1">
+            <a:schemeClr val="accent1"/>
+          </a:lnRef>
+          <a:fillRef idx="3">
+            <a:schemeClr val="accent1"/>
+          </a:fillRef>
+          <a:effectRef idx="2">
+            <a:schemeClr val="accent1"/>
+          </a:effectRef>
+          <a:fontRef idx="minor">
+            <a:schemeClr val="lt1"/>
+          </a:fontRef>
+        </p:style>
+        <p:txBody>
+          <a:bodyPr rtlCol="0" anchor="ctr"/>
+          <a:lstStyle/>
+          <a:p>
+            <a:pPr algn="ctr"/>
+          </a:p>
+        </p:txBody>
+      </p:sp>
+      <p:sp>
+        <p:nvSpPr>
+          <p:cNvPr id="10" name="TextBox 9"/>
+          <p:cNvSpPr txBox="1"/>
+          <p:nvPr/>
+        </p:nvSpPr>
+        <p:spPr>
+          <a:xfrm>
+            <a:off x="8759952" y="1234440"/>
+            <a:ext cx="3154680" cy="5029200"/>
+          </a:xfrm>
+          <a:prstGeom prst="rect">
+            <a:avLst/>
+          </a:prstGeom>
+          <a:noFill/>
+        </p:spPr>
+        <p:txBody>
+          <a:bodyPr wrap="square" anchor="ctr" lIns="45720" rIns="45720">
+            <a:spAutoFit/>
+          </a:bodyPr>
+          <a:lstStyle/>
+          <a:p>
+            <a:pPr algn="l"/>
+            <a:r>
+              <a:rPr sz="1300" b="0" i="0">
+                <a:solidFill>
+                  <a:srgbClr val="212121"/>
+                </a:solidFill>
+                <a:latin typeface="Segoe UI"/>
+              </a:rPr>
+              <a:t>Coding tasks are almost never escalated; GPQA gets 40%+ escalation rate.</a:t>
+            </a:r>
+          </a:p>
+        </p:txBody>
+      </p:sp>
+    </p:spTree>
+  </p:cSld>
+  <p:clrMapOvr>
+    <a:masterClrMapping/>
+  </p:clrMapOvr>
+  <p:timing>
+    <p:tnLst>
+      <p:par>
+        <p:cTn id="1" dur="indefinite" restart="never" nodeType="tmRoot">
+          <p:childTnLst>
+            <p:seq concurrent="1" nextAc="seek">
+              <p:cTn id="2" dur="indefinite" nodeType="mainSeq">
+                <p:childTnLst>
+                  <p:par>
+                    <p:cTn id="100" fill="hold">
+                      <p:stCondLst>
+                        <p:cond delay="indefinite"/>
+                      </p:stCondLst>
+                      <p:childTnLst>
+                        <p:par>
+                          <p:cTn id="101" fill="hold">
+                            <p:stCondLst>
+                              <p:cond delay="0"/>
+                            </p:stCondLst>
+                            <p:childTnLst>
+                              <p:par>
+                                <p:cTn id="110" presetID="10" presetClass="entr" presetSubtype="0" fill="hold" grpId="0" nodeType="clickEffect">
+                                  <p:stCondLst>
+                                    <p:cond delay="0"/>
+                                  </p:stCondLst>
+                                  <p:childTnLst>
+                                    <p:set>
+                                      <p:cBhvr>
+                                        <p:cTn id="111" dur="1" fill="hold">
+                                          <p:stCondLst>
+                                            <p:cond delay="0"/>
+                                          </p:stCondLst>
+                                        </p:cTn>
+                                        <p:tgtEl>
+                                          <p:spTgt spid="7"/>
+                                        </p:tgtEl>
+                                        <p:attrNameLst>
+                                          <p:attrName>style.visibility</p:attrName>
+                                        </p:attrNameLst>
+                                      </p:cBhvr>
+                                      <p:to>
+                                        <p:strVal val="visible"/>
+                                      </p:to>
+                                    </p:set>
+                                    <p:anim calcmode="lin" valueType="num">
+                                      <p:cBhvr additive="base">
+                                        <p:cTn id="112" dur="500" fill="hold"/>
+                                        <p:tgtEl>
+                                          <p:spTgt spid="7"/>
+                                        </p:tgtEl>
+                                        <p:attrNameLst>
+                                          <p:attrName>style.opacity</p:attrName>
+                                        </p:attrNameLst>
+                                      </p:cBhvr>
+                                      <p:tavLst>
+                                        <p:tav tm="0">
+                                          <p:val>
+                                            <p:fltVal val="0"/>
+                                          </p:val>
+                                        </p:tav>
+                                        <p:tav tm="100000">
+                                          <p:val>
+                                            <p:fltVal val="1"/>
+                                          </p:val>
+                                        </p:tav>
+                                      </p:tavLst>
+                                    </p:anim>
+                                  </p:childTnLst>
+                                </p:cTn>
+                              </p:par>
+                            </p:childTnLst>
+                          </p:cTn>
+                        </p:par>
+                      </p:childTnLst>
+                    </p:cTn>
+                  </p:par>
+                  <p:par>
+                    <p:cTn id="1100" fill="hold">
+                      <p:stCondLst>
+                        <p:cond delay="indefinite"/>
+                      </p:stCondLst>
+                      <p:childTnLst>
+                        <p:par>
+                          <p:cTn id="1101" fill="hold">
+                            <p:stCondLst>
+                              <p:cond delay="0"/>
+                            </p:stCondLst>
+                            <p:childTnLst>
+                              <p:par>
+                                <p:cTn id="1110" presetID="10" presetClass="entr" presetSubtype="0" fill="hold" grpId="0" nodeType="clickEffect">
+                                  <p:stCondLst>
+                                    <p:cond delay="0"/>
+                                  </p:stCondLst>
+                                  <p:childTnLst>
+                                    <p:set>
+                                      <p:cBhvr>
+                                        <p:cTn id="1111" dur="1" fill="hold">
+                                          <p:stCondLst>
+                                            <p:cond delay="0"/>
+                                          </p:stCondLst>
+                                        </p:cTn>
+                                        <p:tgtEl>
+                                          <p:spTgt spid="8"/>
+                                        </p:tgtEl>
+                                        <p:attrNameLst>
+                                          <p:attrName>style.visibility</p:attrName>
+                                        </p:attrNameLst>
+                                      </p:cBhvr>
+                                      <p:to>
+                                        <p:strVal val="visible"/>
+                                      </p:to>
+                                    </p:set>
+                                    <p:anim calcmode="lin" valueType="num">
+                                      <p:cBhvr additive="base">
+                                        <p:cTn id="1112" dur="500" fill="hold"/>
+                                        <p:tgtEl>
+                                          <p:spTgt spid="8"/>
+                                        </p:tgtEl>
+                                        <p:attrNameLst>
+                                          <p:attrName>style.opacity</p:attrName>
+                                        </p:attrNameLst>
+                                      </p:cBhvr>
+                                      <p:tavLst>
+                                        <p:tav tm="0">
+                                          <p:val>
+                                            <p:fltVal val="0"/>
+                                          </p:val>
+                                        </p:tav>
+                                        <p:tav tm="100000">
+                                          <p:val>
+                                            <p:fltVal val="1"/>
+                                          </p:val>
+                                        </p:tav>
+                                      </p:tavLst>
+                                    </p:anim>
+                                  </p:childTnLst>
+                                </p:cTn>
+                              </p:par>
+                              <p:par>
+                                <p:cTn id="1116" presetID="10" presetClass="entr" presetSubtype="0" fill="hold" grpId="0" nodeType="withEffect">
+                                  <p:stCondLst>
+                                    <p:cond delay="0"/>
+                                  </p:stCondLst>
+                                  <p:childTnLst>
+                                    <p:set>
+                                      <p:cBhvr>
+                                        <p:cTn id="1117" dur="1" fill="hold">
+                                          <p:stCondLst>
+                                            <p:cond delay="0"/>
+                                          </p:stCondLst>
+                                        </p:cTn>
+                                        <p:tgtEl>
+                                          <p:spTgt spid="9"/>
+                                        </p:tgtEl>
+                                        <p:attrNameLst>
+                                          <p:attrName>style.visibility</p:attrName>
+                                        </p:attrNameLst>
+                                      </p:cBhvr>
+                                      <p:to>
+                                        <p:strVal val="visible"/>
+                                      </p:to>
+                                    </p:set>
+                                    <p:anim calcmode="lin" valueType="num">
+                                      <p:cBhvr additive="base">
+                                        <p:cTn id="1118" dur="500" fill="hold"/>
+                                        <p:tgtEl>
+                                          <p:spTgt spid="9"/>
+                                        </p:tgtEl>
+                                        <p:attrNameLst>
+                                          <p:attrName>style.opacity</p:attrName>
+                                        </p:attrNameLst>
+                                      </p:cBhvr>
+                                      <p:tavLst>
+                                        <p:tav tm="0">
+                                          <p:val>
+                                            <p:fltVal val="0"/>
+                                          </p:val>
+                                        </p:tav>
+                                        <p:tav tm="100000">
+                                          <p:val>
+                                            <p:fltVal val="1"/>
+                                          </p:val>
+                                        </p:tav>
+                                      </p:tavLst>
+                                    </p:anim>
+                                  </p:childTnLst>
+                                </p:cTn>
+                              </p:par>
+                              <p:par>
+                                <p:cTn id="1122" presetID="10" presetClass="entr" presetSubtype="0" fill="hold" grpId="0" nodeType="withEffect">
+                                  <p:stCondLst>
+                                    <p:cond delay="0"/>
+                                  </p:stCondLst>
+                                  <p:childTnLst>
+                                    <p:set>
+                                      <p:cBhvr>
+                                        <p:cTn id="1123" dur="1" fill="hold">
+                                          <p:stCondLst>
+                                            <p:cond delay="0"/>
+                                          </p:stCondLst>
+                                        </p:cTn>
+                                        <p:tgtEl>
+                                          <p:spTgt spid="10"/>
+                                        </p:tgtEl>
+                                        <p:attrNameLst>
+                                          <p:attrName>style.visibility</p:attrName>
+                                        </p:attrNameLst>
+                                      </p:cBhvr>
+                                      <p:to>
+                                        <p:strVal val="visible"/>
+                                      </p:to>
+                                    </p:set>
+                                    <p:anim calcmode="lin" valueType="num">
+                                      <p:cBhvr additive="base">
+                                        <p:cTn id="1124" dur="500" fill="hold"/>
+                                        <p:tgtEl>
+                                          <p:spTgt spid="10"/>
+                                        </p:tgtEl>
+                                        <p:attrNameLst>
+                                          <p:attrName>style.opacity</p:attrName>
+                                        </p:attrNameLst>
+                                      </p:cBhvr>
+                                      <p:tavLst>
+                                        <p:tav tm="0">
+                                          <p:val>
+                                            <p:fltVal val="0"/>
+                                          </p:val>
+                                        </p:tav>
+                                        <p:tav tm="100000">
+                                          <p:val>
+                                            <p:fltVal val="1"/>
+                                          </p:val>
+                                        </p:tav>
+                                      </p:tavLst>
+                                    </p:anim>
+                                  </p:childTnLst>
+                                </p:cTn>
+                              </p:par>
+                            </p:childTnLst>
+                          </p:cTn>
+                        </p:par>
+                      </p:childTnLst>
+                    </p:cTn>
+                  </p:par>
+                </p:childTnLst>
+              </p:cTn>
+              <p:prevCondLst>
+                <p:cond evt="onPrev" delay="0">
+                  <p:tgtEl>
+                    <p:sldTgt/>
+                  </p:tgtEl>
+                </p:cond>
+              </p:prevCondLst>
+              <p:nextCondLst>
+                <p:cond evt="onNext" delay="0">
+                  <p:tgtEl>
+                    <p:sldTgt/>
+                  </p:tgtEl>
+                </p:cond>
+              </p:nextCondLst>
+            </p:seq>
+          </p:childTnLst>
+        </p:cTn>
+      </p:par>
+    </p:tnLst>
+    <p:bldLst>
+      <p:bldP spid="7" grpId="0"/>
+      <p:bldP spid="8" grpId="0"/>
+      <p:bldP spid="9" grpId="0"/>
+      <p:bldP spid="10" grpId="0"/>
+    </p:bldLst>
+  </p:timing>
+</p:sld>
+</file>
+
+<file path=ppt/slides/slide22.xml><?xml version="1.0" encoding="utf-8"?>
+<p:sld xmlns:a="http://schemas.openxmlformats.org/drawingml/2006/main" xmlns:p="http://schemas.openxmlformats.org/presentationml/2006/main" xmlns:r="http://schemas.openxmlformats.org/officeDocument/2006/relationships">
+  <p:cSld>
+    <p:spTree>
+      <p:nvGrpSpPr>
+        <p:cNvPr id="1" name=""/>
+        <p:cNvGrpSpPr/>
+        <p:nvPr/>
+      </p:nvGrpSpPr>
+      <p:grpSpPr/>
+      <p:sp>
+        <p:nvSpPr>
+          <p:cNvPr id="2" name="Rectangle 1"/>
+          <p:cNvSpPr/>
+          <p:nvPr/>
+        </p:nvSpPr>
+        <p:spPr>
+          <a:xfrm>
+            <a:off x="0" y="0"/>
+            <a:ext cx="12191695" cy="6858000"/>
+          </a:xfrm>
+          <a:prstGeom prst="rect">
+            <a:avLst/>
+          </a:prstGeom>
+          <a:solidFill>
+            <a:srgbClr val="FFFFFF"/>
+          </a:solidFill>
+          <a:ln>
+            <a:noFill/>
+          </a:ln>
+          <a:effectLst/>
+        </p:spPr>
+        <p:style>
+          <a:lnRef idx="1">
+            <a:schemeClr val="accent1"/>
+          </a:lnRef>
+          <a:fillRef idx="3">
+            <a:schemeClr val="accent1"/>
+          </a:fillRef>
+          <a:effectRef idx="2">
+            <a:schemeClr val="accent1"/>
+          </a:effectRef>
+          <a:fontRef idx="minor">
+            <a:schemeClr val="lt1"/>
+          </a:fontRef>
+        </p:style>
+        <p:txBody>
+          <a:bodyPr rtlCol="0" anchor="ctr"/>
+          <a:lstStyle/>
+          <a:p>
+            <a:pPr algn="ctr"/>
+          </a:p>
+        </p:txBody>
+      </p:sp>
+      <p:sp>
+        <p:nvSpPr>
+          <p:cNvPr id="3" name="Rectangle 2"/>
+          <p:cNvSpPr/>
+          <p:nvPr/>
+        </p:nvSpPr>
+        <p:spPr>
+          <a:xfrm>
+            <a:off x="0" y="0"/>
+            <a:ext cx="12191695" cy="868680"/>
+          </a:xfrm>
+          <a:prstGeom prst="rect">
+            <a:avLst/>
+          </a:prstGeom>
+          <a:solidFill>
+            <a:srgbClr val="0B1F4B"/>
+          </a:solidFill>
+          <a:ln>
+            <a:noFill/>
+          </a:ln>
+          <a:effectLst/>
+        </p:spPr>
+        <p:style>
+          <a:lnRef idx="1">
+            <a:schemeClr val="accent1"/>
+          </a:lnRef>
+          <a:fillRef idx="3">
+            <a:schemeClr val="accent1"/>
+          </a:fillRef>
+          <a:effectRef idx="2">
+            <a:schemeClr val="accent1"/>
+          </a:effectRef>
+          <a:fontRef idx="minor">
+            <a:schemeClr val="lt1"/>
+          </a:fontRef>
+        </p:style>
+        <p:txBody>
+          <a:bodyPr rtlCol="0" anchor="ctr"/>
+          <a:lstStyle/>
+          <a:p>
+            <a:pPr algn="ctr"/>
+          </a:p>
+        </p:txBody>
+      </p:sp>
+      <p:sp>
+        <p:nvSpPr>
+          <p:cNvPr id="4" name="Rectangle 3"/>
+          <p:cNvSpPr/>
+          <p:nvPr/>
+        </p:nvSpPr>
+        <p:spPr>
+          <a:xfrm>
+            <a:off x="0" y="868680"/>
+            <a:ext cx="12191695" cy="54864"/>
+          </a:xfrm>
+          <a:prstGeom prst="rect">
+            <a:avLst/>
+          </a:prstGeom>
+          <a:solidFill>
+            <a:srgbClr val="0078D4"/>
+          </a:solidFill>
+          <a:ln>
+            <a:noFill/>
+          </a:ln>
+          <a:effectLst/>
+        </p:spPr>
+        <p:style>
+          <a:lnRef idx="1">
+            <a:schemeClr val="accent1"/>
+          </a:lnRef>
+          <a:fillRef idx="3">
+            <a:schemeClr val="accent1"/>
+          </a:fillRef>
+          <a:effectRef idx="2">
+            <a:schemeClr val="accent1"/>
+          </a:effectRef>
+          <a:fontRef idx="minor">
+            <a:schemeClr val="lt1"/>
+          </a:fontRef>
+        </p:style>
+        <p:txBody>
+          <a:bodyPr rtlCol="0" anchor="ctr"/>
+          <a:lstStyle/>
+          <a:p>
+            <a:pPr algn="ctr"/>
+          </a:p>
+        </p:txBody>
+      </p:sp>
+      <p:sp>
+        <p:nvSpPr>
+          <p:cNvPr id="5" name="TextBox 4"/>
+          <p:cNvSpPr txBox="1"/>
+          <p:nvPr/>
+        </p:nvSpPr>
+        <p:spPr>
+          <a:xfrm>
+            <a:off x="457200" y="137160"/>
+            <a:ext cx="10058400" cy="640080"/>
+          </a:xfrm>
+          <a:prstGeom prst="rect">
+            <a:avLst/>
+          </a:prstGeom>
+          <a:noFill/>
+        </p:spPr>
+        <p:txBody>
+          <a:bodyPr wrap="square" lIns="45720" rIns="45720" tIns="18288" bIns="18288" anchor="ctr">
+            <a:spAutoFit/>
+          </a:bodyPr>
+          <a:lstStyle/>
+          <a:p>
+            <a:pPr algn="l"/>
+            <a:r>
+              <a:rPr sz="2600" b="1" i="0">
+                <a:solidFill>
+                  <a:srgbClr val="FFFFFF"/>
+                </a:solidFill>
+                <a:latin typeface="Segoe UI"/>
+              </a:rPr>
+              <a:t>Per-Dataset Decision Maps</a:t>
+            </a:r>
+          </a:p>
+        </p:txBody>
+      </p:sp>
+      <p:sp>
+        <p:nvSpPr>
+          <p:cNvPr id="6" name="TextBox 5"/>
+          <p:cNvSpPr txBox="1"/>
+          <p:nvPr/>
+        </p:nvSpPr>
+        <p:spPr>
+          <a:xfrm>
+            <a:off x="457200" y="6446520"/>
+            <a:ext cx="5486400" cy="320040"/>
+          </a:xfrm>
+          <a:prstGeom prst="rect">
+            <a:avLst/>
+          </a:prstGeom>
+          <a:noFill/>
+        </p:spPr>
+        <p:txBody>
+          <a:bodyPr wrap="square" lIns="45720" rIns="45720" tIns="18288" bIns="18288" anchor="t">
+            <a:spAutoFit/>
+          </a:bodyPr>
+          <a:lstStyle/>
+          <a:p>
+            <a:pPr algn="l"/>
+            <a:r>
+              <a:rPr sz="1100" b="0" i="1">
+                <a:solidFill>
+                  <a:srgbClr val="605E5C"/>
+                </a:solidFill>
+                <a:latin typeface="Segoe UI"/>
+              </a:rPr>
+              <a:t>BACKUP  •  B4</a:t>
+            </a:r>
+          </a:p>
+        </p:txBody>
+      </p:sp>
+      <p:pic>
+        <p:nvPicPr>
+          <p:cNvPr id="7" name="Picture 6" descr="chartUNI_unified_best_strategy_heatmap_per_dataset.png"/>
+          <p:cNvPicPr>
+            <a:picLocks noChangeAspect="1"/>
+          </p:cNvPicPr>
+          <p:nvPr/>
+        </p:nvPicPr>
+        <p:blipFill>
+          <a:blip r:embed="rId2"/>
+          <a:stretch>
+            <a:fillRect/>
+          </a:stretch>
+        </p:blipFill>
+        <p:spPr>
+          <a:xfrm>
+            <a:off x="457200" y="1605873"/>
+            <a:ext cx="7955279" cy="4377774"/>
+          </a:xfrm>
+          <a:prstGeom prst="rect">
+            <a:avLst/>
+          </a:prstGeom>
+        </p:spPr>
+      </p:pic>
+      <p:sp>
+        <p:nvSpPr>
+          <p:cNvPr id="8" name="Rectangle 7"/>
+          <p:cNvSpPr/>
+          <p:nvPr/>
+        </p:nvSpPr>
+        <p:spPr>
+          <a:xfrm>
+            <a:off x="8595360" y="1188720"/>
+            <a:ext cx="3383280" cy="5120640"/>
+          </a:xfrm>
+          <a:prstGeom prst="rect">
+            <a:avLst/>
+          </a:prstGeom>
+          <a:solidFill>
+            <a:srgbClr val="EBF4FF"/>
+          </a:solidFill>
+          <a:ln w="9525">
+            <a:solidFill>
+              <a:srgbClr val="0078D4"/>
+            </a:solidFill>
+          </a:ln>
+          <a:effectLst/>
+        </p:spPr>
+        <p:style>
+          <a:lnRef idx="1">
+            <a:schemeClr val="accent1"/>
+          </a:lnRef>
+          <a:fillRef idx="3">
+            <a:schemeClr val="accent1"/>
+          </a:fillRef>
+          <a:effectRef idx="2">
+            <a:schemeClr val="accent1"/>
+          </a:effectRef>
+          <a:fontRef idx="minor">
+            <a:schemeClr val="lt1"/>
+          </a:fontRef>
+        </p:style>
+        <p:txBody>
+          <a:bodyPr rtlCol="0" anchor="ctr"/>
+          <a:lstStyle/>
+          <a:p>
+            <a:pPr algn="ctr"/>
+          </a:p>
+        </p:txBody>
+      </p:sp>
+      <p:sp>
+        <p:nvSpPr>
+          <p:cNvPr id="9" name="Rectangle 8"/>
+          <p:cNvSpPr/>
+          <p:nvPr/>
+        </p:nvSpPr>
+        <p:spPr>
+          <a:xfrm>
+            <a:off x="8595360" y="1188720"/>
+            <a:ext cx="73152" cy="5120640"/>
+          </a:xfrm>
+          <a:prstGeom prst="rect">
+            <a:avLst/>
+          </a:prstGeom>
+          <a:solidFill>
+            <a:srgbClr val="0078D4"/>
+          </a:solidFill>
+          <a:ln>
+            <a:noFill/>
+          </a:ln>
+          <a:effectLst/>
+        </p:spPr>
+        <p:style>
+          <a:lnRef idx="1">
+            <a:schemeClr val="accent1"/>
+          </a:lnRef>
+          <a:fillRef idx="3">
+            <a:schemeClr val="accent1"/>
+          </a:fillRef>
+          <a:effectRef idx="2">
+            <a:schemeClr val="accent1"/>
+          </a:effectRef>
+          <a:fontRef idx="minor">
+            <a:schemeClr val="lt1"/>
+          </a:fontRef>
+        </p:style>
+        <p:txBody>
+          <a:bodyPr rtlCol="0" anchor="ctr"/>
+          <a:lstStyle/>
+          <a:p>
+            <a:pPr algn="ctr"/>
+          </a:p>
+        </p:txBody>
+      </p:sp>
+      <p:sp>
+        <p:nvSpPr>
+          <p:cNvPr id="10" name="TextBox 9"/>
+          <p:cNvSpPr txBox="1"/>
+          <p:nvPr/>
+        </p:nvSpPr>
+        <p:spPr>
+          <a:xfrm>
+            <a:off x="8759952" y="1234440"/>
+            <a:ext cx="3154680" cy="5029200"/>
+          </a:xfrm>
+          <a:prstGeom prst="rect">
+            <a:avLst/>
+          </a:prstGeom>
+          <a:noFill/>
+        </p:spPr>
+        <p:txBody>
+          <a:bodyPr wrap="square" anchor="ctr" lIns="45720" rIns="45720">
+            <a:spAutoFit/>
+          </a:bodyPr>
+          <a:lstStyle/>
+          <a:p>
+            <a:pPr algn="l"/>
+            <a:r>
+              <a:rPr sz="1300" b="0" i="0">
+                <a:solidFill>
+                  <a:srgbClr val="212121"/>
+                </a:solidFill>
+                <a:latin typeface="Segoe UI"/>
+              </a:rPr>
+              <a:t>Winner per (λ_error, λ_latency) cell, broken down by dataset. Shows that the best strategy is not uniform across benchmarks — e.g. coding tasks favor the small model almost everywhere, while GPQA and MMLU-Pro give the Router and the large models more room.</a:t>
+            </a:r>
+          </a:p>
+        </p:txBody>
+      </p:sp>
+    </p:spTree>
+  </p:cSld>
+  <p:clrMapOvr>
+    <a:masterClrMapping/>
+  </p:clrMapOvr>
+  <p:timing>
+    <p:tnLst>
+      <p:par>
+        <p:cTn id="1" dur="indefinite" restart="never" nodeType="tmRoot">
+          <p:childTnLst>
+            <p:seq concurrent="1" nextAc="seek">
+              <p:cTn id="2" dur="indefinite" nodeType="mainSeq">
+                <p:childTnLst>
+                  <p:par>
+                    <p:cTn id="100" fill="hold">
+                      <p:stCondLst>
+                        <p:cond delay="indefinite"/>
+                      </p:stCondLst>
+                      <p:childTnLst>
+                        <p:par>
+                          <p:cTn id="101" fill="hold">
+                            <p:stCondLst>
+                              <p:cond delay="0"/>
+                            </p:stCondLst>
+                            <p:childTnLst>
+                              <p:par>
+                                <p:cTn id="110" presetID="10" presetClass="entr" presetSubtype="0" fill="hold" grpId="0" nodeType="clickEffect">
+                                  <p:stCondLst>
+                                    <p:cond delay="0"/>
+                                  </p:stCondLst>
+                                  <p:childTnLst>
+                                    <p:set>
+                                      <p:cBhvr>
+                                        <p:cTn id="111" dur="1" fill="hold">
+                                          <p:stCondLst>
+                                            <p:cond delay="0"/>
+                                          </p:stCondLst>
+                                        </p:cTn>
+                                        <p:tgtEl>
+                                          <p:spTgt spid="7"/>
+                                        </p:tgtEl>
+                                        <p:attrNameLst>
+                                          <p:attrName>style.visibility</p:attrName>
+                                        </p:attrNameLst>
+                                      </p:cBhvr>
+                                      <p:to>
+                                        <p:strVal val="visible"/>
+                                      </p:to>
+                                    </p:set>
+                                    <p:anim calcmode="lin" valueType="num">
+                                      <p:cBhvr additive="base">
+                                        <p:cTn id="112" dur="500" fill="hold"/>
+                                        <p:tgtEl>
+                                          <p:spTgt spid="7"/>
+                                        </p:tgtEl>
+                                        <p:attrNameLst>
+                                          <p:attrName>style.opacity</p:attrName>
+                                        </p:attrNameLst>
+                                      </p:cBhvr>
+                                      <p:tavLst>
+                                        <p:tav tm="0">
+                                          <p:val>
+                                            <p:fltVal val="0"/>
+                                          </p:val>
+                                        </p:tav>
+                                        <p:tav tm="100000">
+                                          <p:val>
+                                            <p:fltVal val="1"/>
+                                          </p:val>
+                                        </p:tav>
+                                      </p:tavLst>
+                                    </p:anim>
+                                  </p:childTnLst>
+                                </p:cTn>
+                              </p:par>
+                            </p:childTnLst>
+                          </p:cTn>
+                        </p:par>
+                      </p:childTnLst>
+                    </p:cTn>
+                  </p:par>
+                  <p:par>
+                    <p:cTn id="1100" fill="hold">
+                      <p:stCondLst>
+                        <p:cond delay="indefinite"/>
+                      </p:stCondLst>
+                      <p:childTnLst>
+                        <p:par>
+                          <p:cTn id="1101" fill="hold">
+                            <p:stCondLst>
+                              <p:cond delay="0"/>
+                            </p:stCondLst>
+                            <p:childTnLst>
+                              <p:par>
+                                <p:cTn id="1110" presetID="10" presetClass="entr" presetSubtype="0" fill="hold" grpId="0" nodeType="clickEffect">
+                                  <p:stCondLst>
+                                    <p:cond delay="0"/>
+                                  </p:stCondLst>
+                                  <p:childTnLst>
+                                    <p:set>
+                                      <p:cBhvr>
+                                        <p:cTn id="1111" dur="1" fill="hold">
+                                          <p:stCondLst>
+                                            <p:cond delay="0"/>
+                                          </p:stCondLst>
+                                        </p:cTn>
+                                        <p:tgtEl>
+                                          <p:spTgt spid="8"/>
+                                        </p:tgtEl>
+                                        <p:attrNameLst>
+                                          <p:attrName>style.visibility</p:attrName>
+                                        </p:attrNameLst>
+                                      </p:cBhvr>
+                                      <p:to>
+                                        <p:strVal val="visible"/>
+                                      </p:to>
+                                    </p:set>
+                                    <p:anim calcmode="lin" valueType="num">
+                                      <p:cBhvr additive="base">
+                                        <p:cTn id="1112" dur="500" fill="hold"/>
+                                        <p:tgtEl>
+                                          <p:spTgt spid="8"/>
+                                        </p:tgtEl>
+                                        <p:attrNameLst>
+                                          <p:attrName>style.opacity</p:attrName>
+                                        </p:attrNameLst>
+                                      </p:cBhvr>
+                                      <p:tavLst>
+                                        <p:tav tm="0">
+                                          <p:val>
+                                            <p:fltVal val="0"/>
+                                          </p:val>
+                                        </p:tav>
+                                        <p:tav tm="100000">
+                                          <p:val>
+                                            <p:fltVal val="1"/>
+                                          </p:val>
+                                        </p:tav>
+                                      </p:tavLst>
+                                    </p:anim>
+                                  </p:childTnLst>
+                                </p:cTn>
+                              </p:par>
+                              <p:par>
+                                <p:cTn id="1116" presetID="10" presetClass="entr" presetSubtype="0" fill="hold" grpId="0" nodeType="withEffect">
+                                  <p:stCondLst>
+                                    <p:cond delay="0"/>
+                                  </p:stCondLst>
+                                  <p:childTnLst>
+                                    <p:set>
+                                      <p:cBhvr>
+                                        <p:cTn id="1117" dur="1" fill="hold">
+                                          <p:stCondLst>
+                                            <p:cond delay="0"/>
+                                          </p:stCondLst>
+                                        </p:cTn>
+                                        <p:tgtEl>
+                                          <p:spTgt spid="9"/>
+                                        </p:tgtEl>
+                                        <p:attrNameLst>
+                                          <p:attrName>style.visibility</p:attrName>
+                                        </p:attrNameLst>
+                                      </p:cBhvr>
+                                      <p:to>
+                                        <p:strVal val="visible"/>
+                                      </p:to>
+                                    </p:set>
+                                    <p:anim calcmode="lin" valueType="num">
+                                      <p:cBhvr additive="base">
+                                        <p:cTn id="1118" dur="500" fill="hold"/>
+                                        <p:tgtEl>
+                                          <p:spTgt spid="9"/>
+                                        </p:tgtEl>
+                                        <p:attrNameLst>
+                                          <p:attrName>style.opacity</p:attrName>
+                                        </p:attrNameLst>
+                                      </p:cBhvr>
+                                      <p:tavLst>
+                                        <p:tav tm="0">
+                                          <p:val>
+                                            <p:fltVal val="0"/>
+                                          </p:val>
+                                        </p:tav>
+                                        <p:tav tm="100000">
+                                          <p:val>
+                                            <p:fltVal val="1"/>
+                                          </p:val>
+                                        </p:tav>
+                                      </p:tavLst>
+                                    </p:anim>
+                                  </p:childTnLst>
+                                </p:cTn>
+                              </p:par>
+                              <p:par>
+                                <p:cTn id="1122" presetID="10" presetClass="entr" presetSubtype="0" fill="hold" grpId="0" nodeType="withEffect">
+                                  <p:stCondLst>
+                                    <p:cond delay="0"/>
+                                  </p:stCondLst>
+                                  <p:childTnLst>
+                                    <p:set>
+                                      <p:cBhvr>
+                                        <p:cTn id="1123" dur="1" fill="hold">
+                                          <p:stCondLst>
+                                            <p:cond delay="0"/>
+                                          </p:stCondLst>
+                                        </p:cTn>
+                                        <p:tgtEl>
+                                          <p:spTgt spid="10"/>
+                                        </p:tgtEl>
+                                        <p:attrNameLst>
+                                          <p:attrName>style.visibility</p:attrName>
+                                        </p:attrNameLst>
+                                      </p:cBhvr>
+                                      <p:to>
+                                        <p:strVal val="visible"/>
+                                      </p:to>
+                                    </p:set>
+                                    <p:anim calcmode="lin" valueType="num">
+                                      <p:cBhvr additive="base">
+                                        <p:cTn id="1124" dur="500" fill="hold"/>
+                                        <p:tgtEl>
+                                          <p:spTgt spid="10"/>
+                                        </p:tgtEl>
+                                        <p:attrNameLst>
+                                          <p:attrName>style.opacity</p:attrName>
+                                        </p:attrNameLst>
+                                      </p:cBhvr>
+                                      <p:tavLst>
+                                        <p:tav tm="0">
+                                          <p:val>
+                                            <p:fltVal val="0"/>
+                                          </p:val>
+                                        </p:tav>
+                                        <p:tav tm="100000">
+                                          <p:val>
+                                            <p:fltVal val="1"/>
+                                          </p:val>
+                                        </p:tav>
+                                      </p:tavLst>
+                                    </p:anim>
+                                  </p:childTnLst>
+                                </p:cTn>
+                              </p:par>
+                            </p:childTnLst>
+                          </p:cTn>
+                        </p:par>
+                      </p:childTnLst>
+                    </p:cTn>
+                  </p:par>
+                </p:childTnLst>
+              </p:cTn>
+              <p:prevCondLst>
+                <p:cond evt="onPrev" delay="0">
+                  <p:tgtEl>
+                    <p:sldTgt/>
+                  </p:tgtEl>
+                </p:cond>
+              </p:prevCondLst>
+              <p:nextCondLst>
+                <p:cond evt="onNext" delay="0">
+                  <p:tgtEl>
+                    <p:sldTgt/>
+                  </p:tgtEl>
+                </p:cond>
+              </p:nextCondLst>
+            </p:seq>
+          </p:childTnLst>
+        </p:cTn>
+      </p:par>
+    </p:tnLst>
+    <p:bldLst>
+      <p:bldP spid="7" grpId="0"/>
+      <p:bldP spid="8" grpId="0"/>
+      <p:bldP spid="9" grpId="0"/>
+      <p:bldP spid="10" grpId="0"/>
+    </p:bldLst>
+  </p:timing>
+</p:sld>
+</file>
+
+<file path=ppt/slides/slide23.xml><?xml version="1.0" encoding="utf-8"?>
+<p:sld xmlns:a="http://schemas.openxmlformats.org/drawingml/2006/main" xmlns:p="http://schemas.openxmlformats.org/presentationml/2006/main" xmlns:r="http://schemas.openxmlformats.org/officeDocument/2006/relationships">
+  <p:cSld>
+    <p:spTree>
+      <p:nvGrpSpPr>
+        <p:cNvPr id="1" name=""/>
+        <p:cNvGrpSpPr/>
+        <p:nvPr/>
+      </p:nvGrpSpPr>
+      <p:grpSpPr/>
+      <p:sp>
+        <p:nvSpPr>
+          <p:cNvPr id="2" name="Rectangle 1"/>
+          <p:cNvSpPr/>
+          <p:nvPr/>
+        </p:nvSpPr>
+        <p:spPr>
+          <a:xfrm>
+            <a:off x="0" y="0"/>
+            <a:ext cx="12191695" cy="6858000"/>
+          </a:xfrm>
+          <a:prstGeom prst="rect">
+            <a:avLst/>
+          </a:prstGeom>
+          <a:solidFill>
+            <a:srgbClr val="FFFFFF"/>
+          </a:solidFill>
+          <a:ln>
+            <a:noFill/>
+          </a:ln>
+          <a:effectLst/>
+        </p:spPr>
+        <p:style>
+          <a:lnRef idx="1">
+            <a:schemeClr val="accent1"/>
+          </a:lnRef>
+          <a:fillRef idx="3">
+            <a:schemeClr val="accent1"/>
+          </a:fillRef>
+          <a:effectRef idx="2">
+            <a:schemeClr val="accent1"/>
+          </a:effectRef>
+          <a:fontRef idx="minor">
+            <a:schemeClr val="lt1"/>
+          </a:fontRef>
+        </p:style>
+        <p:txBody>
+          <a:bodyPr rtlCol="0" anchor="ctr"/>
+          <a:lstStyle/>
+          <a:p>
+            <a:pPr algn="ctr"/>
+          </a:p>
+        </p:txBody>
+      </p:sp>
+      <p:sp>
+        <p:nvSpPr>
+          <p:cNvPr id="3" name="Rectangle 2"/>
+          <p:cNvSpPr/>
+          <p:nvPr/>
+        </p:nvSpPr>
+        <p:spPr>
+          <a:xfrm>
+            <a:off x="0" y="0"/>
+            <a:ext cx="12191695" cy="868680"/>
+          </a:xfrm>
+          <a:prstGeom prst="rect">
+            <a:avLst/>
+          </a:prstGeom>
+          <a:solidFill>
+            <a:srgbClr val="0B1F4B"/>
+          </a:solidFill>
+          <a:ln>
+            <a:noFill/>
+          </a:ln>
+          <a:effectLst/>
+        </p:spPr>
+        <p:style>
+          <a:lnRef idx="1">
+            <a:schemeClr val="accent1"/>
+          </a:lnRef>
+          <a:fillRef idx="3">
+            <a:schemeClr val="accent1"/>
+          </a:fillRef>
+          <a:effectRef idx="2">
+            <a:schemeClr val="accent1"/>
+          </a:effectRef>
+          <a:fontRef idx="minor">
+            <a:schemeClr val="lt1"/>
+          </a:fontRef>
+        </p:style>
+        <p:txBody>
+          <a:bodyPr rtlCol="0" anchor="ctr"/>
+          <a:lstStyle/>
+          <a:p>
+            <a:pPr algn="ctr"/>
+          </a:p>
+        </p:txBody>
+      </p:sp>
+      <p:sp>
+        <p:nvSpPr>
+          <p:cNvPr id="4" name="Rectangle 3"/>
+          <p:cNvSpPr/>
+          <p:nvPr/>
+        </p:nvSpPr>
+        <p:spPr>
+          <a:xfrm>
+            <a:off x="0" y="868680"/>
+            <a:ext cx="12191695" cy="54864"/>
+          </a:xfrm>
+          <a:prstGeom prst="rect">
+            <a:avLst/>
+          </a:prstGeom>
+          <a:solidFill>
+            <a:srgbClr val="0078D4"/>
+          </a:solidFill>
+          <a:ln>
+            <a:noFill/>
+          </a:ln>
+          <a:effectLst/>
+        </p:spPr>
+        <p:style>
+          <a:lnRef idx="1">
+            <a:schemeClr val="accent1"/>
+          </a:lnRef>
+          <a:fillRef idx="3">
+            <a:schemeClr val="accent1"/>
+          </a:fillRef>
+          <a:effectRef idx="2">
+            <a:schemeClr val="accent1"/>
+          </a:effectRef>
+          <a:fontRef idx="minor">
+            <a:schemeClr val="lt1"/>
+          </a:fontRef>
+        </p:style>
+        <p:txBody>
+          <a:bodyPr rtlCol="0" anchor="ctr"/>
+          <a:lstStyle/>
+          <a:p>
+            <a:pPr algn="ctr"/>
+          </a:p>
+        </p:txBody>
+      </p:sp>
+      <p:sp>
+        <p:nvSpPr>
+          <p:cNvPr id="5" name="TextBox 4"/>
+          <p:cNvSpPr txBox="1"/>
+          <p:nvPr/>
+        </p:nvSpPr>
+        <p:spPr>
+          <a:xfrm>
+            <a:off x="457200" y="137160"/>
+            <a:ext cx="10058400" cy="640080"/>
+          </a:xfrm>
+          <a:prstGeom prst="rect">
+            <a:avLst/>
+          </a:prstGeom>
+          <a:noFill/>
+        </p:spPr>
+        <p:txBody>
+          <a:bodyPr wrap="square" lIns="45720" rIns="45720" tIns="18288" bIns="18288" anchor="ctr">
+            <a:spAutoFit/>
+          </a:bodyPr>
+          <a:lstStyle/>
+          <a:p>
+            <a:pPr algn="l"/>
+            <a:r>
+              <a:rPr sz="2600" b="1" i="0">
+                <a:solidFill>
+                  <a:srgbClr val="FFFFFF"/>
+                </a:solidFill>
+                <a:latin typeface="Segoe UI"/>
+              </a:rPr>
               <a:t>Reward Formula: Full Detail</a:t>
             </a:r>
           </a:p>
@@ -20297,7 +24149,7 @@
                 </a:solidFill>
                 <a:latin typeface="Segoe UI"/>
               </a:rPr>
-              <a:t>3 / 15</a:t>
+              <a:t>3 / 16</a:t>
             </a:r>
           </a:p>
         </p:txBody>
@@ -22092,7 +25944,7 @@
                 </a:solidFill>
                 <a:latin typeface="Segoe UI"/>
               </a:rPr>
-              <a:t>4 / 15</a:t>
+              <a:t>4 / 16</a:t>
             </a:r>
           </a:p>
         </p:txBody>
@@ -22490,7 +26342,7 @@
                 </a:solidFill>
                 <a:latin typeface="Segoe UI"/>
               </a:rPr>
-              <a:t>HumanEval · MBPP · MMLU-Pro · GPQA · GSM8K</a:t>
+              <a:t>HumanEval (Python coding) · MBPP (Python coding) · MMLU-Pro (multi-subject multiple-choice) · GPQA (graduate-level science Q&amp;A) · GSM8K (grade-school math word problems)</a:t>
             </a:r>
           </a:p>
         </p:txBody>
@@ -24009,7 +27861,7 @@
                 </a:solidFill>
                 <a:latin typeface="Segoe UI"/>
               </a:rPr>
-              <a:t>5 / 15</a:t>
+              <a:t>5 / 16</a:t>
             </a:r>
           </a:p>
         </p:txBody>
@@ -25708,7 +29560,7 @@
                 </a:solidFill>
                 <a:latin typeface="Segoe UI"/>
               </a:rPr>
-              <a:t>6 / 15</a:t>
+              <a:t>6 / 16</a:t>
             </a:r>
           </a:p>
         </p:txBody>
@@ -26611,7 +30463,7 @@
                 </a:solidFill>
                 <a:latin typeface="Segoe UI"/>
               </a:rPr>
-              <a:t>Cost vs. Accuracy: 770× Difference</a:t>
+              <a:t>Cost vs. Accuracy: ~20× Gap at the Pareto Frontier</a:t>
             </a:r>
           </a:p>
         </p:txBody>
@@ -26646,7 +30498,7 @@
                 </a:solidFill>
                 <a:latin typeface="Segoe UI"/>
               </a:rPr>
-              <a:t>7 / 15</a:t>
+              <a:t>7 / 16</a:t>
             </a:r>
           </a:p>
         </p:txBody>
@@ -27584,7 +31436,7 @@
                 </a:solidFill>
                 <a:latin typeface="Segoe UI"/>
               </a:rPr>
-              <a:t>8 / 15</a:t>
+              <a:t>8 / 16</a:t>
             </a:r>
           </a:p>
         </p:txBody>
@@ -28226,7 +32078,7 @@
                 </a:solidFill>
                 <a:latin typeface="Segoe UI"/>
               </a:rPr>
-              <a:t>9 / 15</a:t>
+              <a:t>9 / 16</a:t>
             </a:r>
           </a:p>
         </p:txBody>
